--- a/docs/QA_Requirement_Assistant_Presentation.pptx
+++ b/docs/QA_Requirement_Assistant_Presentation.pptx
@@ -12,6 +12,11 @@
     <p:sldId id="260" r:id="rId11"/>
     <p:sldId id="261" r:id="rId12"/>
     <p:sldId id="262" r:id="rId13"/>
+    <p:sldId id="263" r:id="rId14"/>
+    <p:sldId id="264" r:id="rId15"/>
+    <p:sldId id="265" r:id="rId16"/>
+    <p:sldId id="266" r:id="rId17"/>
+    <p:sldId id="267" r:id="rId18"/>
   </p:sldIdLst>
   <p:sldSz cx="12191695" cy="6858000" type="screen4x3"/>
   <p:notesSz cx="6858000" cy="9144000"/>
@@ -3109,7 +3114,7 @@
             <a:avLst/>
           </a:prstGeom>
           <a:solidFill>
-            <a:srgbClr val="0F172A"/>
+            <a:srgbClr val="F8FAFC"/>
           </a:solidFill>
           <a:ln>
             <a:noFill/>
@@ -3146,7 +3151,7 @@
         <p:spPr>
           <a:xfrm>
             <a:off x="0" y="0"/>
-            <a:ext cx="12191695" cy="182880"/>
+            <a:ext cx="12191695" cy="137160"/>
           </a:xfrm>
           <a:prstGeom prst="rect">
             <a:avLst/>
@@ -3188,8 +3193,8 @@
         </p:nvSpPr>
         <p:spPr>
           <a:xfrm>
-            <a:off x="1097280" y="1371600"/>
-            <a:ext cx="10058400" cy="4114800"/>
+            <a:off x="731520" y="502920"/>
+            <a:ext cx="10698480" cy="1645920"/>
           </a:xfrm>
           <a:prstGeom prst="rect">
             <a:avLst/>
@@ -3204,62 +3209,47 @@
           <a:p>
             <a:pPr>
               <a:spcAft>
-                <a:spcPts val="1400"/>
-              </a:spcAft>
-              <a:defRPr sz="1300" b="1">
-                <a:solidFill>
-                  <a:srgbClr val="1677FF"/>
-                </a:solidFill>
-              </a:defRPr>
-            </a:pPr>
-            <a:r>
-              <a:t>CHIẾN LƯỢC ỨNG DỤNG AI TRONG KIỂM THỬ PHẦN MỀM (AI-DRIVEN QA LEAD)</a:t>
-            </a:r>
-          </a:p>
-          <a:p>
-            <a:pPr>
-              <a:spcAft>
-                <a:spcPts val="1800"/>
-              </a:spcAft>
-              <a:defRPr sz="3000" b="1">
-                <a:solidFill>
-                  <a:srgbClr val="FFFFFF"/>
-                </a:solidFill>
-              </a:defRPr>
-            </a:pPr>
-            <a:r>
-              <a:t>Tối Ưu Năng Suất (Effort) &amp; Đảm Bảo Tính Đúng Đắn</a:t>
+                <a:spcPts val="400"/>
+              </a:spcAft>
+              <a:defRPr sz="1050" b="1">
+                <a:solidFill>
+                  <a:srgbClr val="0958D9"/>
+                </a:solidFill>
+              </a:defRPr>
+            </a:pPr>
+            <a:r>
+              <a:t>CHIẾN LƯỢC ỨNG DỤNG AI TRONG KIỂM THỬ (AI-DRIVEN QA SYSTEM)</a:t>
+            </a:r>
+          </a:p>
+          <a:p>
+            <a:pPr>
+              <a:spcAft>
+                <a:spcPts val="400"/>
+              </a:spcAft>
+              <a:defRPr sz="2400" b="1">
+                <a:solidFill>
+                  <a:srgbClr val="1E293B"/>
+                </a:solidFill>
+              </a:defRPr>
+            </a:pPr>
+            <a:r>
+              <a:t>QA REQUIREMENT &amp; RISK ASSISTANT</a:t>
             </a:r>
             <a:br/>
             <a:r>
-              <a:t>Bộ Dữ Liệu QA Bằng Tác Tử AI Trong 3 Tháng</a:t>
-            </a:r>
-          </a:p>
-          <a:p>
-            <a:pPr>
-              <a:spcAft>
-                <a:spcPts val="3600"/>
-              </a:spcAft>
-              <a:defRPr sz="1500">
-                <a:solidFill>
-                  <a:srgbClr val="94A3B8"/>
-                </a:solidFill>
-              </a:defRPr>
-            </a:pPr>
-            <a:r>
-              <a:t>Mô hình thực chiến: Antigravity Native Plugin • 2-Phase State Machine • 3 Tầng Kiểm Chứng Sâu</a:t>
-            </a:r>
-          </a:p>
-          <a:p>
-            <a:pPr>
-              <a:defRPr sz="1300">
-                <a:solidFill>
-                  <a:srgbClr val="CBD5E1"/>
-                </a:solidFill>
-              </a:defRPr>
-            </a:pPr>
-            <a:r>
-              <a:t>Ứng viên: Vũ Thị Mai Linh  |  Vị trí: AI QA Specialist / Senior QA Engineer  |  Tháng 10/2026</a:t>
+              <a:t>Hệ Tác Tử Tự Động Phân Tích Yêu Cầu &amp; Thiết Kế Kiểm Thử Thực Chiến</a:t>
+            </a:r>
+          </a:p>
+          <a:p>
+            <a:pPr>
+              <a:defRPr sz="1200">
+                <a:solidFill>
+                  <a:srgbClr val="64748B"/>
+                </a:solidFill>
+              </a:defRPr>
+            </a:pPr>
+            <a:r>
+              <a:t>Chuyển hóa tài liệu yêu cầu thô thành Test Suite chuẩn 3 tầng UI/API/DB • Chặn đứng lỗi sớm • Chuẩn hóa dữ liệu QA</a:t>
             </a:r>
           </a:p>
         </p:txBody>
@@ -3272,14 +3262,59 @@
         </p:nvSpPr>
         <p:spPr>
           <a:xfrm>
-            <a:off x="1097280" y="5120640"/>
-            <a:ext cx="9966960" cy="1097280"/>
+            <a:off x="731520" y="2331720"/>
+            <a:ext cx="10698480" cy="2377440"/>
           </a:xfrm>
           <a:prstGeom prst="roundRect">
             <a:avLst/>
           </a:prstGeom>
           <a:solidFill>
-            <a:srgbClr val="1E293B"/>
+            <a:srgbClr val="FFFFFF"/>
+          </a:solidFill>
+          <a:ln w="19050">
+            <a:solidFill>
+              <a:srgbClr val="CBD5E1"/>
+            </a:solidFill>
+          </a:ln>
+        </p:spPr>
+        <p:style>
+          <a:lnRef idx="1">
+            <a:schemeClr val="accent1"/>
+          </a:lnRef>
+          <a:fillRef idx="3">
+            <a:schemeClr val="accent1"/>
+          </a:fillRef>
+          <a:effectRef idx="2">
+            <a:schemeClr val="accent1"/>
+          </a:effectRef>
+          <a:fontRef idx="minor">
+            <a:schemeClr val="lt1"/>
+          </a:fontRef>
+        </p:style>
+        <p:txBody>
+          <a:bodyPr rtlCol="0" anchor="ctr"/>
+          <a:lstStyle/>
+          <a:p>
+            <a:pPr algn="ctr"/>
+          </a:p>
+        </p:txBody>
+      </p:sp>
+      <p:sp>
+        <p:nvSpPr>
+          <p:cNvPr id="6" name="Rounded Rectangle 5"/>
+          <p:cNvSpPr/>
+          <p:nvPr/>
+        </p:nvSpPr>
+        <p:spPr>
+          <a:xfrm>
+            <a:off x="914400" y="2514600"/>
+            <a:ext cx="5029200" cy="2011680"/>
+          </a:xfrm>
+          <a:prstGeom prst="roundRect">
+            <a:avLst/>
+          </a:prstGeom>
+          <a:solidFill>
+            <a:srgbClr val="E6F4FF"/>
           </a:solidFill>
           <a:ln w="19050">
             <a:solidFill>
@@ -3306,26 +3341,2303 @@
           <a:lstStyle/>
           <a:p>
             <a:pPr algn="ctr">
+              <a:spcAft>
+                <a:spcPts val="600"/>
+              </a:spcAft>
               <a:defRPr sz="1100" b="1">
                 <a:solidFill>
+                  <a:srgbClr val="0958D9"/>
+                </a:solidFill>
+              </a:defRPr>
+            </a:pPr>
+            <a:r>
+              <a:t>🤖 HỆ THỐNG ĐANG LÀM GÌ? (WHAT IT DOES)</a:t>
+            </a:r>
+          </a:p>
+          <a:p>
+            <a:pPr>
+              <a:spcAft>
+                <a:spcPts val="300"/>
+              </a:spcAft>
+              <a:defRPr sz="950">
+                <a:solidFill>
+                  <a:srgbClr val="1E293B"/>
+                </a:solidFill>
+              </a:defRPr>
+            </a:pPr>
+            <a:r>
+              <a:t>• Tiếp nhận tài liệu thô: User Story, PRD, API Swagger chưa rõ nét hoặc thiếu kịch bản biên.</a:t>
+            </a:r>
+          </a:p>
+          <a:p>
+            <a:pPr>
+              <a:spcAft>
+                <a:spcPts val="300"/>
+              </a:spcAft>
+              <a:defRPr sz="950">
+                <a:solidFill>
+                  <a:srgbClr val="1E293B"/>
+                </a:solidFill>
+              </a:defRPr>
+            </a:pPr>
+            <a:r>
+              <a:t>• Bóc tách 4 thành tố: Tự động phân tách Business Rules, Boundary Limits, Exceptions &amp; User Flow.</a:t>
+            </a:r>
+          </a:p>
+          <a:p>
+            <a:pPr>
+              <a:spcAft>
+                <a:spcPts val="300"/>
+              </a:spcAft>
+              <a:defRPr sz="950">
+                <a:solidFill>
+                  <a:srgbClr val="1E293B"/>
+                </a:solidFill>
+              </a:defRPr>
+            </a:pPr>
+            <a:r>
+              <a:t>• Quét 5 rủi ro kiến trúc: Phát hiện lỗi ngầm: Concurrency (&lt;=50ms), Lost Update, Deadlock, JWT Drift.</a:t>
+            </a:r>
+          </a:p>
+          <a:p>
+            <a:pPr>
+              <a:spcAft>
+                <a:spcPts val="300"/>
+              </a:spcAft>
+              <a:defRPr sz="950">
+                <a:solidFill>
+                  <a:srgbClr val="1E293B"/>
+                </a:solidFill>
+              </a:defRPr>
+            </a:pPr>
+            <a:r>
+              <a:t>• Thiết kế Test 3 tầng sâu: Sinh kịch bản tách bước kiểm chứng UI + API Body + DB &amp; Sync Google Sheets.</a:t>
+            </a:r>
+          </a:p>
+        </p:txBody>
+      </p:sp>
+      <p:sp>
+        <p:nvSpPr>
+          <p:cNvPr id="7" name="Rounded Rectangle 6"/>
+          <p:cNvSpPr/>
+          <p:nvPr/>
+        </p:nvSpPr>
+        <p:spPr>
+          <a:xfrm>
+            <a:off x="6217920" y="2514600"/>
+            <a:ext cx="5029200" cy="2011680"/>
+          </a:xfrm>
+          <a:prstGeom prst="roundRect">
+            <a:avLst/>
+          </a:prstGeom>
+          <a:solidFill>
+            <a:srgbClr val="DCFCE7"/>
+          </a:solidFill>
+          <a:ln w="19050">
+            <a:solidFill>
+              <a:srgbClr val="16A34A"/>
+            </a:solidFill>
+          </a:ln>
+        </p:spPr>
+        <p:style>
+          <a:lnRef idx="1">
+            <a:schemeClr val="accent1"/>
+          </a:lnRef>
+          <a:fillRef idx="3">
+            <a:schemeClr val="accent1"/>
+          </a:fillRef>
+          <a:effectRef idx="2">
+            <a:schemeClr val="accent1"/>
+          </a:effectRef>
+          <a:fontRef idx="minor">
+            <a:schemeClr val="lt1"/>
+          </a:fontRef>
+        </p:style>
+        <p:txBody>
+          <a:bodyPr rtlCol="0" anchor="ctr" wrap="square"/>
+          <a:lstStyle/>
+          <a:p>
+            <a:pPr algn="ctr">
+              <a:spcAft>
+                <a:spcPts val="600"/>
+              </a:spcAft>
+              <a:defRPr sz="1100" b="1">
+                <a:solidFill>
+                  <a:srgbClr val="15803D"/>
+                </a:solidFill>
+              </a:defRPr>
+            </a:pPr>
+            <a:r>
+              <a:t>🎯 NHIỆM VỤ TRỌNG TÂM CỦA HỆ THỐNG (SYSTEM MISSIONS)</a:t>
+            </a:r>
+          </a:p>
+          <a:p>
+            <a:pPr>
+              <a:spcAft>
+                <a:spcPts val="300"/>
+              </a:spcAft>
+              <a:defRPr sz="950">
+                <a:solidFill>
+                  <a:srgbClr val="1E293B"/>
+                </a:solidFill>
+              </a:defRPr>
+            </a:pPr>
+            <a:r>
+              <a:t>• Shift-Left QA: Chặn đứng 50% lỗi ngay từ khâu phân tích yêu cầu trước khi Dev code.</a:t>
+            </a:r>
+          </a:p>
+          <a:p>
+            <a:pPr>
+              <a:spcAft>
+                <a:spcPts val="300"/>
+              </a:spcAft>
+              <a:defRPr sz="950">
+                <a:solidFill>
+                  <a:srgbClr val="1E293B"/>
+                </a:solidFill>
+              </a:defRPr>
+            </a:pPr>
+            <a:r>
+              <a:t>• Giải phóng thao tác thủ công: Tự động hóa toàn diện khâu đọc hiểu tài liệu và soạn đặc tả kịch bản.</a:t>
+            </a:r>
+          </a:p>
+          <a:p>
+            <a:pPr>
+              <a:spcAft>
+                <a:spcPts val="300"/>
+              </a:spcAft>
+              <a:defRPr sz="950">
+                <a:solidFill>
+                  <a:srgbClr val="1E293B"/>
+                </a:solidFill>
+              </a:defRPr>
+            </a:pPr>
+            <a:r>
+              <a:t>• Triệt tiêu 100% ảo giác: Ép AI bám sát 10 bugs production thực tế, Tester phê duyệt qua 2 cổng.</a:t>
+            </a:r>
+          </a:p>
+          <a:p>
+            <a:pPr>
+              <a:spcAft>
+                <a:spcPts val="300"/>
+              </a:spcAft>
+              <a:defRPr sz="950">
+                <a:solidFill>
+                  <a:srgbClr val="1E293B"/>
+                </a:solidFill>
+              </a:defRPr>
+            </a:pPr>
+            <a:r>
+              <a:t>• Chuẩn hóa tài sản kiểm thử: Lưu trữ tích lũy bền vững và làm bệ phóng trực tiếp cho Playwright E2E.</a:t>
+            </a:r>
+          </a:p>
+        </p:txBody>
+      </p:sp>
+      <p:sp>
+        <p:nvSpPr>
+          <p:cNvPr id="8" name="Rounded Rectangle 7"/>
+          <p:cNvSpPr/>
+          <p:nvPr/>
+        </p:nvSpPr>
+        <p:spPr>
+          <a:xfrm>
+            <a:off x="731520" y="4892040"/>
+            <a:ext cx="3383280" cy="1371600"/>
+          </a:xfrm>
+          <a:prstGeom prst="roundRect">
+            <a:avLst/>
+          </a:prstGeom>
+          <a:solidFill>
+            <a:srgbClr val="FFFFFF"/>
+          </a:solidFill>
+          <a:ln w="19050">
+            <a:solidFill>
+              <a:srgbClr val="CBD5E1"/>
+            </a:solidFill>
+          </a:ln>
+        </p:spPr>
+        <p:style>
+          <a:lnRef idx="1">
+            <a:schemeClr val="accent1"/>
+          </a:lnRef>
+          <a:fillRef idx="3">
+            <a:schemeClr val="accent1"/>
+          </a:fillRef>
+          <a:effectRef idx="2">
+            <a:schemeClr val="accent1"/>
+          </a:effectRef>
+          <a:fontRef idx="minor">
+            <a:schemeClr val="lt1"/>
+          </a:fontRef>
+        </p:style>
+        <p:txBody>
+          <a:bodyPr rtlCol="0" anchor="ctr" wrap="square"/>
+          <a:lstStyle/>
+          <a:p>
+            <a:pPr algn="ctr">
+              <a:defRPr sz="950" b="1">
+                <a:solidFill>
                   <a:srgbClr val="1677FF"/>
                 </a:solidFill>
               </a:defRPr>
             </a:pPr>
             <a:r>
-              <a:t>🎯 MỤC TIÊU 90 NGÀY CAM KẾT VỚI DOANH NGHIỆP:</a:t>
-            </a:r>
-          </a:p>
-          <a:p>
-            <a:pPr>
+              <a:t>🎯 ĐỘ CHÍNH XÁC DỮ LIỆU</a:t>
+            </a:r>
+          </a:p>
+          <a:p>
+            <a:pPr>
+              <a:defRPr sz="1800" b="1">
+                <a:solidFill>
+                  <a:srgbClr val="1E293B"/>
+                </a:solidFill>
+              </a:defRPr>
+            </a:pPr>
+            <a:r>
+              <a:t>≥ 92%</a:t>
+            </a:r>
+          </a:p>
+          <a:p>
+            <a:pPr>
+              <a:defRPr sz="950">
+                <a:solidFill>
+                  <a:srgbClr val="64748B"/>
+                </a:solidFill>
+              </a:defRPr>
+            </a:pPr>
+            <a:r>
+              <a:t>Kiểm chứng sâu 3 tầng, 0 ảo giác</a:t>
+            </a:r>
+          </a:p>
+        </p:txBody>
+      </p:sp>
+      <p:sp>
+        <p:nvSpPr>
+          <p:cNvPr id="9" name="Rounded Rectangle 8"/>
+          <p:cNvSpPr/>
+          <p:nvPr/>
+        </p:nvSpPr>
+        <p:spPr>
+          <a:xfrm>
+            <a:off x="4389120" y="4892040"/>
+            <a:ext cx="3383280" cy="1371600"/>
+          </a:xfrm>
+          <a:prstGeom prst="roundRect">
+            <a:avLst/>
+          </a:prstGeom>
+          <a:solidFill>
+            <a:srgbClr val="FFFFFF"/>
+          </a:solidFill>
+          <a:ln w="19050">
+            <a:solidFill>
+              <a:srgbClr val="CBD5E1"/>
+            </a:solidFill>
+          </a:ln>
+        </p:spPr>
+        <p:style>
+          <a:lnRef idx="1">
+            <a:schemeClr val="accent1"/>
+          </a:lnRef>
+          <a:fillRef idx="3">
+            <a:schemeClr val="accent1"/>
+          </a:fillRef>
+          <a:effectRef idx="2">
+            <a:schemeClr val="accent1"/>
+          </a:effectRef>
+          <a:fontRef idx="minor">
+            <a:schemeClr val="lt1"/>
+          </a:fontRef>
+        </p:style>
+        <p:txBody>
+          <a:bodyPr rtlCol="0" anchor="ctr" wrap="square"/>
+          <a:lstStyle/>
+          <a:p>
+            <a:pPr algn="ctr">
+              <a:defRPr sz="950" b="1">
+                <a:solidFill>
+                  <a:srgbClr val="16A34A"/>
+                </a:solidFill>
+              </a:defRPr>
+            </a:pPr>
+            <a:r>
+              <a:t>🛡️ CHẤT LƯỢNG RELEASE</a:t>
+            </a:r>
+          </a:p>
+          <a:p>
+            <a:pPr>
+              <a:defRPr sz="1800" b="1">
+                <a:solidFill>
+                  <a:srgbClr val="1E293B"/>
+                </a:solidFill>
+              </a:defRPr>
+            </a:pPr>
+            <a:r>
+              <a:t>Giảm 50% Defect</a:t>
+            </a:r>
+          </a:p>
+          <a:p>
+            <a:pPr>
+              <a:defRPr sz="950">
+                <a:solidFill>
+                  <a:srgbClr val="64748B"/>
+                </a:solidFill>
+              </a:defRPr>
+            </a:pPr>
+            <a:r>
+              <a:t>Chặn đứng lỗi sớm ngay khâu Spec</a:t>
+            </a:r>
+          </a:p>
+        </p:txBody>
+      </p:sp>
+      <p:sp>
+        <p:nvSpPr>
+          <p:cNvPr id="10" name="Rounded Rectangle 9"/>
+          <p:cNvSpPr/>
+          <p:nvPr/>
+        </p:nvSpPr>
+        <p:spPr>
+          <a:xfrm>
+            <a:off x="8046720" y="4892040"/>
+            <a:ext cx="3383280" cy="1371600"/>
+          </a:xfrm>
+          <a:prstGeom prst="roundRect">
+            <a:avLst/>
+          </a:prstGeom>
+          <a:solidFill>
+            <a:srgbClr val="FFFFFF"/>
+          </a:solidFill>
+          <a:ln w="19050">
+            <a:solidFill>
+              <a:srgbClr val="CBD5E1"/>
+            </a:solidFill>
+          </a:ln>
+        </p:spPr>
+        <p:style>
+          <a:lnRef idx="1">
+            <a:schemeClr val="accent1"/>
+          </a:lnRef>
+          <a:fillRef idx="3">
+            <a:schemeClr val="accent1"/>
+          </a:fillRef>
+          <a:effectRef idx="2">
+            <a:schemeClr val="accent1"/>
+          </a:effectRef>
+          <a:fontRef idx="minor">
+            <a:schemeClr val="lt1"/>
+          </a:fontRef>
+        </p:style>
+        <p:txBody>
+          <a:bodyPr rtlCol="0" anchor="ctr" wrap="square"/>
+          <a:lstStyle/>
+          <a:p>
+            <a:pPr algn="ctr">
+              <a:defRPr sz="950" b="1">
+                <a:solidFill>
+                  <a:srgbClr val="D97706"/>
+                </a:solidFill>
+              </a:defRPr>
+            </a:pPr>
+            <a:r>
+              <a:t>⚡ TỰ ĐỘNG HÓA QUY TRÌNH</a:t>
+            </a:r>
+          </a:p>
+          <a:p>
+            <a:pPr>
+              <a:defRPr sz="1800" b="1">
+                <a:solidFill>
+                  <a:srgbClr val="1E293B"/>
+                </a:solidFill>
+              </a:defRPr>
+            </a:pPr>
+            <a:r>
+              <a:t>80% Tác Vụ</a:t>
+            </a:r>
+          </a:p>
+          <a:p>
+            <a:pPr>
+              <a:defRPr sz="950">
+                <a:solidFill>
+                  <a:srgbClr val="64748B"/>
+                </a:solidFill>
+              </a:defRPr>
+            </a:pPr>
+            <a:r>
+              <a:t>Tự động hóa đọc hiểu &amp; viết test case</a:t>
+            </a:r>
+          </a:p>
+        </p:txBody>
+      </p:sp>
+    </p:spTree>
+  </p:cSld>
+  <p:clrMapOvr>
+    <a:masterClrMapping/>
+  </p:clrMapOvr>
+</p:sld>
+</file>
+
+<file path=ppt/slides/slide10.xml><?xml version="1.0" encoding="utf-8"?>
+<p:sld xmlns:a="http://schemas.openxmlformats.org/drawingml/2006/main" xmlns:p="http://schemas.openxmlformats.org/presentationml/2006/main" xmlns:r="http://schemas.openxmlformats.org/officeDocument/2006/relationships">
+  <p:cSld>
+    <p:spTree>
+      <p:nvGrpSpPr>
+        <p:cNvPr id="1" name=""/>
+        <p:cNvGrpSpPr/>
+        <p:nvPr/>
+      </p:nvGrpSpPr>
+      <p:grpSpPr/>
+      <p:sp>
+        <p:nvSpPr>
+          <p:cNvPr id="2" name="Rectangle 1"/>
+          <p:cNvSpPr/>
+          <p:nvPr/>
+        </p:nvSpPr>
+        <p:spPr>
+          <a:xfrm>
+            <a:off x="0" y="0"/>
+            <a:ext cx="12191695" cy="91440"/>
+          </a:xfrm>
+          <a:prstGeom prst="rect">
+            <a:avLst/>
+          </a:prstGeom>
+          <a:solidFill>
+            <a:srgbClr val="1677FF"/>
+          </a:solidFill>
+          <a:ln>
+            <a:noFill/>
+          </a:ln>
+        </p:spPr>
+        <p:style>
+          <a:lnRef idx="1">
+            <a:schemeClr val="accent1"/>
+          </a:lnRef>
+          <a:fillRef idx="3">
+            <a:schemeClr val="accent1"/>
+          </a:fillRef>
+          <a:effectRef idx="2">
+            <a:schemeClr val="accent1"/>
+          </a:effectRef>
+          <a:fontRef idx="minor">
+            <a:schemeClr val="lt1"/>
+          </a:fontRef>
+        </p:style>
+        <p:txBody>
+          <a:bodyPr rtlCol="0" anchor="ctr"/>
+          <a:lstStyle/>
+          <a:p>
+            <a:pPr algn="ctr"/>
+          </a:p>
+        </p:txBody>
+      </p:sp>
+      <p:sp>
+        <p:nvSpPr>
+          <p:cNvPr id="3" name="Rounded Rectangle 2"/>
+          <p:cNvSpPr/>
+          <p:nvPr/>
+        </p:nvSpPr>
+        <p:spPr>
+          <a:xfrm>
+            <a:off x="731520" y="292608"/>
+            <a:ext cx="3291840" cy="292608"/>
+          </a:xfrm>
+          <a:prstGeom prst="roundRect">
+            <a:avLst/>
+          </a:prstGeom>
+          <a:solidFill>
+            <a:srgbClr val="E6F4FF"/>
+          </a:solidFill>
+          <a:ln w="12700">
+            <a:solidFill>
+              <a:srgbClr val="1677FF"/>
+            </a:solidFill>
+          </a:ln>
+        </p:spPr>
+        <p:style>
+          <a:lnRef idx="1">
+            <a:schemeClr val="accent1"/>
+          </a:lnRef>
+          <a:fillRef idx="3">
+            <a:schemeClr val="accent1"/>
+          </a:fillRef>
+          <a:effectRef idx="2">
+            <a:schemeClr val="accent1"/>
+          </a:effectRef>
+          <a:fontRef idx="minor">
+            <a:schemeClr val="lt1"/>
+          </a:fontRef>
+        </p:style>
+        <p:txBody>
+          <a:bodyPr rtlCol="0" anchor="ctr" wrap="square"/>
+          <a:lstStyle/>
+          <a:p>
+            <a:pPr algn="ctr">
+              <a:defRPr sz="950" b="1">
+                <a:solidFill>
+                  <a:srgbClr val="0958D9"/>
+                </a:solidFill>
+              </a:defRPr>
+            </a:pPr>
+            <a:r>
+              <a:t>4. MINH CHỨNG THỰC NGHIỆM</a:t>
+            </a:r>
+          </a:p>
+        </p:txBody>
+      </p:sp>
+      <p:sp>
+        <p:nvSpPr>
+          <p:cNvPr id="4" name="TextBox 3"/>
+          <p:cNvSpPr txBox="1"/>
+          <p:nvPr/>
+        </p:nvSpPr>
+        <p:spPr>
+          <a:xfrm>
+            <a:off x="731520" y="621792"/>
+            <a:ext cx="10698480" cy="658368"/>
+          </a:xfrm>
+          <a:prstGeom prst="rect">
+            <a:avLst/>
+          </a:prstGeom>
+          <a:noFill/>
+        </p:spPr>
+        <p:txBody>
+          <a:bodyPr wrap="square">
+            <a:spAutoFit/>
+          </a:bodyPr>
+          <a:lstStyle/>
+          <a:p>
+            <a:pPr>
+              <a:defRPr sz="2000" b="1">
+                <a:solidFill>
+                  <a:srgbClr val="1E293B"/>
+                </a:solidFill>
+              </a:defRPr>
+            </a:pPr>
+            <a:r>
+              <a:t>Minh Chứng Thực Nghiệm: Vòng Lặp Tự Nắn Chỉnh Qua 3 Bài Toán Mẫu</a:t>
+            </a:r>
+          </a:p>
+          <a:p>
+            <a:pPr>
+              <a:defRPr sz="1050">
+                <a:solidFill>
+                  <a:srgbClr val="64748B"/>
+                </a:solidFill>
+              </a:defRPr>
+            </a:pPr>
+            <a:r>
+              <a:t>Bằng chứng thực tế từ Repo: Cách hệ thống tự phát hiện sai sót, nắn chỉnh prompt và chuẩn hóa kết quả đầu ra.</a:t>
+            </a:r>
+          </a:p>
+        </p:txBody>
+      </p:sp>
+      <p:sp>
+        <p:nvSpPr>
+          <p:cNvPr id="5" name="Rounded Rectangle 4"/>
+          <p:cNvSpPr/>
+          <p:nvPr/>
+        </p:nvSpPr>
+        <p:spPr>
+          <a:xfrm>
+            <a:off x="731520" y="1600200"/>
+            <a:ext cx="10698480" cy="502920"/>
+          </a:xfrm>
+          <a:prstGeom prst="roundRect">
+            <a:avLst/>
+          </a:prstGeom>
+          <a:solidFill>
+            <a:srgbClr val="F8FAFC"/>
+          </a:solidFill>
+          <a:ln>
+            <a:solidFill>
+              <a:srgbClr val="1677FF"/>
+            </a:solidFill>
+          </a:ln>
+        </p:spPr>
+        <p:style>
+          <a:lnRef idx="1">
+            <a:schemeClr val="accent1"/>
+          </a:lnRef>
+          <a:fillRef idx="3">
+            <a:schemeClr val="accent1"/>
+          </a:fillRef>
+          <a:effectRef idx="2">
+            <a:schemeClr val="accent1"/>
+          </a:effectRef>
+          <a:fontRef idx="minor">
+            <a:schemeClr val="lt1"/>
+          </a:fontRef>
+        </p:style>
+        <p:txBody>
+          <a:bodyPr rtlCol="0" anchor="ctr"/>
+          <a:lstStyle/>
+          <a:p>
+            <a:pPr algn="ctr">
+              <a:defRPr sz="1000" b="1">
+                <a:solidFill>
+                  <a:srgbClr val="0958D9"/>
+                </a:solidFill>
+              </a:defRPr>
+            </a:pPr>
+            <a:r>
+              <a:t>🔄 VÒNG LẶP NẮN CHỈNH:   [1. Chạy Thực Nghiệm]  ➔  [2. Phát Hiện Sai Sót]  ➔  [3. Nắn Chỉnh Rules &amp; Code]  ➔  [4. Chuẩn Hóa Bền Vững]</a:t>
+            </a:r>
+          </a:p>
+        </p:txBody>
+      </p:sp>
+      <p:sp>
+        <p:nvSpPr>
+          <p:cNvPr id="6" name="Rounded Rectangle 5"/>
+          <p:cNvSpPr/>
+          <p:nvPr/>
+        </p:nvSpPr>
+        <p:spPr>
+          <a:xfrm>
+            <a:off x="731520" y="2240280"/>
+            <a:ext cx="3383280" cy="4114800"/>
+          </a:xfrm>
+          <a:prstGeom prst="roundRect">
+            <a:avLst/>
+          </a:prstGeom>
+          <a:solidFill>
+            <a:srgbClr val="FFFFFF"/>
+          </a:solidFill>
+          <a:ln w="19050">
+            <a:solidFill>
+              <a:srgbClr val="CBD5E1"/>
+            </a:solidFill>
+          </a:ln>
+        </p:spPr>
+        <p:style>
+          <a:lnRef idx="1">
+            <a:schemeClr val="accent1"/>
+          </a:lnRef>
+          <a:fillRef idx="3">
+            <a:schemeClr val="accent1"/>
+          </a:fillRef>
+          <a:effectRef idx="2">
+            <a:schemeClr val="accent1"/>
+          </a:effectRef>
+          <a:fontRef idx="minor">
+            <a:schemeClr val="lt1"/>
+          </a:fontRef>
+        </p:style>
+        <p:txBody>
+          <a:bodyPr rtlCol="0" anchor="ctr" wrap="square"/>
+          <a:lstStyle/>
+          <a:p>
+            <a:pPr algn="ctr">
+              <a:spcAft>
+                <a:spcPts val="200"/>
+              </a:spcAft>
+              <a:defRPr sz="1150" b="1">
+                <a:solidFill>
+                  <a:srgbClr val="1677FF"/>
+                </a:solidFill>
+              </a:defRPr>
+            </a:pPr>
+            <a:r>
+              <a:t>🔐 REQ A: KHÓA TÀI KHOẢN (Auth)</a:t>
+            </a:r>
+          </a:p>
+          <a:p>
+            <a:pPr>
+              <a:spcAft>
+                <a:spcPts val="600"/>
+              </a:spcAft>
+              <a:defRPr sz="950">
+                <a:solidFill>
+                  <a:srgbClr val="64748B"/>
+                </a:solidFill>
+              </a:defRPr>
+            </a:pPr>
+            <a:r>
+              <a:t>Sai mật khẩu 5 lần liên tiếp</a:t>
+            </a:r>
+          </a:p>
+          <a:p>
+            <a:pPr>
+              <a:defRPr sz="1000" b="1">
+                <a:solidFill>
+                  <a:srgbClr val="16A34A"/>
+                </a:solidFill>
+              </a:defRPr>
+            </a:pPr>
+            <a:r>
+              <a:t>✔ Điểm sáng:</a:t>
+            </a:r>
+          </a:p>
+          <a:p>
+            <a:pPr>
+              <a:spcAft>
+                <a:spcPts val="500"/>
+              </a:spcAft>
+              <a:defRPr sz="850">
+                <a:solidFill>
+                  <a:srgbClr val="1E293B"/>
+                </a:solidFill>
+              </a:defRPr>
+            </a:pPr>
+            <a:r>
+              <a:t>Bắt kẽ hở Force Logout trên thiết bị khác; liên kết BUG-001 &amp; BUG-003.</a:t>
+            </a:r>
+          </a:p>
+          <a:p>
+            <a:pPr>
+              <a:defRPr sz="1000" b="1">
+                <a:solidFill>
+                  <a:srgbClr val="E11D48"/>
+                </a:solidFill>
+              </a:defRPr>
+            </a:pPr>
+            <a:r>
+              <a:t>⚠️ Sai sót ban đầu:</a:t>
+            </a:r>
+          </a:p>
+          <a:p>
+            <a:pPr>
+              <a:spcAft>
+                <a:spcPts val="500"/>
+              </a:spcAft>
+              <a:defRPr sz="850">
+                <a:solidFill>
+                  <a:srgbClr val="1E293B"/>
+                </a:solidFill>
+              </a:defRPr>
+            </a:pPr>
+            <a:r>
+              <a:t>Dùng từ ngữ quá hàn lâm (Lost Update, Redis INCR) khiến BA khó hiểu.</a:t>
+            </a:r>
+          </a:p>
+          <a:p>
+            <a:pPr>
+              <a:defRPr sz="1000" b="1">
+                <a:solidFill>
+                  <a:srgbClr val="0958D9"/>
+                </a:solidFill>
+              </a:defRPr>
+            </a:pPr>
+            <a:r>
+              <a:t>🛠️ Nắn chỉnh kỹ thuật:</a:t>
+            </a:r>
+          </a:p>
+          <a:p>
+            <a:pPr>
+              <a:spcAft>
+                <a:spcPts val="500"/>
+              </a:spcAft>
+              <a:defRPr sz="850">
+                <a:solidFill>
+                  <a:srgbClr val="1E293B"/>
+                </a:solidFill>
+              </a:defRPr>
+            </a:pPr>
+            <a:r>
+              <a:t>Thêm user_preferences.json ghi nhớ góc nhìn BA vs SDET; bổ sung kịch bản kiểm tra Event thu hồi Token.</a:t>
+            </a:r>
+          </a:p>
+        </p:txBody>
+      </p:sp>
+      <p:sp>
+        <p:nvSpPr>
+          <p:cNvPr id="7" name="Rounded Rectangle 6"/>
+          <p:cNvSpPr/>
+          <p:nvPr/>
+        </p:nvSpPr>
+        <p:spPr>
+          <a:xfrm>
+            <a:off x="4389120" y="2240280"/>
+            <a:ext cx="3383280" cy="4114800"/>
+          </a:xfrm>
+          <a:prstGeom prst="roundRect">
+            <a:avLst/>
+          </a:prstGeom>
+          <a:solidFill>
+            <a:srgbClr val="FFFFFF"/>
+          </a:solidFill>
+          <a:ln w="19050">
+            <a:solidFill>
+              <a:srgbClr val="CBD5E1"/>
+            </a:solidFill>
+          </a:ln>
+        </p:spPr>
+        <p:style>
+          <a:lnRef idx="1">
+            <a:schemeClr val="accent1"/>
+          </a:lnRef>
+          <a:fillRef idx="3">
+            <a:schemeClr val="accent1"/>
+          </a:fillRef>
+          <a:effectRef idx="2">
+            <a:schemeClr val="accent1"/>
+          </a:effectRef>
+          <a:fontRef idx="minor">
+            <a:schemeClr val="lt1"/>
+          </a:fontRef>
+        </p:style>
+        <p:txBody>
+          <a:bodyPr rtlCol="0" anchor="ctr" wrap="square"/>
+          <a:lstStyle/>
+          <a:p>
+            <a:pPr algn="ctr">
+              <a:spcAft>
+                <a:spcPts val="200"/>
+              </a:spcAft>
+              <a:defRPr sz="1150" b="1">
+                <a:solidFill>
+                  <a:srgbClr val="1677FF"/>
+                </a:solidFill>
+              </a:defRPr>
+            </a:pPr>
+            <a:r>
+              <a:t>📦 REQ B: BÁN ÂM KHO (Inventory)</a:t>
+            </a:r>
+          </a:p>
+          <a:p>
+            <a:pPr>
+              <a:spcAft>
+                <a:spcPts val="600"/>
+              </a:spcAft>
+              <a:defRPr sz="950">
+                <a:solidFill>
+                  <a:srgbClr val="64748B"/>
+                </a:solidFill>
+              </a:defRPr>
+            </a:pPr>
+            <a:r>
+              <a:t>Flash Sale Concurrency cao</a:t>
+            </a:r>
+          </a:p>
+          <a:p>
+            <a:pPr>
+              <a:defRPr sz="1000" b="1">
+                <a:solidFill>
+                  <a:srgbClr val="16A34A"/>
+                </a:solidFill>
+              </a:defRPr>
+            </a:pPr>
+            <a:r>
+              <a:t>✔ Điểm sáng:</a:t>
+            </a:r>
+          </a:p>
+          <a:p>
+            <a:pPr>
+              <a:spcAft>
+                <a:spcPts val="500"/>
+              </a:spcAft>
+              <a:defRPr sz="850">
+                <a:solidFill>
+                  <a:srgbClr val="1E293B"/>
+                </a:solidFill>
+              </a:defRPr>
+            </a:pPr>
+            <a:r>
+              <a:t>Phân biệt Tồn kho vật lý vs Khả dụng; sinh test 2 user tranh mua N=1 trong ≤50ms.</a:t>
+            </a:r>
+          </a:p>
+          <a:p>
+            <a:pPr>
+              <a:defRPr sz="1000" b="1">
+                <a:solidFill>
+                  <a:srgbClr val="E11D48"/>
+                </a:solidFill>
+              </a:defRPr>
+            </a:pPr>
+            <a:r>
+              <a:t>⚠️ Sai sót ban đầu:</a:t>
+            </a:r>
+          </a:p>
+          <a:p>
+            <a:pPr>
+              <a:spcAft>
+                <a:spcPts val="500"/>
+              </a:spcAft>
+              <a:defRPr sz="850">
+                <a:solidFill>
+                  <a:srgbClr val="1E293B"/>
+                </a:solidFill>
+              </a:defRPr>
+            </a:pPr>
+            <a:r>
+              <a:t>Gom cụm bước (chọn số lượng + checkout dồn 1 bước); verify API sơ sài.</a:t>
+            </a:r>
+          </a:p>
+          <a:p>
+            <a:pPr>
+              <a:defRPr sz="1000" b="1">
+                <a:solidFill>
+                  <a:srgbClr val="0958D9"/>
+                </a:solidFill>
+              </a:defRPr>
+            </a:pPr>
+            <a:r>
+              <a:t>🛠️ Nắn chỉnh kỹ thuật:</a:t>
+            </a:r>
+          </a:p>
+          <a:p>
+            <a:pPr>
+              <a:spcAft>
+                <a:spcPts val="500"/>
+              </a:spcAft>
+              <a:defRPr sz="850">
+                <a:solidFill>
+                  <a:srgbClr val="1E293B"/>
+                </a:solidFill>
+              </a:defRPr>
+            </a:pPr>
+            <a:r>
+              <a:t>Đưa 3 Nguyên Tắc Vàng vào Rules cứng; viết script Styler tự động kẻ viền &amp; format Sheets.</a:t>
+            </a:r>
+          </a:p>
+        </p:txBody>
+      </p:sp>
+      <p:sp>
+        <p:nvSpPr>
+          <p:cNvPr id="8" name="Rounded Rectangle 7"/>
+          <p:cNvSpPr/>
+          <p:nvPr/>
+        </p:nvSpPr>
+        <p:spPr>
+          <a:xfrm>
+            <a:off x="8046720" y="2240280"/>
+            <a:ext cx="3383280" cy="4114800"/>
+          </a:xfrm>
+          <a:prstGeom prst="roundRect">
+            <a:avLst/>
+          </a:prstGeom>
+          <a:solidFill>
+            <a:srgbClr val="FFFFFF"/>
+          </a:solidFill>
+          <a:ln w="19050">
+            <a:solidFill>
+              <a:srgbClr val="CBD5E1"/>
+            </a:solidFill>
+          </a:ln>
+        </p:spPr>
+        <p:style>
+          <a:lnRef idx="1">
+            <a:schemeClr val="accent1"/>
+          </a:lnRef>
+          <a:fillRef idx="3">
+            <a:schemeClr val="accent1"/>
+          </a:fillRef>
+          <a:effectRef idx="2">
+            <a:schemeClr val="accent1"/>
+          </a:effectRef>
+          <a:fontRef idx="minor">
+            <a:schemeClr val="lt1"/>
+          </a:fontRef>
+        </p:style>
+        <p:txBody>
+          <a:bodyPr rtlCol="0" anchor="ctr" wrap="square"/>
+          <a:lstStyle/>
+          <a:p>
+            <a:pPr algn="ctr">
+              <a:spcAft>
+                <a:spcPts val="200"/>
+              </a:spcAft>
+              <a:defRPr sz="1150" b="1">
+                <a:solidFill>
+                  <a:srgbClr val="1677FF"/>
+                </a:solidFill>
+              </a:defRPr>
+            </a:pPr>
+            <a:r>
+              <a:t>🎟️ REQ C: VOUCHER 1 LẦN (Promo)</a:t>
+            </a:r>
+          </a:p>
+          <a:p>
+            <a:pPr>
+              <a:spcAft>
+                <a:spcPts val="600"/>
+              </a:spcAft>
+              <a:defRPr sz="950">
+                <a:solidFill>
+                  <a:srgbClr val="64748B"/>
+                </a:solidFill>
+              </a:defRPr>
+            </a:pPr>
+            <a:r>
+              <a:t>Áp mã thanh toán giỏ hàng</a:t>
+            </a:r>
+          </a:p>
+          <a:p>
+            <a:pPr>
+              <a:defRPr sz="1000" b="1">
+                <a:solidFill>
+                  <a:srgbClr val="16A34A"/>
+                </a:solidFill>
+              </a:defRPr>
+            </a:pPr>
+            <a:r>
+              <a:t>✔ Điểm sáng:</a:t>
+            </a:r>
+          </a:p>
+          <a:p>
+            <a:pPr>
+              <a:spcAft>
+                <a:spcPts val="500"/>
+              </a:spcAft>
+              <a:defRPr sz="850">
+                <a:solidFill>
+                  <a:srgbClr val="1E293B"/>
+                </a:solidFill>
+              </a:defRPr>
+            </a:pPr>
+            <a:r>
+              <a:t>Thiết kế Race condition ≤50ms; verify hoàn tiền rollback voucher khi hủy đơn.</a:t>
+            </a:r>
+          </a:p>
+          <a:p>
+            <a:pPr>
+              <a:defRPr sz="1000" b="1">
+                <a:solidFill>
+                  <a:srgbClr val="E11D48"/>
+                </a:solidFill>
+              </a:defRPr>
+            </a:pPr>
+            <a:r>
+              <a:t>⚠️ Sai sót ban đầu:</a:t>
+            </a:r>
+          </a:p>
+          <a:p>
+            <a:pPr>
+              <a:spcAft>
+                <a:spcPts val="500"/>
+              </a:spcAft>
+              <a:defRPr sz="850">
+                <a:solidFill>
+                  <a:srgbClr val="1E293B"/>
+                </a:solidFill>
+              </a:defRPr>
+            </a:pPr>
+            <a:r>
+              <a:t>Format sheet chưa đẹp; chưa có cột Status Pass/Fail tiện dụng cho Tester.</a:t>
+            </a:r>
+          </a:p>
+          <a:p>
+            <a:pPr>
+              <a:defRPr sz="1000" b="1">
+                <a:solidFill>
+                  <a:srgbClr val="0958D9"/>
+                </a:solidFill>
+              </a:defRPr>
+            </a:pPr>
+            <a:r>
+              <a:t>🛠️ Nắn chỉnh kỹ thuật:</a:t>
+            </a:r>
+          </a:p>
+          <a:p>
+            <a:pPr>
+              <a:spcAft>
+                <a:spcPts val="500"/>
+              </a:spcAft>
+              <a:defRPr sz="850">
+                <a:solidFill>
+                  <a:srgbClr val="1E293B"/>
+                </a:solidFill>
+              </a:defRPr>
+            </a:pPr>
+            <a:r>
+              <a:t>Bổ sung Dropdown Data Validation PASS/FAIL/BLOCKED/NOT_RUN và Conditional Formatting màu tự động.</a:t>
+            </a:r>
+          </a:p>
+        </p:txBody>
+      </p:sp>
+    </p:spTree>
+  </p:cSld>
+  <p:clrMapOvr>
+    <a:masterClrMapping/>
+  </p:clrMapOvr>
+</p:sld>
+</file>
+
+<file path=ppt/slides/slide11.xml><?xml version="1.0" encoding="utf-8"?>
+<p:sld xmlns:a="http://schemas.openxmlformats.org/drawingml/2006/main" xmlns:p="http://schemas.openxmlformats.org/presentationml/2006/main" xmlns:r="http://schemas.openxmlformats.org/officeDocument/2006/relationships">
+  <p:cSld>
+    <p:spTree>
+      <p:nvGrpSpPr>
+        <p:cNvPr id="1" name=""/>
+        <p:cNvGrpSpPr/>
+        <p:nvPr/>
+      </p:nvGrpSpPr>
+      <p:grpSpPr/>
+      <p:sp>
+        <p:nvSpPr>
+          <p:cNvPr id="2" name="Rectangle 1"/>
+          <p:cNvSpPr/>
+          <p:nvPr/>
+        </p:nvSpPr>
+        <p:spPr>
+          <a:xfrm>
+            <a:off x="0" y="0"/>
+            <a:ext cx="12191695" cy="91440"/>
+          </a:xfrm>
+          <a:prstGeom prst="rect">
+            <a:avLst/>
+          </a:prstGeom>
+          <a:solidFill>
+            <a:srgbClr val="1677FF"/>
+          </a:solidFill>
+          <a:ln>
+            <a:noFill/>
+          </a:ln>
+        </p:spPr>
+        <p:style>
+          <a:lnRef idx="1">
+            <a:schemeClr val="accent1"/>
+          </a:lnRef>
+          <a:fillRef idx="3">
+            <a:schemeClr val="accent1"/>
+          </a:fillRef>
+          <a:effectRef idx="2">
+            <a:schemeClr val="accent1"/>
+          </a:effectRef>
+          <a:fontRef idx="minor">
+            <a:schemeClr val="lt1"/>
+          </a:fontRef>
+        </p:style>
+        <p:txBody>
+          <a:bodyPr rtlCol="0" anchor="ctr"/>
+          <a:lstStyle/>
+          <a:p>
+            <a:pPr algn="ctr"/>
+          </a:p>
+        </p:txBody>
+      </p:sp>
+      <p:sp>
+        <p:nvSpPr>
+          <p:cNvPr id="3" name="Rounded Rectangle 2"/>
+          <p:cNvSpPr/>
+          <p:nvPr/>
+        </p:nvSpPr>
+        <p:spPr>
+          <a:xfrm>
+            <a:off x="731520" y="292608"/>
+            <a:ext cx="3291840" cy="292608"/>
+          </a:xfrm>
+          <a:prstGeom prst="roundRect">
+            <a:avLst/>
+          </a:prstGeom>
+          <a:solidFill>
+            <a:srgbClr val="E6F4FF"/>
+          </a:solidFill>
+          <a:ln w="12700">
+            <a:solidFill>
+              <a:srgbClr val="1677FF"/>
+            </a:solidFill>
+          </a:ln>
+        </p:spPr>
+        <p:style>
+          <a:lnRef idx="1">
+            <a:schemeClr val="accent1"/>
+          </a:lnRef>
+          <a:fillRef idx="3">
+            <a:schemeClr val="accent1"/>
+          </a:fillRef>
+          <a:effectRef idx="2">
+            <a:schemeClr val="accent1"/>
+          </a:effectRef>
+          <a:fontRef idx="minor">
+            <a:schemeClr val="lt1"/>
+          </a:fontRef>
+        </p:style>
+        <p:txBody>
+          <a:bodyPr rtlCol="0" anchor="ctr" wrap="square"/>
+          <a:lstStyle/>
+          <a:p>
+            <a:pPr algn="ctr">
+              <a:defRPr sz="950" b="1">
+                <a:solidFill>
+                  <a:srgbClr val="0958D9"/>
+                </a:solidFill>
+              </a:defRPr>
+            </a:pPr>
+            <a:r>
+              <a:t>5. KẾ HOẠCH TRIỂN KHAI THỰC CHIẾN</a:t>
+            </a:r>
+          </a:p>
+        </p:txBody>
+      </p:sp>
+      <p:sp>
+        <p:nvSpPr>
+          <p:cNvPr id="4" name="TextBox 3"/>
+          <p:cNvSpPr txBox="1"/>
+          <p:nvPr/>
+        </p:nvSpPr>
+        <p:spPr>
+          <a:xfrm>
+            <a:off x="731520" y="621792"/>
+            <a:ext cx="10698480" cy="658368"/>
+          </a:xfrm>
+          <a:prstGeom prst="rect">
+            <a:avLst/>
+          </a:prstGeom>
+          <a:noFill/>
+        </p:spPr>
+        <p:txBody>
+          <a:bodyPr wrap="square">
+            <a:spAutoFit/>
+          </a:bodyPr>
+          <a:lstStyle/>
+          <a:p>
+            <a:pPr>
+              <a:defRPr sz="2000" b="1">
+                <a:solidFill>
+                  <a:srgbClr val="1E293B"/>
+                </a:solidFill>
+              </a:defRPr>
+            </a:pPr>
+            <a:r>
+              <a:t>Kế Hoạch Triển Khai Thực Chiến Trong 3 Tháng: Từng Bước Vững Chắc</a:t>
+            </a:r>
+          </a:p>
+          <a:p>
+            <a:pPr>
+              <a:defRPr sz="1050">
+                <a:solidFill>
+                  <a:srgbClr val="64748B"/>
+                </a:solidFill>
+              </a:defRPr>
+            </a:pPr>
+            <a:r>
+              <a:t>Lộ trình cụ thể để đưa hệ thống vào dự án thực tế, từ Pilot, mở rộng toàn team đến tối ưu hóa tự động.</a:t>
+            </a:r>
+          </a:p>
+        </p:txBody>
+      </p:sp>
+      <p:sp>
+        <p:nvSpPr>
+          <p:cNvPr id="5" name="Rounded Rectangle 4"/>
+          <p:cNvSpPr/>
+          <p:nvPr/>
+        </p:nvSpPr>
+        <p:spPr>
+          <a:xfrm>
+            <a:off x="731520" y="1600200"/>
+            <a:ext cx="3383280" cy="4754880"/>
+          </a:xfrm>
+          <a:prstGeom prst="roundRect">
+            <a:avLst/>
+          </a:prstGeom>
+          <a:solidFill>
+            <a:srgbClr val="FFFFFF"/>
+          </a:solidFill>
+          <a:ln w="19050">
+            <a:solidFill>
+              <a:srgbClr val="1677FF"/>
+            </a:solidFill>
+          </a:ln>
+        </p:spPr>
+        <p:style>
+          <a:lnRef idx="1">
+            <a:schemeClr val="accent1"/>
+          </a:lnRef>
+          <a:fillRef idx="3">
+            <a:schemeClr val="accent1"/>
+          </a:fillRef>
+          <a:effectRef idx="2">
+            <a:schemeClr val="accent1"/>
+          </a:effectRef>
+          <a:fontRef idx="minor">
+            <a:schemeClr val="lt1"/>
+          </a:fontRef>
+        </p:style>
+        <p:txBody>
+          <a:bodyPr rtlCol="0" anchor="ctr" wrap="square"/>
+          <a:lstStyle/>
+          <a:p>
+            <a:pPr algn="ctr">
+              <a:spcAft>
+                <a:spcPts val="200"/>
+              </a:spcAft>
+              <a:defRPr sz="1100" b="1">
+                <a:solidFill>
+                  <a:srgbClr val="1677FF"/>
+                </a:solidFill>
+              </a:defRPr>
+            </a:pPr>
+            <a:r>
+              <a:t>THÁNG 1: PILOT &amp; CHUẨN HÓA DỮ LIỆU</a:t>
+            </a:r>
+          </a:p>
+          <a:p>
+            <a:pPr>
+              <a:spcAft>
+                <a:spcPts val="800"/>
+              </a:spcAft>
+              <a:defRPr sz="900">
+                <a:solidFill>
+                  <a:srgbClr val="64748B"/>
+                </a:solidFill>
+              </a:defRPr>
+            </a:pPr>
+            <a:r>
+              <a:t>Mục tiêu: Đưa vào 1 squad thử nghiệm, chuẩn hóa Rules</a:t>
+            </a:r>
+          </a:p>
+          <a:p>
+            <a:pPr>
+              <a:defRPr sz="950" b="1">
+                <a:solidFill>
+                  <a:srgbClr val="1E293B"/>
+                </a:solidFill>
+              </a:defRPr>
+            </a:pPr>
+            <a:r>
+              <a:t>📌 Tuần 1: Setup &amp; Ground Truth</a:t>
+            </a:r>
+          </a:p>
+          <a:p>
+            <a:pPr>
+              <a:spcAft>
+                <a:spcPts val="600"/>
+              </a:spcAft>
+              <a:defRPr sz="850">
+                <a:solidFill>
+                  <a:srgbClr val="64748B"/>
+                </a:solidFill>
+              </a:defRPr>
+            </a:pPr>
+            <a:r>
+              <a:t>Triển khai Antigravity Native Plugin; nạp 10-20 bug production của dự án vào bug_repository.json.</a:t>
+            </a:r>
+          </a:p>
+          <a:p>
+            <a:pPr>
+              <a:defRPr sz="950" b="1">
+                <a:solidFill>
+                  <a:srgbClr val="1E293B"/>
+                </a:solidFill>
+              </a:defRPr>
+            </a:pPr>
+            <a:r>
+              <a:t>📌 Tuần 2: Pilot 1 Squad</a:t>
+            </a:r>
+          </a:p>
+          <a:p>
+            <a:pPr>
+              <a:spcAft>
+                <a:spcPts val="600"/>
+              </a:spcAft>
+              <a:defRPr sz="850">
+                <a:solidFill>
+                  <a:srgbClr val="64748B"/>
+                </a:solidFill>
+              </a:defRPr>
+            </a:pPr>
+            <a:r>
+              <a:t>Áp dụng cho 1 squad kiểm thử (2 Tester + 1 BA). Chạy song song AI và thủ công để đối soát.</a:t>
+            </a:r>
+          </a:p>
+          <a:p>
+            <a:pPr>
+              <a:defRPr sz="950" b="1">
+                <a:solidFill>
+                  <a:srgbClr val="1E293B"/>
+                </a:solidFill>
+              </a:defRPr>
+            </a:pPr>
+            <a:r>
+              <a:t>📌 Tuần 3-4: Đánh Giá &amp; Nắn Chỉnh</a:t>
+            </a:r>
+          </a:p>
+          <a:p>
+            <a:pPr>
+              <a:spcAft>
+                <a:spcPts val="600"/>
+              </a:spcAft>
+              <a:defRPr sz="850">
+                <a:solidFill>
+                  <a:srgbClr val="64748B"/>
+                </a:solidFill>
+              </a:defRPr>
+            </a:pPr>
+            <a:r>
+              <a:t>Đo lường độ chính xác Semantic Accuracy. Bổ sung các quy tắc nghiệp vụ đặc thù của công ty vào Rules.</a:t>
+            </a:r>
+          </a:p>
+        </p:txBody>
+      </p:sp>
+      <p:sp>
+        <p:nvSpPr>
+          <p:cNvPr id="6" name="Rounded Rectangle 5"/>
+          <p:cNvSpPr/>
+          <p:nvPr/>
+        </p:nvSpPr>
+        <p:spPr>
+          <a:xfrm>
+            <a:off x="4389120" y="1600200"/>
+            <a:ext cx="3383280" cy="4754880"/>
+          </a:xfrm>
+          <a:prstGeom prst="roundRect">
+            <a:avLst/>
+          </a:prstGeom>
+          <a:solidFill>
+            <a:srgbClr val="FFFFFF"/>
+          </a:solidFill>
+          <a:ln w="19050">
+            <a:solidFill>
+              <a:srgbClr val="0D9488"/>
+            </a:solidFill>
+          </a:ln>
+        </p:spPr>
+        <p:style>
+          <a:lnRef idx="1">
+            <a:schemeClr val="accent1"/>
+          </a:lnRef>
+          <a:fillRef idx="3">
+            <a:schemeClr val="accent1"/>
+          </a:fillRef>
+          <a:effectRef idx="2">
+            <a:schemeClr val="accent1"/>
+          </a:effectRef>
+          <a:fontRef idx="minor">
+            <a:schemeClr val="lt1"/>
+          </a:fontRef>
+        </p:style>
+        <p:txBody>
+          <a:bodyPr rtlCol="0" anchor="ctr" wrap="square"/>
+          <a:lstStyle/>
+          <a:p>
+            <a:pPr algn="ctr">
+              <a:spcAft>
+                <a:spcPts val="200"/>
+              </a:spcAft>
+              <a:defRPr sz="1100" b="1">
+                <a:solidFill>
+                  <a:srgbClr val="0D9488"/>
+                </a:solidFill>
+              </a:defRPr>
+            </a:pPr>
+            <a:r>
+              <a:t>THÁNG 2: MỞ RỘNG TOÀN DỰ ÁN &amp; CI/CD</a:t>
+            </a:r>
+          </a:p>
+          <a:p>
+            <a:pPr>
+              <a:spcAft>
+                <a:spcPts val="800"/>
+              </a:spcAft>
+              <a:defRPr sz="900">
+                <a:solidFill>
+                  <a:srgbClr val="64748B"/>
+                </a:solidFill>
+              </a:defRPr>
+            </a:pPr>
+            <a:r>
+              <a:t>Mục tiêu: Đào tạo toàn bộ QA Team &amp; kết nối pipeline</a:t>
+            </a:r>
+          </a:p>
+          <a:p>
+            <a:pPr>
+              <a:defRPr sz="950" b="1">
+                <a:solidFill>
+                  <a:srgbClr val="1E293B"/>
+                </a:solidFill>
+              </a:defRPr>
+            </a:pPr>
+            <a:r>
+              <a:t>📌 Tuần 5-6: Workshop Đào Tạo QA</a:t>
+            </a:r>
+          </a:p>
+          <a:p>
+            <a:pPr>
+              <a:spcAft>
+                <a:spcPts val="600"/>
+              </a:spcAft>
+              <a:defRPr sz="850">
+                <a:solidFill>
+                  <a:srgbClr val="64748B"/>
+                </a:solidFill>
+              </a:defRPr>
+            </a:pPr>
+            <a:r>
+              <a:t>Hướng dẫn đội ngũ Tester cách review phân tích Pha 1, kiểm duyệt kịch bản Pha 2 và sử dụng Google Sheets.</a:t>
+            </a:r>
+          </a:p>
+          <a:p>
+            <a:pPr>
+              <a:defRPr sz="950" b="1">
+                <a:solidFill>
+                  <a:srgbClr val="1E293B"/>
+                </a:solidFill>
+              </a:defRPr>
+            </a:pPr>
+            <a:r>
+              <a:t>📌 Tuần 7: Tích Hợp Jira / Confluence</a:t>
+            </a:r>
+          </a:p>
+          <a:p>
+            <a:pPr>
+              <a:spcAft>
+                <a:spcPts val="600"/>
+              </a:spcAft>
+              <a:defRPr sz="850">
+                <a:solidFill>
+                  <a:srgbClr val="64748B"/>
+                </a:solidFill>
+              </a:defRPr>
+            </a:pPr>
+            <a:r>
+              <a:t>Kết nối tự động kéo User Story từ Jira và đẩy kết quả phân tích ngược lại Ticket.</a:t>
+            </a:r>
+          </a:p>
+          <a:p>
+            <a:pPr>
+              <a:defRPr sz="950" b="1">
+                <a:solidFill>
+                  <a:srgbClr val="1E293B"/>
+                </a:solidFill>
+              </a:defRPr>
+            </a:pPr>
+            <a:r>
+              <a:t>📌 Tuần 8: Tự Động Hóa 50% Test</a:t>
+            </a:r>
+          </a:p>
+          <a:p>
+            <a:pPr>
+              <a:spcAft>
+                <a:spcPts val="600"/>
+              </a:spcAft>
+              <a:defRPr sz="850">
+                <a:solidFill>
+                  <a:srgbClr val="64748B"/>
+                </a:solidFill>
+              </a:defRPr>
+            </a:pPr>
+            <a:r>
+              <a:t>Chuyển giao các test case đã tách bước sang Playwright E2E để tự động chạy trên CI/CD.</a:t>
+            </a:r>
+          </a:p>
+        </p:txBody>
+      </p:sp>
+      <p:sp>
+        <p:nvSpPr>
+          <p:cNvPr id="7" name="Rounded Rectangle 6"/>
+          <p:cNvSpPr/>
+          <p:nvPr/>
+        </p:nvSpPr>
+        <p:spPr>
+          <a:xfrm>
+            <a:off x="8046720" y="1600200"/>
+            <a:ext cx="3383280" cy="4754880"/>
+          </a:xfrm>
+          <a:prstGeom prst="roundRect">
+            <a:avLst/>
+          </a:prstGeom>
+          <a:solidFill>
+            <a:srgbClr val="FFFFFF"/>
+          </a:solidFill>
+          <a:ln w="19050">
+            <a:solidFill>
+              <a:srgbClr val="16A34A"/>
+            </a:solidFill>
+          </a:ln>
+        </p:spPr>
+        <p:style>
+          <a:lnRef idx="1">
+            <a:schemeClr val="accent1"/>
+          </a:lnRef>
+          <a:fillRef idx="3">
+            <a:schemeClr val="accent1"/>
+          </a:fillRef>
+          <a:effectRef idx="2">
+            <a:schemeClr val="accent1"/>
+          </a:effectRef>
+          <a:fontRef idx="minor">
+            <a:schemeClr val="lt1"/>
+          </a:fontRef>
+        </p:style>
+        <p:txBody>
+          <a:bodyPr rtlCol="0" anchor="ctr" wrap="square"/>
+          <a:lstStyle/>
+          <a:p>
+            <a:pPr algn="ctr">
+              <a:spcAft>
+                <a:spcPts val="200"/>
+              </a:spcAft>
+              <a:defRPr sz="1100" b="1">
+                <a:solidFill>
+                  <a:srgbClr val="16A34A"/>
+                </a:solidFill>
+              </a:defRPr>
+            </a:pPr>
+            <a:r>
+              <a:t>THÁNG 3: ĐO LƯỜNG HIỆU QUẢ &amp; TỰ ĐỘNG HÓA</a:t>
+            </a:r>
+          </a:p>
+          <a:p>
+            <a:pPr>
+              <a:spcAft>
+                <a:spcPts val="800"/>
+              </a:spcAft>
+              <a:defRPr sz="900">
+                <a:solidFill>
+                  <a:srgbClr val="64748B"/>
+                </a:solidFill>
+              </a:defRPr>
+            </a:pPr>
+            <a:r>
+              <a:t>Mục tiêu: Hoàn thiện quy trình tự động hóa kiểm thử &amp; Giảm 50% Defect</a:t>
+            </a:r>
+          </a:p>
+          <a:p>
+            <a:pPr>
+              <a:defRPr sz="950" b="1">
+                <a:solidFill>
+                  <a:srgbClr val="1E293B"/>
+                </a:solidFill>
+              </a:defRPr>
+            </a:pPr>
+            <a:r>
+              <a:t>📌 Tuần 9-10: Tự Nắn Chỉnh Mô Hình</a:t>
+            </a:r>
+          </a:p>
+          <a:p>
+            <a:pPr>
+              <a:spcAft>
+                <a:spcPts val="600"/>
+              </a:spcAft>
+              <a:defRPr sz="850">
+                <a:solidFill>
+                  <a:srgbClr val="64748B"/>
+                </a:solidFill>
+              </a:defRPr>
+            </a:pPr>
+            <a:r>
+              <a:t>Xây dựng cơ chế tự động học từ các lỗi Tester sửa trên Sheets để cập nhật lại bug repository.</a:t>
+            </a:r>
+          </a:p>
+          <a:p>
+            <a:pPr>
+              <a:defRPr sz="950" b="1">
+                <a:solidFill>
+                  <a:srgbClr val="1E293B"/>
+                </a:solidFill>
+              </a:defRPr>
+            </a:pPr>
+            <a:r>
+              <a:t>📌 Tuần 11: Đo Lường Hiệu Quả (ROI)</a:t>
+            </a:r>
+          </a:p>
+          <a:p>
+            <a:pPr>
+              <a:spcAft>
+                <a:spcPts val="600"/>
+              </a:spcAft>
+              <a:defRPr sz="850">
+                <a:solidFill>
+                  <a:srgbClr val="64748B"/>
+                </a:solidFill>
+              </a:defRPr>
+            </a:pPr>
+            <a:r>
+              <a:t>Tổng hợp dữ liệu: Rút ngắn thời gian chuẩn bị kịch bản; Số lỗi lọt sang UAT giảm 50%.</a:t>
+            </a:r>
+          </a:p>
+          <a:p>
+            <a:pPr>
+              <a:defRPr sz="950" b="1">
+                <a:solidFill>
+                  <a:srgbClr val="1E293B"/>
+                </a:solidFill>
+              </a:defRPr>
+            </a:pPr>
+            <a:r>
+              <a:t>📌 Tuần 12: Báo Cáo Ban Lãnh Đạo</a:t>
+            </a:r>
+          </a:p>
+          <a:p>
+            <a:pPr>
+              <a:spcAft>
+                <a:spcPts val="600"/>
+              </a:spcAft>
+              <a:defRPr sz="850">
+                <a:solidFill>
+                  <a:srgbClr val="64748B"/>
+                </a:solidFill>
+              </a:defRPr>
+            </a:pPr>
+            <a:r>
+              <a:t>Trình bày báo cáo ROI toàn diện và đề xuất mở rộng mô hình cho các dự án khác.</a:t>
+            </a:r>
+          </a:p>
+        </p:txBody>
+      </p:sp>
+    </p:spTree>
+  </p:cSld>
+  <p:clrMapOvr>
+    <a:masterClrMapping/>
+  </p:clrMapOvr>
+</p:sld>
+</file>
+
+<file path=ppt/slides/slide12.xml><?xml version="1.0" encoding="utf-8"?>
+<p:sld xmlns:a="http://schemas.openxmlformats.org/drawingml/2006/main" xmlns:p="http://schemas.openxmlformats.org/presentationml/2006/main" xmlns:r="http://schemas.openxmlformats.org/officeDocument/2006/relationships">
+  <p:cSld>
+    <p:spTree>
+      <p:nvGrpSpPr>
+        <p:cNvPr id="1" name=""/>
+        <p:cNvGrpSpPr/>
+        <p:nvPr/>
+      </p:nvGrpSpPr>
+      <p:grpSpPr/>
+      <p:sp>
+        <p:nvSpPr>
+          <p:cNvPr id="2" name="Rectangle 1"/>
+          <p:cNvSpPr/>
+          <p:nvPr/>
+        </p:nvSpPr>
+        <p:spPr>
+          <a:xfrm>
+            <a:off x="0" y="0"/>
+            <a:ext cx="12191695" cy="91440"/>
+          </a:xfrm>
+          <a:prstGeom prst="rect">
+            <a:avLst/>
+          </a:prstGeom>
+          <a:solidFill>
+            <a:srgbClr val="1677FF"/>
+          </a:solidFill>
+          <a:ln>
+            <a:noFill/>
+          </a:ln>
+        </p:spPr>
+        <p:style>
+          <a:lnRef idx="1">
+            <a:schemeClr val="accent1"/>
+          </a:lnRef>
+          <a:fillRef idx="3">
+            <a:schemeClr val="accent1"/>
+          </a:fillRef>
+          <a:effectRef idx="2">
+            <a:schemeClr val="accent1"/>
+          </a:effectRef>
+          <a:fontRef idx="minor">
+            <a:schemeClr val="lt1"/>
+          </a:fontRef>
+        </p:style>
+        <p:txBody>
+          <a:bodyPr rtlCol="0" anchor="ctr"/>
+          <a:lstStyle/>
+          <a:p>
+            <a:pPr algn="ctr"/>
+          </a:p>
+        </p:txBody>
+      </p:sp>
+      <p:sp>
+        <p:nvSpPr>
+          <p:cNvPr id="3" name="Rounded Rectangle 2"/>
+          <p:cNvSpPr/>
+          <p:nvPr/>
+        </p:nvSpPr>
+        <p:spPr>
+          <a:xfrm>
+            <a:off x="731520" y="292608"/>
+            <a:ext cx="3291840" cy="292608"/>
+          </a:xfrm>
+          <a:prstGeom prst="roundRect">
+            <a:avLst/>
+          </a:prstGeom>
+          <a:solidFill>
+            <a:srgbClr val="E6F4FF"/>
+          </a:solidFill>
+          <a:ln w="12700">
+            <a:solidFill>
+              <a:srgbClr val="1677FF"/>
+            </a:solidFill>
+          </a:ln>
+        </p:spPr>
+        <p:style>
+          <a:lnRef idx="1">
+            <a:schemeClr val="accent1"/>
+          </a:lnRef>
+          <a:fillRef idx="3">
+            <a:schemeClr val="accent1"/>
+          </a:fillRef>
+          <a:effectRef idx="2">
+            <a:schemeClr val="accent1"/>
+          </a:effectRef>
+          <a:fontRef idx="minor">
+            <a:schemeClr val="lt1"/>
+          </a:fontRef>
+        </p:style>
+        <p:txBody>
+          <a:bodyPr rtlCol="0" anchor="ctr" wrap="square"/>
+          <a:lstStyle/>
+          <a:p>
+            <a:pPr algn="ctr">
+              <a:defRPr sz="950" b="1">
+                <a:solidFill>
+                  <a:srgbClr val="0958D9"/>
+                </a:solidFill>
+              </a:defRPr>
+            </a:pPr>
+            <a:r>
+              <a:t>6. CAM KẾT &amp; KẾT LUẬN</a:t>
+            </a:r>
+          </a:p>
+        </p:txBody>
+      </p:sp>
+      <p:sp>
+        <p:nvSpPr>
+          <p:cNvPr id="4" name="TextBox 3"/>
+          <p:cNvSpPr txBox="1"/>
+          <p:nvPr/>
+        </p:nvSpPr>
+        <p:spPr>
+          <a:xfrm>
+            <a:off x="731520" y="621792"/>
+            <a:ext cx="10698480" cy="658368"/>
+          </a:xfrm>
+          <a:prstGeom prst="rect">
+            <a:avLst/>
+          </a:prstGeom>
+          <a:noFill/>
+        </p:spPr>
+        <p:txBody>
+          <a:bodyPr wrap="square">
+            <a:spAutoFit/>
+          </a:bodyPr>
+          <a:lstStyle/>
+          <a:p>
+            <a:pPr>
+              <a:defRPr sz="2000" b="1">
+                <a:solidFill>
+                  <a:srgbClr val="1E293B"/>
+                </a:solidFill>
+              </a:defRPr>
+            </a:pPr>
+            <a:r>
+              <a:t>Cam Kết Thực Thi &amp; Sẵn Sàng Đồng Hành Cùng Doanh Nghiệp</a:t>
+            </a:r>
+          </a:p>
+          <a:p>
+            <a:pPr>
+              <a:defRPr sz="1050">
+                <a:solidFill>
+                  <a:srgbClr val="64748B"/>
+                </a:solidFill>
+              </a:defRPr>
+            </a:pPr>
+            <a:r>
+              <a:t>Tổng kết giá trị cốt lõi và khẳng định tính sẵn sàng triển khai ngay từ ngày đầu tiên nhận việc.</a:t>
+            </a:r>
+          </a:p>
+        </p:txBody>
+      </p:sp>
+      <p:sp>
+        <p:nvSpPr>
+          <p:cNvPr id="5" name="Rounded Rectangle 4"/>
+          <p:cNvSpPr/>
+          <p:nvPr/>
+        </p:nvSpPr>
+        <p:spPr>
+          <a:xfrm>
+            <a:off x="731520" y="1600200"/>
+            <a:ext cx="3383280" cy="3840480"/>
+          </a:xfrm>
+          <a:prstGeom prst="roundRect">
+            <a:avLst/>
+          </a:prstGeom>
+          <a:solidFill>
+            <a:srgbClr val="FFFFFF"/>
+          </a:solidFill>
+          <a:ln w="19050">
+            <a:solidFill>
+              <a:srgbClr val="1677FF"/>
+            </a:solidFill>
+          </a:ln>
+        </p:spPr>
+        <p:style>
+          <a:lnRef idx="1">
+            <a:schemeClr val="accent1"/>
+          </a:lnRef>
+          <a:fillRef idx="3">
+            <a:schemeClr val="accent1"/>
+          </a:fillRef>
+          <a:effectRef idx="2">
+            <a:schemeClr val="accent1"/>
+          </a:effectRef>
+          <a:fontRef idx="minor">
+            <a:schemeClr val="lt1"/>
+          </a:fontRef>
+        </p:style>
+        <p:txBody>
+          <a:bodyPr rtlCol="0" anchor="ctr" wrap="square"/>
+          <a:lstStyle/>
+          <a:p>
+            <a:pPr algn="ctr">
+              <a:spcAft>
+                <a:spcPts val="400"/>
+              </a:spcAft>
               <a:defRPr sz="1200" b="1">
                 <a:solidFill>
-                  <a:srgbClr val="FFFFFF"/>
-                </a:solidFill>
-              </a:defRPr>
-            </a:pPr>
-            <a:r>
-              <a:t>1. Nâng Effort (Throughput) Team lên gấp 2.5x  •  2. Độ Chính Xác (Accuracy/Ground Truth) Bộ Dữ Liệu Đầu Ra ≥ 92%  •  3. Giảm 50% Defect Lọt Sang Dev/Prod</a:t>
+                  <a:srgbClr val="1677FF"/>
+                </a:solidFill>
+              </a:defRPr>
+            </a:pPr>
+            <a:r>
+              <a:t>🎯 NĂNG LỰC THỰC CHIẾN</a:t>
+            </a:r>
+          </a:p>
+          <a:p>
+            <a:pPr>
+              <a:spcAft>
+                <a:spcPts val="800"/>
+              </a:spcAft>
+              <a:defRPr sz="950">
+                <a:solidFill>
+                  <a:srgbClr val="1E293B"/>
+                </a:solidFill>
+              </a:defRPr>
+            </a:pPr>
+            <a:r>
+              <a:t>Không chỉ nói lý thuyết suông — Đã xây dựng hoàn chỉnh Plugin, State Machine, Rules, Script và đồng bộ Google Workspace sẵn sàng hoạt động.</a:t>
+            </a:r>
+          </a:p>
+          <a:p>
+            <a:pPr>
+              <a:spcAft>
+                <a:spcPts val="300"/>
+              </a:spcAft>
+              <a:defRPr sz="900">
+                <a:solidFill>
+                  <a:srgbClr val="64748B"/>
+                </a:solidFill>
+              </a:defRPr>
+            </a:pPr>
+            <a:r>
+              <a:t>• Đã kiểm chứng qua 3 bài toán khó (Auth, Kho, Voucher)</a:t>
+            </a:r>
+          </a:p>
+          <a:p>
+            <a:pPr>
+              <a:spcAft>
+                <a:spcPts val="300"/>
+              </a:spcAft>
+              <a:defRPr sz="900">
+                <a:solidFill>
+                  <a:srgbClr val="64748B"/>
+                </a:solidFill>
+              </a:defRPr>
+            </a:pPr>
+            <a:r>
+              <a:t>• Hiểu sâu kiến trúc Microservices &amp; Distributed System</a:t>
+            </a:r>
+          </a:p>
+          <a:p>
+            <a:pPr>
+              <a:spcAft>
+                <a:spcPts val="300"/>
+              </a:spcAft>
+              <a:defRPr sz="900">
+                <a:solidFill>
+                  <a:srgbClr val="64748B"/>
+                </a:solidFill>
+              </a:defRPr>
+            </a:pPr>
+            <a:r>
+              <a:t>• Tự động hóa E2E từ Spec đến Google Sheets</a:t>
+            </a:r>
+          </a:p>
+        </p:txBody>
+      </p:sp>
+      <p:sp>
+        <p:nvSpPr>
+          <p:cNvPr id="6" name="Rounded Rectangle 5"/>
+          <p:cNvSpPr/>
+          <p:nvPr/>
+        </p:nvSpPr>
+        <p:spPr>
+          <a:xfrm>
+            <a:off x="4389120" y="1600200"/>
+            <a:ext cx="3383280" cy="3840480"/>
+          </a:xfrm>
+          <a:prstGeom prst="roundRect">
+            <a:avLst/>
+          </a:prstGeom>
+          <a:solidFill>
+            <a:srgbClr val="FFFFFF"/>
+          </a:solidFill>
+          <a:ln w="19050">
+            <a:solidFill>
+              <a:srgbClr val="0D9488"/>
+            </a:solidFill>
+          </a:ln>
+        </p:spPr>
+        <p:style>
+          <a:lnRef idx="1">
+            <a:schemeClr val="accent1"/>
+          </a:lnRef>
+          <a:fillRef idx="3">
+            <a:schemeClr val="accent1"/>
+          </a:fillRef>
+          <a:effectRef idx="2">
+            <a:schemeClr val="accent1"/>
+          </a:effectRef>
+          <a:fontRef idx="minor">
+            <a:schemeClr val="lt1"/>
+          </a:fontRef>
+        </p:style>
+        <p:txBody>
+          <a:bodyPr rtlCol="0" anchor="ctr" wrap="square"/>
+          <a:lstStyle/>
+          <a:p>
+            <a:pPr algn="ctr">
+              <a:spcAft>
+                <a:spcPts val="400"/>
+              </a:spcAft>
+              <a:defRPr sz="1200" b="1">
+                <a:solidFill>
+                  <a:srgbClr val="0D9488"/>
+                </a:solidFill>
+              </a:defRPr>
+            </a:pPr>
+            <a:r>
+              <a:t>🤝 TINH THẦN ĐỒNG HÀNH</a:t>
+            </a:r>
+          </a:p>
+          <a:p>
+            <a:pPr>
+              <a:spcAft>
+                <a:spcPts val="800"/>
+              </a:spcAft>
+              <a:defRPr sz="950">
+                <a:solidFill>
+                  <a:srgbClr val="1E293B"/>
+                </a:solidFill>
+              </a:defRPr>
+            </a:pPr>
+            <a:r>
+              <a:t>Xem AI là trợ thủ đắc lực nâng tầm con người chứ không phải công cụ thay thế. Giúp đội ngũ QA hiện tại tăng trưởng kỹ năng và năng lực kiểm soát.</a:t>
+            </a:r>
+          </a:p>
+          <a:p>
+            <a:pPr>
+              <a:spcAft>
+                <a:spcPts val="300"/>
+              </a:spcAft>
+              <a:defRPr sz="900">
+                <a:solidFill>
+                  <a:srgbClr val="64748B"/>
+                </a:solidFill>
+              </a:defRPr>
+            </a:pPr>
+            <a:r>
+              <a:t>• Đào tạo, chuyển giao tri thức tận tâm cho đồng nghiệp</a:t>
+            </a:r>
+          </a:p>
+          <a:p>
+            <a:pPr>
+              <a:spcAft>
+                <a:spcPts val="300"/>
+              </a:spcAft>
+              <a:defRPr sz="900">
+                <a:solidFill>
+                  <a:srgbClr val="64748B"/>
+                </a:solidFill>
+              </a:defRPr>
+            </a:pPr>
+            <a:r>
+              <a:t>• Lắng nghe phản hồi từ BA/PO/Dev để hoàn thiện quy trình</a:t>
+            </a:r>
+          </a:p>
+          <a:p>
+            <a:pPr>
+              <a:spcAft>
+                <a:spcPts val="300"/>
+              </a:spcAft>
+              <a:defRPr sz="900">
+                <a:solidFill>
+                  <a:srgbClr val="64748B"/>
+                </a:solidFill>
+              </a:defRPr>
+            </a:pPr>
+            <a:r>
+              <a:t>• Tinh thần trách nhiệm cao nhất với chất lượng release</a:t>
+            </a:r>
+          </a:p>
+        </p:txBody>
+      </p:sp>
+      <p:sp>
+        <p:nvSpPr>
+          <p:cNvPr id="7" name="Rounded Rectangle 6"/>
+          <p:cNvSpPr/>
+          <p:nvPr/>
+        </p:nvSpPr>
+        <p:spPr>
+          <a:xfrm>
+            <a:off x="8046720" y="1600200"/>
+            <a:ext cx="3383280" cy="3840480"/>
+          </a:xfrm>
+          <a:prstGeom prst="roundRect">
+            <a:avLst/>
+          </a:prstGeom>
+          <a:solidFill>
+            <a:srgbClr val="FFFFFF"/>
+          </a:solidFill>
+          <a:ln w="19050">
+            <a:solidFill>
+              <a:srgbClr val="16A34A"/>
+            </a:solidFill>
+          </a:ln>
+        </p:spPr>
+        <p:style>
+          <a:lnRef idx="1">
+            <a:schemeClr val="accent1"/>
+          </a:lnRef>
+          <a:fillRef idx="3">
+            <a:schemeClr val="accent1"/>
+          </a:fillRef>
+          <a:effectRef idx="2">
+            <a:schemeClr val="accent1"/>
+          </a:effectRef>
+          <a:fontRef idx="minor">
+            <a:schemeClr val="lt1"/>
+          </a:fontRef>
+        </p:style>
+        <p:txBody>
+          <a:bodyPr rtlCol="0" anchor="ctr" wrap="square"/>
+          <a:lstStyle/>
+          <a:p>
+            <a:pPr algn="ctr">
+              <a:spcAft>
+                <a:spcPts val="400"/>
+              </a:spcAft>
+              <a:defRPr sz="1200" b="1">
+                <a:solidFill>
+                  <a:srgbClr val="16A34A"/>
+                </a:solidFill>
+              </a:defRPr>
+            </a:pPr>
+            <a:r>
+              <a:t>📈 CAM KẾT HIỆU QUẢ RÕ RÀNG</a:t>
+            </a:r>
+          </a:p>
+          <a:p>
+            <a:pPr>
+              <a:spcAft>
+                <a:spcPts val="800"/>
+              </a:spcAft>
+              <a:defRPr sz="950">
+                <a:solidFill>
+                  <a:srgbClr val="1E293B"/>
+                </a:solidFill>
+              </a:defRPr>
+            </a:pPr>
+            <a:r>
+              <a:t>Mang lại giá trị đo đếm được ngay trong tháng đầu tiên và tối ưu hóa chi phí vận hành cho toàn bộ tổ chức.</a:t>
+            </a:r>
+          </a:p>
+          <a:p>
+            <a:pPr>
+              <a:spcAft>
+                <a:spcPts val="300"/>
+              </a:spcAft>
+              <a:defRPr sz="900">
+                <a:solidFill>
+                  <a:srgbClr val="64748B"/>
+                </a:solidFill>
+              </a:defRPr>
+            </a:pPr>
+            <a:r>
+              <a:t>• Rút ngắn thời gian chuẩn bị test suite hoàn chỉnh</a:t>
+            </a:r>
+          </a:p>
+          <a:p>
+            <a:pPr>
+              <a:spcAft>
+                <a:spcPts val="300"/>
+              </a:spcAft>
+              <a:defRPr sz="900">
+                <a:solidFill>
+                  <a:srgbClr val="64748B"/>
+                </a:solidFill>
+              </a:defRPr>
+            </a:pPr>
+            <a:r>
+              <a:t>• Độ chính xác dữ liệu kiểm thử đạt &gt;= 92%</a:t>
+            </a:r>
+          </a:p>
+          <a:p>
+            <a:pPr>
+              <a:spcAft>
+                <a:spcPts val="300"/>
+              </a:spcAft>
+              <a:defRPr sz="900">
+                <a:solidFill>
+                  <a:srgbClr val="64748B"/>
+                </a:solidFill>
+              </a:defRPr>
+            </a:pPr>
+            <a:r>
+              <a:t>• Giảm 50% lỗi lọt sang môi trường Production</a:t>
+            </a:r>
+          </a:p>
+        </p:txBody>
+      </p:sp>
+      <p:sp>
+        <p:nvSpPr>
+          <p:cNvPr id="8" name="Rounded Rectangle 7"/>
+          <p:cNvSpPr/>
+          <p:nvPr/>
+        </p:nvSpPr>
+        <p:spPr>
+          <a:xfrm>
+            <a:off x="731520" y="5623560"/>
+            <a:ext cx="10698480" cy="777240"/>
+          </a:xfrm>
+          <a:prstGeom prst="roundRect">
+            <a:avLst/>
+          </a:prstGeom>
+          <a:solidFill>
+            <a:srgbClr val="E6F4FF"/>
+          </a:solidFill>
+          <a:ln w="19050">
+            <a:solidFill>
+              <a:srgbClr val="1677FF"/>
+            </a:solidFill>
+          </a:ln>
+        </p:spPr>
+        <p:style>
+          <a:lnRef idx="1">
+            <a:schemeClr val="accent1"/>
+          </a:lnRef>
+          <a:fillRef idx="3">
+            <a:schemeClr val="accent1"/>
+          </a:fillRef>
+          <a:effectRef idx="2">
+            <a:schemeClr val="accent1"/>
+          </a:effectRef>
+          <a:fontRef idx="minor">
+            <a:schemeClr val="lt1"/>
+          </a:fontRef>
+        </p:style>
+        <p:txBody>
+          <a:bodyPr rtlCol="0" anchor="ctr" wrap="square"/>
+          <a:lstStyle/>
+          <a:p>
+            <a:pPr algn="ctr">
+              <a:defRPr sz="1100" b="1">
+                <a:solidFill>
+                  <a:srgbClr val="0958D9"/>
+                </a:solidFill>
+              </a:defRPr>
+            </a:pPr>
+            <a:r>
+              <a:t>💬 "Tôi không thay thế tester bằng AI — Tôi biến mỗi tester thành một Super QA có năng lực phân tích sâu, làm chủ công nghệ và kiểm soát chất lượng toàn diện!"</a:t>
+            </a:r>
+          </a:p>
+          <a:p>
+            <a:pPr algn="ctr">
+              <a:defRPr sz="1000">
+                <a:solidFill>
+                  <a:srgbClr val="1677FF"/>
+                </a:solidFill>
+              </a:defRPr>
+            </a:pPr>
+            <a:r>
+              <a:t>Sẵn sàng cống hiến và đồng hành cùng quý công ty ngay từ tuần đầu tiên 🤝</a:t>
             </a:r>
           </a:p>
         </p:txBody>
@@ -3357,7 +5669,7 @@
         <p:spPr>
           <a:xfrm>
             <a:off x="0" y="0"/>
-            <a:ext cx="12191695" cy="109728"/>
+            <a:ext cx="12191695" cy="91440"/>
           </a:xfrm>
           <a:prstGeom prst="rect">
             <a:avLst/>
@@ -3399,8 +5711,8 @@
         </p:nvSpPr>
         <p:spPr>
           <a:xfrm>
-            <a:off x="731520" y="365760"/>
-            <a:ext cx="2011680" cy="320040"/>
+            <a:off x="731520" y="292608"/>
+            <a:ext cx="3291840" cy="292608"/>
           </a:xfrm>
           <a:prstGeom prst="roundRect">
             <a:avLst/>
@@ -3433,14 +5745,14 @@
           <a:lstStyle/>
           <a:p>
             <a:pPr algn="ctr">
-              <a:defRPr sz="1000" b="1">
+              <a:defRPr sz="950" b="1">
                 <a:solidFill>
                   <a:srgbClr val="0958D9"/>
                 </a:solidFill>
               </a:defRPr>
             </a:pPr>
             <a:r>
-              <a:t>1. PROBLEM &amp; OPPORTUNITY</a:t>
+              <a:t>1. ĐỊNH DANH HỆ THỐNG</a:t>
             </a:r>
           </a:p>
         </p:txBody>
@@ -3453,8 +5765,8 @@
         </p:nvSpPr>
         <p:spPr>
           <a:xfrm>
-            <a:off x="731520" y="777240"/>
-            <a:ext cx="10698480" cy="640080"/>
+            <a:off x="731520" y="621792"/>
+            <a:ext cx="10698480" cy="658368"/>
           </a:xfrm>
           <a:prstGeom prst="rect">
             <a:avLst/>
@@ -3468,26 +5780,26 @@
           <a:lstStyle/>
           <a:p>
             <a:pPr>
-              <a:defRPr sz="2200" b="1">
+              <a:defRPr sz="2000" b="1">
                 <a:solidFill>
                   <a:srgbClr val="1E293B"/>
                 </a:solidFill>
               </a:defRPr>
             </a:pPr>
             <a:r>
-              <a:t>Bối Cảnh &amp; Bài Toán Cốt Lõi: Năng Suất (Effort) vs. Độ Đúng Sai Dữ Liệu</a:t>
-            </a:r>
-          </a:p>
-          <a:p>
-            <a:pPr>
-              <a:defRPr sz="1200">
+              <a:t>Hệ Thống Đang Làm Gì? Khả Năng Xử Lý Chuyên Sâu Từng Khâu</a:t>
+            </a:r>
+          </a:p>
+          <a:p>
+            <a:pPr>
+              <a:defRPr sz="1050">
                 <a:solidFill>
                   <a:srgbClr val="64748B"/>
                 </a:solidFill>
               </a:defRPr>
             </a:pPr>
             <a:r>
-              <a:t>Vì sao các giải pháp AI Test Case thông thường đều thất bại và tiêu chuẩn mới của chúng ta là gì?</a:t>
+              <a:t>Cơ chế tự động hóa toàn diện từ lúc nhận tài liệu yêu cầu thô đến khi xuất ra bộ test suite hoàn chỉnh.</a:t>
             </a:r>
           </a:p>
         </p:txBody>
@@ -3500,248 +5812,14 @@
         </p:nvSpPr>
         <p:spPr>
           <a:xfrm>
-            <a:off x="731520" y="1645920"/>
-            <a:ext cx="3383280" cy="4663440"/>
+            <a:off x="731520" y="1463040"/>
+            <a:ext cx="3383280" cy="4937760"/>
           </a:xfrm>
           <a:prstGeom prst="roundRect">
             <a:avLst/>
           </a:prstGeom>
           <a:solidFill>
-            <a:srgbClr val="F8FAFC"/>
-          </a:solidFill>
-          <a:ln>
-            <a:solidFill>
-              <a:srgbClr val="CBD5E1"/>
-            </a:solidFill>
-          </a:ln>
-        </p:spPr>
-        <p:style>
-          <a:lnRef idx="1">
-            <a:schemeClr val="accent1"/>
-          </a:lnRef>
-          <a:fillRef idx="3">
-            <a:schemeClr val="accent1"/>
-          </a:fillRef>
-          <a:effectRef idx="2">
-            <a:schemeClr val="accent1"/>
-          </a:effectRef>
-          <a:fontRef idx="minor">
-            <a:schemeClr val="lt1"/>
-          </a:fontRef>
-        </p:style>
-        <p:txBody>
-          <a:bodyPr rtlCol="0" anchor="ctr" wrap="square"/>
-          <a:lstStyle/>
-          <a:p>
-            <a:pPr algn="ctr">
-              <a:spcAft>
-                <a:spcPts val="1000"/>
-              </a:spcAft>
-              <a:defRPr sz="1300" b="1">
-                <a:solidFill>
-                  <a:srgbClr val="E11D48"/>
-                </a:solidFill>
-              </a:defRPr>
-            </a:pPr>
-            <a:r>
-              <a:t>🚨 NỖI ĐAU EFFORT HIỆN TẠI</a:t>
-            </a:r>
-          </a:p>
-          <a:p>
-            <a:pPr>
-              <a:spcAft>
-                <a:spcPts val="800"/>
-              </a:spcAft>
-              <a:defRPr sz="1100">
-                <a:solidFill>
-                  <a:srgbClr val="1E293B"/>
-                </a:solidFill>
-              </a:defRPr>
-            </a:pPr>
-            <a:r>
-              <a:t>• 60-70% Thời gian QA bị chôn vào việc đọc requirement mập mờ và gõ test case thủ công lặp lại.</a:t>
-            </a:r>
-          </a:p>
-          <a:p>
-            <a:pPr>
-              <a:spcAft>
-                <a:spcPts val="800"/>
-              </a:spcAft>
-              <a:defRPr sz="1100">
-                <a:solidFill>
-                  <a:srgbClr val="1E293B"/>
-                </a:solidFill>
-              </a:defRPr>
-            </a:pPr>
-            <a:r>
-              <a:t>• Năng suất thấp: Trung bình 1 QA chỉ phân tích được 2-3 User Stories phức tạp mỗi sprint.</a:t>
-            </a:r>
-          </a:p>
-          <a:p>
-            <a:pPr>
-              <a:spcAft>
-                <a:spcPts val="800"/>
-              </a:spcAft>
-              <a:defRPr sz="1100">
-                <a:solidFill>
-                  <a:srgbClr val="1E293B"/>
-                </a:solidFill>
-              </a:defRPr>
-            </a:pPr>
-            <a:r>
-              <a:t>• Thiếu chiều sâu kỹ thuật: Bỏ sót các lỗi rủi ro kiến trúc cao (Race Condition, State Drift, Timeout).</a:t>
-            </a:r>
-          </a:p>
-          <a:p>
-            <a:pPr>
-              <a:spcAft>
-                <a:spcPts val="800"/>
-              </a:spcAft>
-              <a:defRPr sz="1100">
-                <a:solidFill>
-                  <a:srgbClr val="1E293B"/>
-                </a:solidFill>
-              </a:defRPr>
-            </a:pPr>
-            <a:r>
-              <a:t>• Tắc nghẽn bàn giao: Dev chờ Test Case, QA chờ BA chốt yêu cầu, kéo dài lead-time release.</a:t>
-            </a:r>
-          </a:p>
-        </p:txBody>
-      </p:sp>
-      <p:sp>
-        <p:nvSpPr>
-          <p:cNvPr id="6" name="Rounded Rectangle 5"/>
-          <p:cNvSpPr/>
-          <p:nvPr/>
-        </p:nvSpPr>
-        <p:spPr>
-          <a:xfrm>
-            <a:off x="4389120" y="1645920"/>
-            <a:ext cx="3383280" cy="4663440"/>
-          </a:xfrm>
-          <a:prstGeom prst="roundRect">
-            <a:avLst/>
-          </a:prstGeom>
-          <a:solidFill>
-            <a:srgbClr val="F8FAFC"/>
-          </a:solidFill>
-          <a:ln>
-            <a:solidFill>
-              <a:srgbClr val="CBD5E1"/>
-            </a:solidFill>
-          </a:ln>
-        </p:spPr>
-        <p:style>
-          <a:lnRef idx="1">
-            <a:schemeClr val="accent1"/>
-          </a:lnRef>
-          <a:fillRef idx="3">
-            <a:schemeClr val="accent1"/>
-          </a:fillRef>
-          <a:effectRef idx="2">
-            <a:schemeClr val="accent1"/>
-          </a:effectRef>
-          <a:fontRef idx="minor">
-            <a:schemeClr val="lt1"/>
-          </a:fontRef>
-        </p:style>
-        <p:txBody>
-          <a:bodyPr rtlCol="0" anchor="ctr" wrap="square"/>
-          <a:lstStyle/>
-          <a:p>
-            <a:pPr algn="ctr">
-              <a:spcAft>
-                <a:spcPts val="1000"/>
-              </a:spcAft>
-              <a:defRPr sz="1300" b="1">
-                <a:solidFill>
-                  <a:srgbClr val="D97706"/>
-                </a:solidFill>
-              </a:defRPr>
-            </a:pPr>
-            <a:r>
-              <a:t>⚠️ BẪY 'ẢO GIÁC' CỦA AI CHUNG CHUNG</a:t>
-            </a:r>
-          </a:p>
-          <a:p>
-            <a:pPr>
-              <a:spcAft>
-                <a:spcPts val="800"/>
-              </a:spcAft>
-              <a:defRPr sz="1100">
-                <a:solidFill>
-                  <a:srgbClr val="1E293B"/>
-                </a:solidFill>
-              </a:defRPr>
-            </a:pPr>
-            <a:r>
-              <a:t>• Vấn đề 'Garbage In - Garbage Out': Requirement thiếu ngữ cảnh dẫn đến test case sinh ra sai hoàn toàn.</a:t>
-            </a:r>
-          </a:p>
-          <a:p>
-            <a:pPr>
-              <a:spcAft>
-                <a:spcPts val="800"/>
-              </a:spcAft>
-              <a:defRPr sz="1100">
-                <a:solidFill>
-                  <a:srgbClr val="1E293B"/>
-                </a:solidFill>
-              </a:defRPr>
-            </a:pPr>
-            <a:r>
-              <a:t>• Ảo giác (Hallucination): Tự bịa API endpoint, tự suy diễn quy tắc sai so với luồng nghiệp vụ thực tế.</a:t>
-            </a:r>
-          </a:p>
-          <a:p>
-            <a:pPr>
-              <a:spcAft>
-                <a:spcPts val="800"/>
-              </a:spcAft>
-              <a:defRPr sz="1100">
-                <a:solidFill>
-                  <a:srgbClr val="1E293B"/>
-                </a:solidFill>
-              </a:defRPr>
-            </a:pPr>
-            <a:r>
-              <a:t>• Gộp cụm hành động (Action Bundling): Dồn chọn số lượng + thanh toán + click vào 1 bước, dev không thể chạy Automation.</a:t>
-            </a:r>
-          </a:p>
-          <a:p>
-            <a:pPr>
-              <a:spcAft>
-                <a:spcPts val="800"/>
-              </a:spcAft>
-              <a:defRPr sz="1100">
-                <a:solidFill>
-                  <a:srgbClr val="1E293B"/>
-                </a:solidFill>
-              </a:defRPr>
-            </a:pPr>
-            <a:r>
-              <a:t>• Kỳ vọng chung chung: Chỉ ghi 'Verify HTTP 200' mà không có JSON Body hay thay đổi dữ liệu Database.</a:t>
-            </a:r>
-          </a:p>
-        </p:txBody>
-      </p:sp>
-      <p:sp>
-        <p:nvSpPr>
-          <p:cNvPr id="7" name="Rounded Rectangle 6"/>
-          <p:cNvSpPr/>
-          <p:nvPr/>
-        </p:nvSpPr>
-        <p:spPr>
-          <a:xfrm>
-            <a:off x="8046720" y="1645920"/>
-            <a:ext cx="3383280" cy="4663440"/>
-          </a:xfrm>
-          <a:prstGeom prst="roundRect">
-            <a:avLst/>
-          </a:prstGeom>
-          <a:solidFill>
-            <a:srgbClr val="E6F4FF"/>
+            <a:srgbClr val="FFFFFF"/>
           </a:solidFill>
           <a:ln w="19050">
             <a:solidFill>
@@ -3769,16 +5847,31 @@
           <a:p>
             <a:pPr algn="ctr">
               <a:spcAft>
-                <a:spcPts val="1000"/>
+                <a:spcPts val="200"/>
+              </a:spcAft>
+              <a:defRPr sz="950" b="1">
+                <a:solidFill>
+                  <a:srgbClr val="1677FF"/>
+                </a:solidFill>
+              </a:defRPr>
+            </a:pPr>
+            <a:r>
+              <a:t>📥 GIAI ĐOẠN 1: ĐẦU VÀO</a:t>
+            </a:r>
+          </a:p>
+          <a:p>
+            <a:pPr>
+              <a:spcAft>
+                <a:spcPts val="200"/>
               </a:spcAft>
               <a:defRPr sz="1300" b="1">
                 <a:solidFill>
-                  <a:srgbClr val="0958D9"/>
-                </a:solidFill>
-              </a:defRPr>
-            </a:pPr>
-            <a:r>
-              <a:t>✨ GIẢI PHÁP ĐỘT PHÁ CỦA REPO</a:t>
+                  <a:srgbClr val="1E293B"/>
+                </a:solidFill>
+              </a:defRPr>
+            </a:pPr>
+            <a:r>
+              <a:t>Tiếp Nhận &amp; Đọc Hiểu Spec</a:t>
             </a:r>
           </a:p>
           <a:p>
@@ -3786,14 +5879,194 @@
               <a:spcAft>
                 <a:spcPts val="800"/>
               </a:spcAft>
-              <a:defRPr sz="1100" b="1">
+              <a:defRPr sz="900">
+                <a:solidFill>
+                  <a:srgbClr val="64748B"/>
+                </a:solidFill>
+              </a:defRPr>
+            </a:pPr>
+            <a:r>
+              <a:t>Xử lý đa dạng mọi nguồn tài liệu dự án</a:t>
+            </a:r>
+          </a:p>
+          <a:p>
+            <a:pPr>
+              <a:defRPr sz="950" b="1">
                 <a:solidFill>
                   <a:srgbClr val="1E293B"/>
                 </a:solidFill>
               </a:defRPr>
             </a:pPr>
             <a:r>
-              <a:t>✔ Strict 2-Phase State Machine: Chặn cổng duyệt người (Human Gate 1), yêu cầu chốt logic trước khi sinh test.</a:t>
+              <a:t>📄 User Story &amp; Acceptance Criteria:</a:t>
+            </a:r>
+          </a:p>
+          <a:p>
+            <a:pPr>
+              <a:spcAft>
+                <a:spcPts val="500"/>
+              </a:spcAft>
+              <a:defRPr sz="850">
+                <a:solidFill>
+                  <a:srgbClr val="64748B"/>
+                </a:solidFill>
+              </a:defRPr>
+            </a:pPr>
+            <a:r>
+              <a:t>Đọc hiểu bối cảnh người dùng, tiêu chí nghiệm thu còn sơ sài hoặc diễn đạt mơ hồ.</a:t>
+            </a:r>
+          </a:p>
+          <a:p>
+            <a:pPr>
+              <a:defRPr sz="950" b="1">
+                <a:solidFill>
+                  <a:srgbClr val="1E293B"/>
+                </a:solidFill>
+              </a:defRPr>
+            </a:pPr>
+            <a:r>
+              <a:t>📑 Tài liệu BA / PRD Chi Tiết:</a:t>
+            </a:r>
+          </a:p>
+          <a:p>
+            <a:pPr>
+              <a:spcAft>
+                <a:spcPts val="500"/>
+              </a:spcAft>
+              <a:defRPr sz="850">
+                <a:solidFill>
+                  <a:srgbClr val="64748B"/>
+                </a:solidFill>
+              </a:defRPr>
+            </a:pPr>
+            <a:r>
+              <a:t>Phân tích tài liệu nghiệp vụ dài, phức tạp nhiều phân hệ chức năng.</a:t>
+            </a:r>
+          </a:p>
+          <a:p>
+            <a:pPr>
+              <a:defRPr sz="950" b="1">
+                <a:solidFill>
+                  <a:srgbClr val="1E293B"/>
+                </a:solidFill>
+              </a:defRPr>
+            </a:pPr>
+            <a:r>
+              <a:t>⚙️ API Swagger / JSON Schema:</a:t>
+            </a:r>
+          </a:p>
+          <a:p>
+            <a:pPr>
+              <a:spcAft>
+                <a:spcPts val="500"/>
+              </a:spcAft>
+              <a:defRPr sz="850">
+                <a:solidFill>
+                  <a:srgbClr val="64748B"/>
+                </a:solidFill>
+              </a:defRPr>
+            </a:pPr>
+            <a:r>
+              <a:t>Đọc hiểu method HTTP, headers, request body, query params và response schema.</a:t>
+            </a:r>
+          </a:p>
+          <a:p>
+            <a:pPr>
+              <a:defRPr sz="950" b="1">
+                <a:solidFill>
+                  <a:srgbClr val="1E293B"/>
+                </a:solidFill>
+              </a:defRPr>
+            </a:pPr>
+            <a:r>
+              <a:t>🧠 Bộ nhớ góc nhìn (user_preferences):</a:t>
+            </a:r>
+          </a:p>
+          <a:p>
+            <a:pPr>
+              <a:spcAft>
+                <a:spcPts val="500"/>
+              </a:spcAft>
+              <a:defRPr sz="850">
+                <a:solidFill>
+                  <a:srgbClr val="64748B"/>
+                </a:solidFill>
+              </a:defRPr>
+            </a:pPr>
+            <a:r>
+              <a:t>Tự động điều chỉnh giọng văn phân tích: Business (dễ hiểu) vs Technical (chuyên sâu).</a:t>
+            </a:r>
+          </a:p>
+        </p:txBody>
+      </p:sp>
+      <p:sp>
+        <p:nvSpPr>
+          <p:cNvPr id="6" name="Rounded Rectangle 5"/>
+          <p:cNvSpPr/>
+          <p:nvPr/>
+        </p:nvSpPr>
+        <p:spPr>
+          <a:xfrm>
+            <a:off x="4389120" y="1463040"/>
+            <a:ext cx="3383280" cy="4937760"/>
+          </a:xfrm>
+          <a:prstGeom prst="roundRect">
+            <a:avLst/>
+          </a:prstGeom>
+          <a:solidFill>
+            <a:srgbClr val="FFFFFF"/>
+          </a:solidFill>
+          <a:ln w="19050">
+            <a:solidFill>
+              <a:srgbClr val="7C3AED"/>
+            </a:solidFill>
+          </a:ln>
+        </p:spPr>
+        <p:style>
+          <a:lnRef idx="1">
+            <a:schemeClr val="accent1"/>
+          </a:lnRef>
+          <a:fillRef idx="3">
+            <a:schemeClr val="accent1"/>
+          </a:fillRef>
+          <a:effectRef idx="2">
+            <a:schemeClr val="accent1"/>
+          </a:effectRef>
+          <a:fontRef idx="minor">
+            <a:schemeClr val="lt1"/>
+          </a:fontRef>
+        </p:style>
+        <p:txBody>
+          <a:bodyPr rtlCol="0" anchor="ctr" wrap="square"/>
+          <a:lstStyle/>
+          <a:p>
+            <a:pPr algn="ctr">
+              <a:spcAft>
+                <a:spcPts val="200"/>
+              </a:spcAft>
+              <a:defRPr sz="950" b="1">
+                <a:solidFill>
+                  <a:srgbClr val="7C3AED"/>
+                </a:solidFill>
+              </a:defRPr>
+            </a:pPr>
+            <a:r>
+              <a:t>⚙️ GIAI ĐOẠN 2: TÁC VỤ THỰC HIỆN</a:t>
+            </a:r>
+          </a:p>
+          <a:p>
+            <a:pPr>
+              <a:spcAft>
+                <a:spcPts val="200"/>
+              </a:spcAft>
+              <a:defRPr sz="1300" b="1">
+                <a:solidFill>
+                  <a:srgbClr val="1E293B"/>
+                </a:solidFill>
+              </a:defRPr>
+            </a:pPr>
+            <a:r>
+              <a:t>Phân Tích, Phản Biện &amp; Thiết Kế</a:t>
             </a:r>
           </a:p>
           <a:p>
@@ -3801,14 +6074,221 @@
               <a:spcAft>
                 <a:spcPts val="800"/>
               </a:spcAft>
-              <a:defRPr sz="1100" b="1">
+              <a:defRPr sz="900">
+                <a:solidFill>
+                  <a:srgbClr val="64748B"/>
+                </a:solidFill>
+              </a:defRPr>
+            </a:pPr>
+            <a:r>
+              <a:t>5 tác vụ AI chuyên sâu thay thế công việc thủ công</a:t>
+            </a:r>
+          </a:p>
+          <a:p>
+            <a:pPr>
+              <a:defRPr sz="950" b="1">
                 <a:solidFill>
                   <a:srgbClr val="1E293B"/>
                 </a:solidFill>
               </a:defRPr>
             </a:pPr>
             <a:r>
-              <a:t>✔ 3 Nguyên Tắc Vàng QA/QC: Step Disaggregation (Tách bước) + 3 Tầng kiểm chứng sâu (UI/API Body/DB State).</a:t>
+              <a:t>📋 Bóc tách 4 thành tố cốt lõi:</a:t>
+            </a:r>
+          </a:p>
+          <a:p>
+            <a:pPr>
+              <a:spcAft>
+                <a:spcPts val="500"/>
+              </a:spcAft>
+              <a:defRPr sz="850">
+                <a:solidFill>
+                  <a:srgbClr val="64748B"/>
+                </a:solidFill>
+              </a:defRPr>
+            </a:pPr>
+            <a:r>
+              <a:t>Tự động phân tách Rules, Boundary Limits, Exception Flows và User Journey.</a:t>
+            </a:r>
+          </a:p>
+          <a:p>
+            <a:pPr>
+              <a:defRPr sz="950" b="1">
+                <a:solidFill>
+                  <a:srgbClr val="1E293B"/>
+                </a:solidFill>
+              </a:defRPr>
+            </a:pPr>
+            <a:r>
+              <a:t>❓ Soạn câu hỏi phản biện cho BA:</a:t>
+            </a:r>
+          </a:p>
+          <a:p>
+            <a:pPr>
+              <a:spcAft>
+                <a:spcPts val="500"/>
+              </a:spcAft>
+              <a:defRPr sz="850">
+                <a:solidFill>
+                  <a:srgbClr val="64748B"/>
+                </a:solidFill>
+              </a:defRPr>
+            </a:pPr>
+            <a:r>
+              <a:t>Chỉ ra các điểm hở tài liệu, mâu thuẫn logic để chốt sớm với BA/PO.</a:t>
+            </a:r>
+          </a:p>
+          <a:p>
+            <a:pPr>
+              <a:defRPr sz="950" b="1">
+                <a:solidFill>
+                  <a:srgbClr val="1E293B"/>
+                </a:solidFill>
+              </a:defRPr>
+            </a:pPr>
+            <a:r>
+              <a:t>🔍 Quét 5 rủi ro kiến trúc sâu:</a:t>
+            </a:r>
+          </a:p>
+          <a:p>
+            <a:pPr>
+              <a:spcAft>
+                <a:spcPts val="500"/>
+              </a:spcAft>
+              <a:defRPr sz="850">
+                <a:solidFill>
+                  <a:srgbClr val="64748B"/>
+                </a:solidFill>
+              </a:defRPr>
+            </a:pPr>
+            <a:r>
+              <a:t>Race condition (&lt;=50ms), Lost Update, Concurrency Deadlock, JWT Drift, Clock Drift.</a:t>
+            </a:r>
+          </a:p>
+          <a:p>
+            <a:pPr>
+              <a:defRPr sz="950" b="1">
+                <a:solidFill>
+                  <a:srgbClr val="1E293B"/>
+                </a:solidFill>
+              </a:defRPr>
+            </a:pPr>
+            <a:r>
+              <a:t>🗄️ Đối chiếu 10 Bugs Ground Truth:</a:t>
+            </a:r>
+          </a:p>
+          <a:p>
+            <a:pPr>
+              <a:spcAft>
+                <a:spcPts val="500"/>
+              </a:spcAft>
+              <a:defRPr sz="850">
+                <a:solidFill>
+                  <a:srgbClr val="64748B"/>
+                </a:solidFill>
+              </a:defRPr>
+            </a:pPr>
+            <a:r>
+              <a:t>Gắn mã Defect ID tương đồng từ kho bug thực tế để neo chuẩn logic.</a:t>
+            </a:r>
+          </a:p>
+          <a:p>
+            <a:pPr>
+              <a:defRPr sz="950" b="1">
+                <a:solidFill>
+                  <a:srgbClr val="1E293B"/>
+                </a:solidFill>
+              </a:defRPr>
+            </a:pPr>
+            <a:r>
+              <a:t>💎 3 Nguyên Tắc Vàng QA:</a:t>
+            </a:r>
+          </a:p>
+          <a:p>
+            <a:pPr>
+              <a:spcAft>
+                <a:spcPts val="500"/>
+              </a:spcAft>
+              <a:defRPr sz="850">
+                <a:solidFill>
+                  <a:srgbClr val="64748B"/>
+                </a:solidFill>
+              </a:defRPr>
+            </a:pPr>
+            <a:r>
+              <a:t>Tách bước độc lập (Disaggregation), Verify 3 tầng sâu (UI/API/DB), Gán Status NOT_RUN.</a:t>
+            </a:r>
+          </a:p>
+        </p:txBody>
+      </p:sp>
+      <p:sp>
+        <p:nvSpPr>
+          <p:cNvPr id="7" name="Rounded Rectangle 6"/>
+          <p:cNvSpPr/>
+          <p:nvPr/>
+        </p:nvSpPr>
+        <p:spPr>
+          <a:xfrm>
+            <a:off x="8046720" y="1463040"/>
+            <a:ext cx="3383280" cy="4937760"/>
+          </a:xfrm>
+          <a:prstGeom prst="roundRect">
+            <a:avLst/>
+          </a:prstGeom>
+          <a:solidFill>
+            <a:srgbClr val="FFFFFF"/>
+          </a:solidFill>
+          <a:ln w="19050">
+            <a:solidFill>
+              <a:srgbClr val="16A34A"/>
+            </a:solidFill>
+          </a:ln>
+        </p:spPr>
+        <p:style>
+          <a:lnRef idx="1">
+            <a:schemeClr val="accent1"/>
+          </a:lnRef>
+          <a:fillRef idx="3">
+            <a:schemeClr val="accent1"/>
+          </a:fillRef>
+          <a:effectRef idx="2">
+            <a:schemeClr val="accent1"/>
+          </a:effectRef>
+          <a:fontRef idx="minor">
+            <a:schemeClr val="lt1"/>
+          </a:fontRef>
+        </p:style>
+        <p:txBody>
+          <a:bodyPr rtlCol="0" anchor="ctr" wrap="square"/>
+          <a:lstStyle/>
+          <a:p>
+            <a:pPr algn="ctr">
+              <a:spcAft>
+                <a:spcPts val="200"/>
+              </a:spcAft>
+              <a:defRPr sz="950" b="1">
+                <a:solidFill>
+                  <a:srgbClr val="16A34A"/>
+                </a:solidFill>
+              </a:defRPr>
+            </a:pPr>
+            <a:r>
+              <a:t>📤 GIAI ĐOẠN 3: ĐẦU RA BÀN GIAO</a:t>
+            </a:r>
+          </a:p>
+          <a:p>
+            <a:pPr>
+              <a:spcAft>
+                <a:spcPts val="200"/>
+              </a:spcAft>
+              <a:defRPr sz="1300" b="1">
+                <a:solidFill>
+                  <a:srgbClr val="1E293B"/>
+                </a:solidFill>
+              </a:defRPr>
+            </a:pPr>
+            <a:r>
+              <a:t>Sản Phẩm Bàn Giao Sạch 100%</a:t>
             </a:r>
           </a:p>
           <a:p>
@@ -3816,29 +6296,122 @@
               <a:spcAft>
                 <a:spcPts val="800"/>
               </a:spcAft>
-              <a:defRPr sz="1100" b="1">
+              <a:defRPr sz="900">
+                <a:solidFill>
+                  <a:srgbClr val="64748B"/>
+                </a:solidFill>
+              </a:defRPr>
+            </a:pPr>
+            <a:r>
+              <a:t>Trực quan hóa Google Sheets &amp; Lưu trữ bền vững</a:t>
+            </a:r>
+          </a:p>
+          <a:p>
+            <a:pPr>
+              <a:defRPr sz="950" b="1">
                 <a:solidFill>
                   <a:srgbClr val="1E293B"/>
                 </a:solidFill>
               </a:defRPr>
             </a:pPr>
             <a:r>
-              <a:t>✔ Anchoring Kho Bug Thực Tế: Đối chiếu 10 Bug Production Patterns chuẩn hóa chống ảo giác.</a:t>
-            </a:r>
-          </a:p>
-          <a:p>
-            <a:pPr>
-              <a:spcAft>
-                <a:spcPts val="800"/>
-              </a:spcAft>
-              <a:defRPr sz="1100" b="1">
+              <a:t>📊 Google Sheets Master Ant Design Blue:</a:t>
+            </a:r>
+          </a:p>
+          <a:p>
+            <a:pPr>
+              <a:spcAft>
+                <a:spcPts val="500"/>
+              </a:spcAft>
+              <a:defRPr sz="850">
+                <a:solidFill>
+                  <a:srgbClr val="64748B"/>
+                </a:solidFill>
+              </a:defRPr>
+            </a:pPr>
+            <a:r>
+              <a:t>Tự động ghi nối tiếp vào 2 tab Requirements &amp; Test Cases, Header xanh #1677FF, freeze row 1.</a:t>
+            </a:r>
+          </a:p>
+          <a:p>
+            <a:pPr>
+              <a:defRPr sz="950" b="1">
                 <a:solidFill>
                   <a:srgbClr val="1E293B"/>
                 </a:solidFill>
               </a:defRPr>
             </a:pPr>
             <a:r>
-              <a:t>✔ Local-First &amp; Drive Sync: Lưu trữ tích lũy (Append-Only) và đẩy lên Google Sheets Enterprise thời gian thực.</a:t>
+              <a:t>🎯 Dropdown Status &amp; Conditional Format:</a:t>
+            </a:r>
+          </a:p>
+          <a:p>
+            <a:pPr>
+              <a:spcAft>
+                <a:spcPts val="500"/>
+              </a:spcAft>
+              <a:defRPr sz="850">
+                <a:solidFill>
+                  <a:srgbClr val="64748B"/>
+                </a:solidFill>
+              </a:defRPr>
+            </a:pPr>
+            <a:r>
+              <a:t>Menu chọn nhanh PASS/FAIL/BLOCKED/NOT_RUN tự đổi màu tiện lợi cho Tester.</a:t>
+            </a:r>
+          </a:p>
+          <a:p>
+            <a:pPr>
+              <a:defRPr sz="950" b="1">
+                <a:solidFill>
+                  <a:srgbClr val="1E293B"/>
+                </a:solidFill>
+              </a:defRPr>
+            </a:pPr>
+            <a:r>
+              <a:t>💾 Local-First Append-Only:</a:t>
+            </a:r>
+          </a:p>
+          <a:p>
+            <a:pPr>
+              <a:spcAft>
+                <a:spcPts val="500"/>
+              </a:spcAft>
+              <a:defRPr sz="850">
+                <a:solidFill>
+                  <a:srgbClr val="64748B"/>
+                </a:solidFill>
+              </a:defRPr>
+            </a:pPr>
+            <a:r>
+              <a:t>Lưu tích lũy vào file JSON cục bộ, bảo toàn 100% lịch sử các sprint trước, cấm reset.</a:t>
+            </a:r>
+          </a:p>
+          <a:p>
+            <a:pPr>
+              <a:defRPr sz="950" b="1">
+                <a:solidFill>
+                  <a:srgbClr val="1E293B"/>
+                </a:solidFill>
+              </a:defRPr>
+            </a:pPr>
+            <a:r>
+              <a:t>🤖 Sẵn sàng Playwright E2E Automation:</a:t>
+            </a:r>
+          </a:p>
+          <a:p>
+            <a:pPr>
+              <a:spcAft>
+                <a:spcPts val="500"/>
+              </a:spcAft>
+              <a:defRPr sz="850">
+                <a:solidFill>
+                  <a:srgbClr val="64748B"/>
+                </a:solidFill>
+              </a:defRPr>
+            </a:pPr>
+            <a:r>
+              <a:t>Kịch bản đã chia nhỏ bước, code tự động hóa ngay mà không cần viết lại.</a:t>
             </a:r>
           </a:p>
         </p:txBody>
@@ -3870,7 +6443,7 @@
         <p:spPr>
           <a:xfrm>
             <a:off x="0" y="0"/>
-            <a:ext cx="12191695" cy="109728"/>
+            <a:ext cx="12191695" cy="91440"/>
           </a:xfrm>
           <a:prstGeom prst="rect">
             <a:avLst/>
@@ -3912,8 +6485,8 @@
         </p:nvSpPr>
         <p:spPr>
           <a:xfrm>
-            <a:off x="731520" y="365760"/>
-            <a:ext cx="2011680" cy="320040"/>
+            <a:off x="731520" y="292608"/>
+            <a:ext cx="3291840" cy="292608"/>
           </a:xfrm>
           <a:prstGeom prst="roundRect">
             <a:avLst/>
@@ -3946,14 +6519,14 @@
           <a:lstStyle/>
           <a:p>
             <a:pPr algn="ctr">
-              <a:defRPr sz="1000" b="1">
+              <a:defRPr sz="950" b="1">
                 <a:solidFill>
                   <a:srgbClr val="0958D9"/>
                 </a:solidFill>
               </a:defRPr>
             </a:pPr>
             <a:r>
-              <a:t>2. ARCHITECTURE &amp; DESIGN</a:t>
+              <a:t>2. NHIỆM VỤ TRỌNG TÂM CỦA HỆ THỐNG</a:t>
             </a:r>
           </a:p>
         </p:txBody>
@@ -3966,8 +6539,8 @@
         </p:nvSpPr>
         <p:spPr>
           <a:xfrm>
-            <a:off x="731520" y="777240"/>
-            <a:ext cx="10698480" cy="640080"/>
+            <a:off x="731520" y="621792"/>
+            <a:ext cx="10698480" cy="658368"/>
           </a:xfrm>
           <a:prstGeom prst="rect">
             <a:avLst/>
@@ -3981,26 +6554,26 @@
           <a:lstStyle/>
           <a:p>
             <a:pPr>
-              <a:defRPr sz="2200" b="1">
+              <a:defRPr sz="2000" b="1">
                 <a:solidFill>
                   <a:srgbClr val="1E293B"/>
                 </a:solidFill>
               </a:defRPr>
             </a:pPr>
             <a:r>
-              <a:t>Kiến Trúc Tác Tử: 2-Phase State Machine &amp; Human Gates</a:t>
-            </a:r>
-          </a:p>
-          <a:p>
-            <a:pPr>
-              <a:defRPr sz="1200">
+              <a:t>Hệ Thống Nhằm Nhiệm Vụ Gì? 4 Sứ Mệnh Kiểm Thử Chiến Lược</a:t>
+            </a:r>
+          </a:p>
+          <a:p>
+            <a:pPr>
+              <a:defRPr sz="1050">
                 <a:solidFill>
                   <a:srgbClr val="64748B"/>
                 </a:solidFill>
               </a:defRPr>
             </a:pPr>
             <a:r>
-              <a:t>Hệ thống Native Plugin không cần Backend cồng kềnh - Vận hành bằng Orchestrator và 2 Subagents độc lập.</a:t>
+              <a:t>Giải quyết triệt để các nút thắt cổ chai về chất lượng phần mềm, phát hiện lỗi sớm và chuẩn hóa dữ liệu.</a:t>
             </a:r>
           </a:p>
         </p:txBody>
@@ -4013,200 +6586,8 @@
         </p:nvSpPr>
         <p:spPr>
           <a:xfrm>
-            <a:off x="731520" y="1645920"/>
-            <a:ext cx="5212080" cy="4663440"/>
-          </a:xfrm>
-          <a:prstGeom prst="roundRect">
-            <a:avLst/>
-          </a:prstGeom>
-          <a:solidFill>
-            <a:srgbClr val="F8FAFC"/>
-          </a:solidFill>
-          <a:ln>
-            <a:solidFill>
-              <a:srgbClr val="CBD5E1"/>
-            </a:solidFill>
-          </a:ln>
-        </p:spPr>
-        <p:style>
-          <a:lnRef idx="1">
-            <a:schemeClr val="accent1"/>
-          </a:lnRef>
-          <a:fillRef idx="3">
-            <a:schemeClr val="accent1"/>
-          </a:fillRef>
-          <a:effectRef idx="2">
-            <a:schemeClr val="accent1"/>
-          </a:effectRef>
-          <a:fontRef idx="minor">
-            <a:schemeClr val="lt1"/>
-          </a:fontRef>
-        </p:style>
-        <p:txBody>
-          <a:bodyPr rtlCol="0" anchor="ctr" wrap="square"/>
-          <a:lstStyle/>
-          <a:p>
-            <a:pPr algn="ctr">
-              <a:spcAft>
-                <a:spcPts val="800"/>
-              </a:spcAft>
-              <a:defRPr sz="1200" b="1">
-                <a:solidFill>
-                  <a:srgbClr val="1677FF"/>
-                </a:solidFill>
-              </a:defRPr>
-            </a:pPr>
-            <a:r>
-              <a:t>🔄 QUY TRÌNH ĐIỀU PHỐI 2 PHA NGHIÊM NGẶT</a:t>
-            </a:r>
-          </a:p>
-          <a:p>
-            <a:pPr>
-              <a:defRPr sz="1000" b="1">
-                <a:solidFill>
-                  <a:srgbClr val="1E293B"/>
-                </a:solidFill>
-              </a:defRPr>
-            </a:pPr>
-            <a:r>
-              <a:t>BƯỚC 0: PRE-FLIGHT CACHE VALIDATION</a:t>
-            </a:r>
-          </a:p>
-          <a:p>
-            <a:pPr>
-              <a:spcAft>
-                <a:spcPts val="600"/>
-              </a:spcAft>
-              <a:defRPr sz="950">
-                <a:solidFill>
-                  <a:srgbClr val="64748B"/>
-                </a:solidFill>
-              </a:defRPr>
-            </a:pPr>
-            <a:r>
-              <a:t>Kiểm tra Drive modifiedTime vs .sync_metadata.json. Offline Fallback tự động khi mất mạng.</a:t>
-            </a:r>
-          </a:p>
-          <a:p>
-            <a:pPr>
-              <a:defRPr sz="1000" b="1">
-                <a:solidFill>
-                  <a:srgbClr val="1E293B"/>
-                </a:solidFill>
-              </a:defRPr>
-            </a:pPr>
-            <a:r>
-              <a:t>PHASE 1: STATIC ANALYSIS (req-risk-analyst)</a:t>
-            </a:r>
-          </a:p>
-          <a:p>
-            <a:pPr>
-              <a:spcAft>
-                <a:spcPts val="600"/>
-              </a:spcAft>
-              <a:defRPr sz="950">
-                <a:solidFill>
-                  <a:srgbClr val="64748B"/>
-                </a:solidFill>
-              </a:defRPr>
-            </a:pPr>
-            <a:r>
-              <a:t>Bóc tách 4 thành tố Business Rules • Đặt câu hỏi phản biện BA • Quét 5 rủi ro kỹ thuật sâu • Đối chiếu 10 Bug lịch sử.</a:t>
-            </a:r>
-          </a:p>
-          <a:p>
-            <a:pPr>
-              <a:defRPr sz="1000" b="1">
-                <a:solidFill>
-                  <a:srgbClr val="1E293B"/>
-                </a:solidFill>
-              </a:defRPr>
-            </a:pPr>
-            <a:r>
-              <a:t>🛑 HUMAN GATE 1 (CỔNG KIỂM SOÁT 1)</a:t>
-            </a:r>
-          </a:p>
-          <a:p>
-            <a:pPr>
-              <a:spcAft>
-                <a:spcPts val="600"/>
-              </a:spcAft>
-              <a:defRPr sz="950">
-                <a:solidFill>
-                  <a:srgbClr val="64748B"/>
-                </a:solidFill>
-              </a:defRPr>
-            </a:pPr>
-            <a:r>
-              <a:t>BẮT BUỘC DỪNG! Tester duyệt &amp; tinh chỉnh logic. Rollback ngay nếu requirement thay đổi.</a:t>
-            </a:r>
-          </a:p>
-          <a:p>
-            <a:pPr>
-              <a:defRPr sz="1000" b="1">
-                <a:solidFill>
-                  <a:srgbClr val="1E293B"/>
-                </a:solidFill>
-              </a:defRPr>
-            </a:pPr>
-            <a:r>
-              <a:t>PHASE 2: TEST DESIGN (test-automation-architect)</a:t>
-            </a:r>
-          </a:p>
-          <a:p>
-            <a:pPr>
-              <a:spcAft>
-                <a:spcPts val="600"/>
-              </a:spcAft>
-              <a:defRPr sz="950">
-                <a:solidFill>
-                  <a:srgbClr val="64748B"/>
-                </a:solidFill>
-              </a:defRPr>
-            </a:pPr>
-            <a:r>
-              <a:t>Sinh 5 kịch bản chuẩn: Happy Path, Boundary, Negative, Concurrency (≤50ms), State Conflict &amp; Recovery.</a:t>
-            </a:r>
-          </a:p>
-          <a:p>
-            <a:pPr>
-              <a:defRPr sz="1000" b="1">
-                <a:solidFill>
-                  <a:srgbClr val="1E293B"/>
-                </a:solidFill>
-              </a:defRPr>
-            </a:pPr>
-            <a:r>
-              <a:t>🛑 HUMAN GATE 2 &amp; SYNC CLOUD</a:t>
-            </a:r>
-          </a:p>
-          <a:p>
-            <a:pPr>
-              <a:spcAft>
-                <a:spcPts val="600"/>
-              </a:spcAft>
-              <a:defRPr sz="950">
-                <a:solidFill>
-                  <a:srgbClr val="64748B"/>
-                </a:solidFill>
-              </a:defRPr>
-            </a:pPr>
-            <a:r>
-              <a:t>Tester xác nhận kịch bản -&gt; Append vào local JSON -&gt; Đẩy lên Google Sheets Master qua MCP.</a:t>
-            </a:r>
-          </a:p>
-        </p:txBody>
-      </p:sp>
-      <p:sp>
-        <p:nvSpPr>
-          <p:cNvPr id="6" name="Rounded Rectangle 5"/>
-          <p:cNvSpPr/>
-          <p:nvPr/>
-        </p:nvSpPr>
-        <p:spPr>
-          <a:xfrm>
-            <a:off x="6217920" y="1645920"/>
-            <a:ext cx="5212080" cy="4663440"/>
+            <a:off x="731520" y="1463040"/>
+            <a:ext cx="2468880" cy="4937760"/>
           </a:xfrm>
           <a:prstGeom prst="roundRect">
             <a:avLst/>
@@ -4240,124 +6621,755 @@
           <a:p>
             <a:pPr algn="ctr">
               <a:spcAft>
-                <a:spcPts val="1000"/>
+                <a:spcPts val="200"/>
+              </a:spcAft>
+              <a:defRPr sz="950" b="1">
+                <a:solidFill>
+                  <a:srgbClr val="1677FF"/>
+                </a:solidFill>
+              </a:defRPr>
+            </a:pPr>
+            <a:r>
+              <a:t>🎯 NHIỆM VỤ 1</a:t>
+            </a:r>
+          </a:p>
+          <a:p>
+            <a:pPr>
+              <a:spcAft>
+                <a:spcPts val="200"/>
               </a:spcAft>
               <a:defRPr sz="1200" b="1">
                 <a:solidFill>
-                  <a:srgbClr val="0958D9"/>
-                </a:solidFill>
-              </a:defRPr>
-            </a:pPr>
-            <a:r>
-              <a:t>🤖 PHÂN QUYỀN TÁC TỬ &amp; BỘ NHỚ GÓC NHÌN</a:t>
-            </a:r>
-          </a:p>
-          <a:p>
-            <a:pPr>
-              <a:defRPr sz="1100" b="1">
-                <a:solidFill>
-                  <a:srgbClr val="0958D9"/>
-                </a:solidFill>
-              </a:defRPr>
-            </a:pPr>
-            <a:r>
-              <a:t>🔹 Subagent 1: req-risk-analyst</a:t>
-            </a:r>
-          </a:p>
-          <a:p>
-            <a:pPr>
-              <a:spcAft>
-                <a:spcPts val="600"/>
-              </a:spcAft>
-              <a:defRPr sz="950">
-                <a:solidFill>
                   <a:srgbClr val="1E293B"/>
                 </a:solidFill>
               </a:defRPr>
             </a:pPr>
             <a:r>
-              <a:t>Đảm nhiệm Static Analysis. Tham chiếu risk-checklist.md bao gồm 5 góc khuất: Concurrency, State Drift, Clock Drift, Non-Idempotency, Distributed Transaction Failure. Tuyệt đối không sinh test case.</a:t>
-            </a:r>
-          </a:p>
-          <a:p>
-            <a:pPr>
-              <a:defRPr sz="1100" b="1">
-                <a:solidFill>
-                  <a:srgbClr val="0958D9"/>
-                </a:solidFill>
-              </a:defRPr>
-            </a:pPr>
-            <a:r>
-              <a:t>🔹 Subagent 2: test-automation-architect</a:t>
-            </a:r>
-          </a:p>
-          <a:p>
-            <a:pPr>
-              <a:spcAft>
-                <a:spcPts val="600"/>
-              </a:spcAft>
-              <a:defRPr sz="950">
+              <a:t>Shift-Left QA</a:t>
+            </a:r>
+            <a:br/>
+            <a:r>
+              <a:t>Chặn Đứng Lỗi Sớm</a:t>
+            </a:r>
+          </a:p>
+          <a:p>
+            <a:pPr>
+              <a:spcAft>
+                <a:spcPts val="800"/>
+              </a:spcAft>
+              <a:defRPr sz="850">
+                <a:solidFill>
+                  <a:srgbClr val="64748B"/>
+                </a:solidFill>
+              </a:defRPr>
+            </a:pPr>
+            <a:r>
+              <a:t>Phát hiện kẽ hở ngay tại Spec</a:t>
+            </a:r>
+          </a:p>
+          <a:p>
+            <a:pPr>
+              <a:defRPr sz="900" b="1">
                 <a:solidFill>
                   <a:srgbClr val="1E293B"/>
                 </a:solidFill>
               </a:defRPr>
             </a:pPr>
             <a:r>
-              <a:t>Chỉ được kích hoạt khi Phase 1 đã duyệt. Áp dụng test-design-matrix.md để xếp hạng độ ưu tiên P1/P2/P3 và mô tả chi tiết bước giả lập 3 tầng.</a:t>
-            </a:r>
-          </a:p>
-          <a:p>
-            <a:pPr>
-              <a:defRPr sz="1100" b="1">
-                <a:solidFill>
-                  <a:srgbClr val="0958D9"/>
-                </a:solidFill>
-              </a:defRPr>
-            </a:pPr>
-            <a:r>
-              <a:t>🔹 Bộ nhớ góc nhìn (Perspective Persistence)</a:t>
-            </a:r>
-          </a:p>
-          <a:p>
-            <a:pPr>
-              <a:spcAft>
-                <a:spcPts val="600"/>
-              </a:spcAft>
-              <a:defRPr sz="950">
+              <a:t>⚠️ Thực trạng:</a:t>
+            </a:r>
+          </a:p>
+          <a:p>
+            <a:pPr>
+              <a:spcAft>
+                <a:spcPts val="500"/>
+              </a:spcAft>
+              <a:defRPr sz="850">
+                <a:solidFill>
+                  <a:srgbClr val="64748B"/>
+                </a:solidFill>
+              </a:defRPr>
+            </a:pPr>
+            <a:r>
+              <a:t>70% lỗi phần mềm xuất phát từ yêu cầu mơ hồ, thiếu biên, mâu thuẫn logic.</a:t>
+            </a:r>
+          </a:p>
+          <a:p>
+            <a:pPr>
+              <a:defRPr sz="900" b="1">
                 <a:solidFill>
                   <a:srgbClr val="1E293B"/>
                 </a:solidFill>
               </a:defRPr>
             </a:pPr>
             <a:r>
-              <a:t>Lưu tại user_preferences.json: Hỗ trợ 3 chế độ: 'business' (ngôn ngữ đời sống trực quan cho BA), 'technical' (thuật ngữ SDET chuyên sâu), 'hybrid'. Tự động ghi nhớ qua các phiên.</a:t>
-            </a:r>
-          </a:p>
-          <a:p>
-            <a:pPr>
-              <a:defRPr sz="1100" b="1">
-                <a:solidFill>
-                  <a:srgbClr val="0958D9"/>
-                </a:solidFill>
-              </a:defRPr>
-            </a:pPr>
-            <a:r>
-              <a:t>🔹 Cơ chế Progressive Disclosure</a:t>
-            </a:r>
-          </a:p>
-          <a:p>
-            <a:pPr>
-              <a:spcAft>
-                <a:spcPts val="600"/>
-              </a:spcAft>
-              <a:defRPr sz="950">
+              <a:t>💡 Nhiệm vụ:</a:t>
+            </a:r>
+          </a:p>
+          <a:p>
+            <a:pPr>
+              <a:spcAft>
+                <a:spcPts val="500"/>
+              </a:spcAft>
+              <a:defRPr sz="850">
+                <a:solidFill>
+                  <a:srgbClr val="64748B"/>
+                </a:solidFill>
+              </a:defRPr>
+            </a:pPr>
+            <a:r>
+              <a:t>Bắt lỗi và kẽ hở nghiệp vụ ngay trong Sprint Planning trước khi Dev viết code.</a:t>
+            </a:r>
+          </a:p>
+          <a:p>
+            <a:pPr>
+              <a:defRPr sz="900" b="1">
                 <a:solidFill>
                   <a:srgbClr val="1E293B"/>
                 </a:solidFill>
               </a:defRPr>
             </a:pPr>
             <a:r>
-              <a:t>Tối ưu hóa Token &amp; Context Window: Cẩm nang kỹ thuật được chia nhỏ vào thư mục references/ thay vì nhồi nhét vào prompt chính, tránh làm loãng context.</a:t>
+              <a:t>💰 Giá trị ROI:</a:t>
+            </a:r>
+          </a:p>
+          <a:p>
+            <a:pPr>
+              <a:spcAft>
+                <a:spcPts val="500"/>
+              </a:spcAft>
+              <a:defRPr sz="850">
+                <a:solidFill>
+                  <a:srgbClr val="64748B"/>
+                </a:solidFill>
+              </a:defRPr>
+            </a:pPr>
+            <a:r>
+              <a:t>Chi phí sửa lỗi tại Spec rẻ hơn 10 - 30 lần so với sửa lỗi tại UAT hoặc Production.</a:t>
+            </a:r>
+          </a:p>
+          <a:p>
+            <a:pPr>
+              <a:defRPr sz="900" b="1">
+                <a:solidFill>
+                  <a:srgbClr val="1E293B"/>
+                </a:solidFill>
+              </a:defRPr>
+            </a:pPr>
+            <a:r>
+              <a:t>🤝 Hợp tác:</a:t>
+            </a:r>
+          </a:p>
+          <a:p>
+            <a:pPr>
+              <a:spcAft>
+                <a:spcPts val="500"/>
+              </a:spcAft>
+              <a:defRPr sz="850">
+                <a:solidFill>
+                  <a:srgbClr val="64748B"/>
+                </a:solidFill>
+              </a:defRPr>
+            </a:pPr>
+            <a:r>
+              <a:t>Tạo cầu nối phản biện chủ động giữa QA, BA và Tech Lead.</a:t>
+            </a:r>
+          </a:p>
+        </p:txBody>
+      </p:sp>
+      <p:sp>
+        <p:nvSpPr>
+          <p:cNvPr id="6" name="Rounded Rectangle 5"/>
+          <p:cNvSpPr/>
+          <p:nvPr/>
+        </p:nvSpPr>
+        <p:spPr>
+          <a:xfrm>
+            <a:off x="3474720" y="1463040"/>
+            <a:ext cx="2468880" cy="4937760"/>
+          </a:xfrm>
+          <a:prstGeom prst="roundRect">
+            <a:avLst/>
+          </a:prstGeom>
+          <a:solidFill>
+            <a:srgbClr val="FFFFFF"/>
+          </a:solidFill>
+          <a:ln w="19050">
+            <a:solidFill>
+              <a:srgbClr val="0D9488"/>
+            </a:solidFill>
+          </a:ln>
+        </p:spPr>
+        <p:style>
+          <a:lnRef idx="1">
+            <a:schemeClr val="accent1"/>
+          </a:lnRef>
+          <a:fillRef idx="3">
+            <a:schemeClr val="accent1"/>
+          </a:fillRef>
+          <a:effectRef idx="2">
+            <a:schemeClr val="accent1"/>
+          </a:effectRef>
+          <a:fontRef idx="minor">
+            <a:schemeClr val="lt1"/>
+          </a:fontRef>
+        </p:style>
+        <p:txBody>
+          <a:bodyPr rtlCol="0" anchor="ctr" wrap="square"/>
+          <a:lstStyle/>
+          <a:p>
+            <a:pPr algn="ctr">
+              <a:spcAft>
+                <a:spcPts val="200"/>
+              </a:spcAft>
+              <a:defRPr sz="950" b="1">
+                <a:solidFill>
+                  <a:srgbClr val="0D9488"/>
+                </a:solidFill>
+              </a:defRPr>
+            </a:pPr>
+            <a:r>
+              <a:t>🚀 NHIỆM VỤ 2</a:t>
+            </a:r>
+          </a:p>
+          <a:p>
+            <a:pPr>
+              <a:spcAft>
+                <a:spcPts val="200"/>
+              </a:spcAft>
+              <a:defRPr sz="1200" b="1">
+                <a:solidFill>
+                  <a:srgbClr val="1E293B"/>
+                </a:solidFill>
+              </a:defRPr>
+            </a:pPr>
+            <a:r>
+              <a:t>Tối Ưu Chu Trình QA</a:t>
+            </a:r>
+            <a:br/>
+            <a:r>
+              <a:t>Giải Phóng Thủ Công</a:t>
+            </a:r>
+          </a:p>
+          <a:p>
+            <a:pPr>
+              <a:spcAft>
+                <a:spcPts val="800"/>
+              </a:spcAft>
+              <a:defRPr sz="850">
+                <a:solidFill>
+                  <a:srgbClr val="64748B"/>
+                </a:solidFill>
+              </a:defRPr>
+            </a:pPr>
+            <a:r>
+              <a:t>Tự động hóa đọc hiểu &amp; viết test</a:t>
+            </a:r>
+          </a:p>
+          <a:p>
+            <a:pPr>
+              <a:defRPr sz="900" b="1">
+                <a:solidFill>
+                  <a:srgbClr val="1E293B"/>
+                </a:solidFill>
+              </a:defRPr>
+            </a:pPr>
+            <a:r>
+              <a:t>⚠️ Thực trạng:</a:t>
+            </a:r>
+          </a:p>
+          <a:p>
+            <a:pPr>
+              <a:spcAft>
+                <a:spcPts val="500"/>
+              </a:spcAft>
+              <a:defRPr sz="850">
+                <a:solidFill>
+                  <a:srgbClr val="64748B"/>
+                </a:solidFill>
+              </a:defRPr>
+            </a:pPr>
+            <a:r>
+              <a:t>QA mất nhiều thời gian sprint chỉ để đọc spec dài, kẻ bảng excel, format sheet.</a:t>
+            </a:r>
+          </a:p>
+          <a:p>
+            <a:pPr>
+              <a:defRPr sz="900" b="1">
+                <a:solidFill>
+                  <a:srgbClr val="1E293B"/>
+                </a:solidFill>
+              </a:defRPr>
+            </a:pPr>
+            <a:r>
+              <a:t>💡 Nhiệm vụ:</a:t>
+            </a:r>
+          </a:p>
+          <a:p>
+            <a:pPr>
+              <a:spcAft>
+                <a:spcPts val="500"/>
+              </a:spcAft>
+              <a:defRPr sz="850">
+                <a:solidFill>
+                  <a:srgbClr val="64748B"/>
+                </a:solidFill>
+              </a:defRPr>
+            </a:pPr>
+            <a:r>
+              <a:t>Tự động hóa 80% khâu đọc hiểu, bóc tách rules và viết đặc tả test cases.</a:t>
+            </a:r>
+          </a:p>
+          <a:p>
+            <a:pPr>
+              <a:defRPr sz="900" b="1">
+                <a:solidFill>
+                  <a:srgbClr val="1E293B"/>
+                </a:solidFill>
+              </a:defRPr>
+            </a:pPr>
+            <a:r>
+              <a:t>⏳ Tốc độ vượt trội:</a:t>
+            </a:r>
+          </a:p>
+          <a:p>
+            <a:pPr>
+              <a:spcAft>
+                <a:spcPts val="500"/>
+              </a:spcAft>
+              <a:defRPr sz="850">
+                <a:solidFill>
+                  <a:srgbClr val="64748B"/>
+                </a:solidFill>
+              </a:defRPr>
+            </a:pPr>
+            <a:r>
+              <a:t>Chuẩn bị test suite hoàn chỉnh trong vài phút thay vì cả buổi làm việc.</a:t>
+            </a:r>
+          </a:p>
+          <a:p>
+            <a:pPr>
+              <a:defRPr sz="900" b="1">
+                <a:solidFill>
+                  <a:srgbClr val="1E293B"/>
+                </a:solidFill>
+              </a:defRPr>
+            </a:pPr>
+            <a:r>
+              <a:t>🧠 Nâng tầm QA:</a:t>
+            </a:r>
+          </a:p>
+          <a:p>
+            <a:pPr>
+              <a:spcAft>
+                <a:spcPts val="500"/>
+              </a:spcAft>
+              <a:defRPr sz="850">
+                <a:solidFill>
+                  <a:srgbClr val="64748B"/>
+                </a:solidFill>
+              </a:defRPr>
+            </a:pPr>
+            <a:r>
+              <a:t>Dành thời gian tập trung vào Exploratory Testing, Security &amp; UX.</a:t>
+            </a:r>
+          </a:p>
+        </p:txBody>
+      </p:sp>
+      <p:sp>
+        <p:nvSpPr>
+          <p:cNvPr id="7" name="Rounded Rectangle 6"/>
+          <p:cNvSpPr/>
+          <p:nvPr/>
+        </p:nvSpPr>
+        <p:spPr>
+          <a:xfrm>
+            <a:off x="6217920" y="1463040"/>
+            <a:ext cx="2468880" cy="4937760"/>
+          </a:xfrm>
+          <a:prstGeom prst="roundRect">
+            <a:avLst/>
+          </a:prstGeom>
+          <a:solidFill>
+            <a:srgbClr val="FFFFFF"/>
+          </a:solidFill>
+          <a:ln w="19050">
+            <a:solidFill>
+              <a:srgbClr val="E11D48"/>
+            </a:solidFill>
+          </a:ln>
+        </p:spPr>
+        <p:style>
+          <a:lnRef idx="1">
+            <a:schemeClr val="accent1"/>
+          </a:lnRef>
+          <a:fillRef idx="3">
+            <a:schemeClr val="accent1"/>
+          </a:fillRef>
+          <a:effectRef idx="2">
+            <a:schemeClr val="accent1"/>
+          </a:effectRef>
+          <a:fontRef idx="minor">
+            <a:schemeClr val="lt1"/>
+          </a:fontRef>
+        </p:style>
+        <p:txBody>
+          <a:bodyPr rtlCol="0" anchor="ctr" wrap="square"/>
+          <a:lstStyle/>
+          <a:p>
+            <a:pPr algn="ctr">
+              <a:spcAft>
+                <a:spcPts val="200"/>
+              </a:spcAft>
+              <a:defRPr sz="950" b="1">
+                <a:solidFill>
+                  <a:srgbClr val="E11D48"/>
+                </a:solidFill>
+              </a:defRPr>
+            </a:pPr>
+            <a:r>
+              <a:t>🛡️ NHIỆM VỤ 3</a:t>
+            </a:r>
+          </a:p>
+          <a:p>
+            <a:pPr>
+              <a:spcAft>
+                <a:spcPts val="200"/>
+              </a:spcAft>
+              <a:defRPr sz="1200" b="1">
+                <a:solidFill>
+                  <a:srgbClr val="1E293B"/>
+                </a:solidFill>
+              </a:defRPr>
+            </a:pPr>
+            <a:r>
+              <a:t>Triệt Tiêu Ảo Giác</a:t>
+            </a:r>
+            <a:br/>
+            <a:r>
+              <a:t>Chính Xác Dữ Liệu</a:t>
+            </a:r>
+          </a:p>
+          <a:p>
+            <a:pPr>
+              <a:spcAft>
+                <a:spcPts val="800"/>
+              </a:spcAft>
+              <a:defRPr sz="850">
+                <a:solidFill>
+                  <a:srgbClr val="64748B"/>
+                </a:solidFill>
+              </a:defRPr>
+            </a:pPr>
+            <a:r>
+              <a:t>Kiểm chứng 3 tầng &amp; Con người duyệt</a:t>
+            </a:r>
+          </a:p>
+          <a:p>
+            <a:pPr>
+              <a:defRPr sz="900" b="1">
+                <a:solidFill>
+                  <a:srgbClr val="1E293B"/>
+                </a:solidFill>
+              </a:defRPr>
+            </a:pPr>
+            <a:r>
+              <a:t>⚠️ Thực trạng:</a:t>
+            </a:r>
+          </a:p>
+          <a:p>
+            <a:pPr>
+              <a:spcAft>
+                <a:spcPts val="500"/>
+              </a:spcAft>
+              <a:defRPr sz="850">
+                <a:solidFill>
+                  <a:srgbClr val="64748B"/>
+                </a:solidFill>
+              </a:defRPr>
+            </a:pPr>
+            <a:r>
+              <a:t>Prompt AI tự do luôn tạo test case hời hợt 'HTTP 200', bịa endpoint giả.</a:t>
+            </a:r>
+          </a:p>
+          <a:p>
+            <a:pPr>
+              <a:defRPr sz="900" b="1">
+                <a:solidFill>
+                  <a:srgbClr val="1E293B"/>
+                </a:solidFill>
+              </a:defRPr>
+            </a:pPr>
+            <a:r>
+              <a:t>💡 Nhiệm vụ:</a:t>
+            </a:r>
+          </a:p>
+          <a:p>
+            <a:pPr>
+              <a:spcAft>
+                <a:spcPts val="500"/>
+              </a:spcAft>
+              <a:defRPr sz="850">
+                <a:solidFill>
+                  <a:srgbClr val="64748B"/>
+                </a:solidFill>
+              </a:defRPr>
+            </a:pPr>
+            <a:r>
+              <a:t>Kiểm chứng sâu 3 tầng UI + API Body + DB State &amp; Event.</a:t>
+            </a:r>
+          </a:p>
+          <a:p>
+            <a:pPr>
+              <a:defRPr sz="900" b="1">
+                <a:solidFill>
+                  <a:srgbClr val="1E293B"/>
+                </a:solidFill>
+              </a:defRPr>
+            </a:pPr>
+            <a:r>
+              <a:t>🛑 Human-in-the-Loop:</a:t>
+            </a:r>
+          </a:p>
+          <a:p>
+            <a:pPr>
+              <a:spcAft>
+                <a:spcPts val="500"/>
+              </a:spcAft>
+              <a:defRPr sz="850">
+                <a:solidFill>
+                  <a:srgbClr val="64748B"/>
+                </a:solidFill>
+              </a:defRPr>
+            </a:pPr>
+            <a:r>
+              <a:t>2 Chốt chặn Human Gates trao quyền kiểm soát tối cao cho Tester.</a:t>
+            </a:r>
+          </a:p>
+          <a:p>
+            <a:pPr>
+              <a:defRPr sz="900" b="1">
+                <a:solidFill>
+                  <a:srgbClr val="1E293B"/>
+                </a:solidFill>
+              </a:defRPr>
+            </a:pPr>
+            <a:r>
+              <a:t>↩️ Tự động Rollback:</a:t>
+            </a:r>
+          </a:p>
+          <a:p>
+            <a:pPr>
+              <a:spcAft>
+                <a:spcPts val="500"/>
+              </a:spcAft>
+              <a:defRPr sz="850">
+                <a:solidFill>
+                  <a:srgbClr val="64748B"/>
+                </a:solidFill>
+              </a:defRPr>
+            </a:pPr>
+            <a:r>
+              <a:t>Đổi requirement là tự động hủy test cũ và phân tích lại từ đầu.</a:t>
+            </a:r>
+          </a:p>
+        </p:txBody>
+      </p:sp>
+      <p:sp>
+        <p:nvSpPr>
+          <p:cNvPr id="8" name="Rounded Rectangle 7"/>
+          <p:cNvSpPr/>
+          <p:nvPr/>
+        </p:nvSpPr>
+        <p:spPr>
+          <a:xfrm>
+            <a:off x="8961120" y="1463040"/>
+            <a:ext cx="2468880" cy="4937760"/>
+          </a:xfrm>
+          <a:prstGeom prst="roundRect">
+            <a:avLst/>
+          </a:prstGeom>
+          <a:solidFill>
+            <a:srgbClr val="FFFFFF"/>
+          </a:solidFill>
+          <a:ln w="19050">
+            <a:solidFill>
+              <a:srgbClr val="16A34A"/>
+            </a:solidFill>
+          </a:ln>
+        </p:spPr>
+        <p:style>
+          <a:lnRef idx="1">
+            <a:schemeClr val="accent1"/>
+          </a:lnRef>
+          <a:fillRef idx="3">
+            <a:schemeClr val="accent1"/>
+          </a:fillRef>
+          <a:effectRef idx="2">
+            <a:schemeClr val="accent1"/>
+          </a:effectRef>
+          <a:fontRef idx="minor">
+            <a:schemeClr val="lt1"/>
+          </a:fontRef>
+        </p:style>
+        <p:txBody>
+          <a:bodyPr rtlCol="0" anchor="ctr" wrap="square"/>
+          <a:lstStyle/>
+          <a:p>
+            <a:pPr algn="ctr">
+              <a:spcAft>
+                <a:spcPts val="200"/>
+              </a:spcAft>
+              <a:defRPr sz="950" b="1">
+                <a:solidFill>
+                  <a:srgbClr val="16A34A"/>
+                </a:solidFill>
+              </a:defRPr>
+            </a:pPr>
+            <a:r>
+              <a:t>📈 NHIỆM VỤ 4</a:t>
+            </a:r>
+          </a:p>
+          <a:p>
+            <a:pPr>
+              <a:spcAft>
+                <a:spcPts val="200"/>
+              </a:spcAft>
+              <a:defRPr sz="1200" b="1">
+                <a:solidFill>
+                  <a:srgbClr val="1E293B"/>
+                </a:solidFill>
+              </a:defRPr>
+            </a:pPr>
+            <a:r>
+              <a:t>Chuẩn Hóa Tri Thức</a:t>
+            </a:r>
+            <a:br/>
+            <a:r>
+              <a:t>Bệ Phóng E2E Auto</a:t>
+            </a:r>
+          </a:p>
+          <a:p>
+            <a:pPr>
+              <a:spcAft>
+                <a:spcPts val="800"/>
+              </a:spcAft>
+              <a:defRPr sz="850">
+                <a:solidFill>
+                  <a:srgbClr val="64748B"/>
+                </a:solidFill>
+              </a:defRPr>
+            </a:pPr>
+            <a:r>
+              <a:t>Tài sản kiểm thử tích lũy lâu dài</a:t>
+            </a:r>
+          </a:p>
+          <a:p>
+            <a:pPr>
+              <a:defRPr sz="900" b="1">
+                <a:solidFill>
+                  <a:srgbClr val="1E293B"/>
+                </a:solidFill>
+              </a:defRPr>
+            </a:pPr>
+            <a:r>
+              <a:t>⚠️ Thực trạng:</a:t>
+            </a:r>
+          </a:p>
+          <a:p>
+            <a:pPr>
+              <a:spcAft>
+                <a:spcPts val="500"/>
+              </a:spcAft>
+              <a:defRPr sz="850">
+                <a:solidFill>
+                  <a:srgbClr val="64748B"/>
+                </a:solidFill>
+              </a:defRPr>
+            </a:pPr>
+            <a:r>
+              <a:t>Tri thức kiểm thử nằm rải rác trên máy cá nhân, dễ thất thoát khi đổi nhân sự.</a:t>
+            </a:r>
+          </a:p>
+          <a:p>
+            <a:pPr>
+              <a:defRPr sz="900" b="1">
+                <a:solidFill>
+                  <a:srgbClr val="1E293B"/>
+                </a:solidFill>
+              </a:defRPr>
+            </a:pPr>
+            <a:r>
+              <a:t>💡 Nhiệm vụ:</a:t>
+            </a:r>
+          </a:p>
+          <a:p>
+            <a:pPr>
+              <a:spcAft>
+                <a:spcPts val="500"/>
+              </a:spcAft>
+              <a:defRPr sz="850">
+                <a:solidFill>
+                  <a:srgbClr val="64748B"/>
+                </a:solidFill>
+              </a:defRPr>
+            </a:pPr>
+            <a:r>
+              <a:t>Tích lũy bền vững vào Local JSON &amp; Google Sheets Master theo cơ chế Append-Only.</a:t>
+            </a:r>
+          </a:p>
+          <a:p>
+            <a:pPr>
+              <a:defRPr sz="900" b="1">
+                <a:solidFill>
+                  <a:srgbClr val="1E293B"/>
+                </a:solidFill>
+              </a:defRPr>
+            </a:pPr>
+            <a:r>
+              <a:t>🔒 Bảo toàn lịch sử:</a:t>
+            </a:r>
+          </a:p>
+          <a:p>
+            <a:pPr>
+              <a:spcAft>
+                <a:spcPts val="500"/>
+              </a:spcAft>
+              <a:defRPr sz="850">
+                <a:solidFill>
+                  <a:srgbClr val="64748B"/>
+                </a:solidFill>
+              </a:defRPr>
+            </a:pPr>
+            <a:r>
+              <a:t>Không bao giờ xóa/reset, truy vết toàn diện theo requirement_id.</a:t>
+            </a:r>
+          </a:p>
+          <a:p>
+            <a:pPr>
+              <a:defRPr sz="900" b="1">
+                <a:solidFill>
+                  <a:srgbClr val="1E293B"/>
+                </a:solidFill>
+              </a:defRPr>
+            </a:pPr>
+            <a:r>
+              <a:t>🤖 Cầu nối Automation:</a:t>
+            </a:r>
+          </a:p>
+          <a:p>
+            <a:pPr>
+              <a:spcAft>
+                <a:spcPts val="500"/>
+              </a:spcAft>
+              <a:defRPr sz="850">
+                <a:solidFill>
+                  <a:srgbClr val="64748B"/>
+                </a:solidFill>
+              </a:defRPr>
+            </a:pPr>
+            <a:r>
+              <a:t>Cung cấp đầu vào hoàn hảo để framework Playwright E2E chạy tự động.</a:t>
             </a:r>
           </a:p>
         </p:txBody>
@@ -4389,7 +7401,7 @@
         <p:spPr>
           <a:xfrm>
             <a:off x="0" y="0"/>
-            <a:ext cx="12191695" cy="109728"/>
+            <a:ext cx="12191695" cy="91440"/>
           </a:xfrm>
           <a:prstGeom prst="rect">
             <a:avLst/>
@@ -4431,8 +7443,8 @@
         </p:nvSpPr>
         <p:spPr>
           <a:xfrm>
-            <a:off x="731520" y="365760"/>
-            <a:ext cx="2011680" cy="320040"/>
+            <a:off x="731520" y="292608"/>
+            <a:ext cx="3291840" cy="292608"/>
           </a:xfrm>
           <a:prstGeom prst="roundRect">
             <a:avLst/>
@@ -4465,14 +7477,14 @@
           <a:lstStyle/>
           <a:p>
             <a:pPr algn="ctr">
-              <a:defRPr sz="1000" b="1">
+              <a:defRPr sz="950" b="1">
                 <a:solidFill>
                   <a:srgbClr val="0958D9"/>
                 </a:solidFill>
               </a:defRPr>
             </a:pPr>
             <a:r>
-              <a:t>3. QUALITY &amp; ACCURACY ASSURANCE</a:t>
+              <a:t>3. KIẾN TRÚC TỔNG QUAN</a:t>
             </a:r>
           </a:p>
         </p:txBody>
@@ -4485,8 +7497,8 @@
         </p:nvSpPr>
         <p:spPr>
           <a:xfrm>
-            <a:off x="731520" y="777240"/>
-            <a:ext cx="10698480" cy="640080"/>
+            <a:off x="731520" y="621792"/>
+            <a:ext cx="10698480" cy="658368"/>
           </a:xfrm>
           <a:prstGeom prst="rect">
             <a:avLst/>
@@ -4500,653 +7512,54 @@
           <a:lstStyle/>
           <a:p>
             <a:pPr>
-              <a:defRPr sz="2200" b="1">
+              <a:defRPr sz="2000" b="1">
                 <a:solidFill>
                   <a:srgbClr val="1E293B"/>
                 </a:solidFill>
               </a:defRPr>
             </a:pPr>
             <a:r>
-              <a:t>Khung Đánh Giá &amp; Kiểm Định Độ Đúng Sai Của Dữ Liệu Đầu Ra</a:t>
-            </a:r>
-          </a:p>
-          <a:p>
-            <a:pPr>
-              <a:defRPr sz="1200">
+              <a:t>Sơ Đồ Luồng Tổng Quan: 2-Phase State Machine, 2 Human Gates &amp; Cloud Sync</a:t>
+            </a:r>
+          </a:p>
+          <a:p>
+            <a:pPr>
+              <a:defRPr sz="1050">
                 <a:solidFill>
                   <a:srgbClr val="64748B"/>
                 </a:solidFill>
               </a:defRPr>
             </a:pPr>
             <a:r>
-              <a:t>Làm thế nào để đo lường, kiểm soát ảo giác và đảm bảo dữ liệu sinh ra đạt chuẩn kiểm thử thực tế?</a:t>
-            </a:r>
-          </a:p>
-        </p:txBody>
-      </p:sp>
-      <p:sp>
-        <p:nvSpPr>
-          <p:cNvPr id="5" name="Rounded Rectangle 4"/>
-          <p:cNvSpPr/>
+              <a:t>Sơ đồ luồng trạng thái tuần tự: Điểm rẽ nhánh điều kiện, 2 điểm dừng Tester và cơ chế tự động Rollback.</a:t>
+            </a:r>
+          </a:p>
+        </p:txBody>
+      </p:sp>
+      <p:pic>
+        <p:nvPicPr>
+          <p:cNvPr id="5" name="Picture 4" descr="flowchart_overview.png"/>
+          <p:cNvPicPr>
+            <a:picLocks noChangeAspect="1"/>
+          </p:cNvPicPr>
           <p:nvPr/>
-        </p:nvSpPr>
+        </p:nvPicPr>
+        <p:blipFill>
+          <a:blip r:embed="rId2"/>
+          <a:stretch>
+            <a:fillRect/>
+          </a:stretch>
+        </p:blipFill>
         <p:spPr>
           <a:xfrm>
-            <a:off x="731520" y="1645920"/>
-            <a:ext cx="2468880" cy="1188720"/>
+            <a:off x="731520" y="1444752"/>
+            <a:ext cx="10728655" cy="4562856"/>
           </a:xfrm>
-          <a:prstGeom prst="roundRect">
+          <a:prstGeom prst="rect">
             <a:avLst/>
           </a:prstGeom>
-          <a:solidFill>
-            <a:srgbClr val="F8FAFC"/>
-          </a:solidFill>
-          <a:ln w="19050">
-            <a:solidFill>
-              <a:srgbClr val="1677FF"/>
-            </a:solidFill>
-          </a:ln>
         </p:spPr>
-        <p:style>
-          <a:lnRef idx="1">
-            <a:schemeClr val="accent1"/>
-          </a:lnRef>
-          <a:fillRef idx="3">
-            <a:schemeClr val="accent1"/>
-          </a:fillRef>
-          <a:effectRef idx="2">
-            <a:schemeClr val="accent1"/>
-          </a:effectRef>
-          <a:fontRef idx="minor">
-            <a:schemeClr val="lt1"/>
-          </a:fontRef>
-        </p:style>
-        <p:txBody>
-          <a:bodyPr rtlCol="0" anchor="ctr" wrap="square"/>
-          <a:lstStyle/>
-          <a:p>
-            <a:pPr algn="ctr">
-              <a:defRPr sz="900" b="1">
-                <a:solidFill>
-                  <a:srgbClr val="64748B"/>
-                </a:solidFill>
-              </a:defRPr>
-            </a:pPr>
-            <a:r>
-              <a:t>SEMANTIC ACCURACY</a:t>
-            </a:r>
-          </a:p>
-          <a:p>
-            <a:pPr>
-              <a:defRPr sz="2200" b="1">
-                <a:solidFill>
-                  <a:srgbClr val="1677FF"/>
-                </a:solidFill>
-              </a:defRPr>
-            </a:pPr>
-            <a:r>
-              <a:t>≥ 92%</a:t>
-            </a:r>
-          </a:p>
-          <a:p>
-            <a:pPr>
-              <a:defRPr sz="850">
-                <a:solidFill>
-                  <a:srgbClr val="1E293B"/>
-                </a:solidFill>
-              </a:defRPr>
-            </a:pPr>
-            <a:r>
-              <a:t>Tính đúng đắn logic &amp; quy tắc nghiệp vụ</a:t>
-            </a:r>
-          </a:p>
-        </p:txBody>
-      </p:sp>
-      <p:sp>
-        <p:nvSpPr>
-          <p:cNvPr id="6" name="Rounded Rectangle 5"/>
-          <p:cNvSpPr/>
-          <p:nvPr/>
-        </p:nvSpPr>
-        <p:spPr>
-          <a:xfrm>
-            <a:off x="3474720" y="1645920"/>
-            <a:ext cx="2468880" cy="1188720"/>
-          </a:xfrm>
-          <a:prstGeom prst="roundRect">
-            <a:avLst/>
-          </a:prstGeom>
-          <a:solidFill>
-            <a:srgbClr val="F8FAFC"/>
-          </a:solidFill>
-          <a:ln w="19050">
-            <a:solidFill>
-              <a:srgbClr val="16A34A"/>
-            </a:solidFill>
-          </a:ln>
-        </p:spPr>
-        <p:style>
-          <a:lnRef idx="1">
-            <a:schemeClr val="accent1"/>
-          </a:lnRef>
-          <a:fillRef idx="3">
-            <a:schemeClr val="accent1"/>
-          </a:fillRef>
-          <a:effectRef idx="2">
-            <a:schemeClr val="accent1"/>
-          </a:effectRef>
-          <a:fontRef idx="minor">
-            <a:schemeClr val="lt1"/>
-          </a:fontRef>
-        </p:style>
-        <p:txBody>
-          <a:bodyPr rtlCol="0" anchor="ctr" wrap="square"/>
-          <a:lstStyle/>
-          <a:p>
-            <a:pPr algn="ctr">
-              <a:defRPr sz="900" b="1">
-                <a:solidFill>
-                  <a:srgbClr val="64748B"/>
-                </a:solidFill>
-              </a:defRPr>
-            </a:pPr>
-            <a:r>
-              <a:t>SCHEMA VALIDITY</a:t>
-            </a:r>
-          </a:p>
-          <a:p>
-            <a:pPr>
-              <a:defRPr sz="2200" b="1">
-                <a:solidFill>
-                  <a:srgbClr val="16A34A"/>
-                </a:solidFill>
-              </a:defRPr>
-            </a:pPr>
-            <a:r>
-              <a:t>100%</a:t>
-            </a:r>
-          </a:p>
-          <a:p>
-            <a:pPr>
-              <a:defRPr sz="850">
-                <a:solidFill>
-                  <a:srgbClr val="1E293B"/>
-                </a:solidFill>
-              </a:defRPr>
-            </a:pPr>
-            <a:r>
-              <a:t>Chuẩn 3 tầng UI/API Body/DB &amp; Disaggregation</a:t>
-            </a:r>
-          </a:p>
-        </p:txBody>
-      </p:sp>
-      <p:sp>
-        <p:nvSpPr>
-          <p:cNvPr id="7" name="Rounded Rectangle 6"/>
-          <p:cNvSpPr/>
-          <p:nvPr/>
-        </p:nvSpPr>
-        <p:spPr>
-          <a:xfrm>
-            <a:off x="6217920" y="1645920"/>
-            <a:ext cx="2468880" cy="1188720"/>
-          </a:xfrm>
-          <a:prstGeom prst="roundRect">
-            <a:avLst/>
-          </a:prstGeom>
-          <a:solidFill>
-            <a:srgbClr val="F8FAFC"/>
-          </a:solidFill>
-          <a:ln w="19050">
-            <a:solidFill>
-              <a:srgbClr val="0958D9"/>
-            </a:solidFill>
-          </a:ln>
-        </p:spPr>
-        <p:style>
-          <a:lnRef idx="1">
-            <a:schemeClr val="accent1"/>
-          </a:lnRef>
-          <a:fillRef idx="3">
-            <a:schemeClr val="accent1"/>
-          </a:fillRef>
-          <a:effectRef idx="2">
-            <a:schemeClr val="accent1"/>
-          </a:effectRef>
-          <a:fontRef idx="minor">
-            <a:schemeClr val="lt1"/>
-          </a:fontRef>
-        </p:style>
-        <p:txBody>
-          <a:bodyPr rtlCol="0" anchor="ctr" wrap="square"/>
-          <a:lstStyle/>
-          <a:p>
-            <a:pPr algn="ctr">
-              <a:defRPr sz="900" b="1">
-                <a:solidFill>
-                  <a:srgbClr val="64748B"/>
-                </a:solidFill>
-              </a:defRPr>
-            </a:pPr>
-            <a:r>
-              <a:t>RISK COVERAGE</a:t>
-            </a:r>
-          </a:p>
-          <a:p>
-            <a:pPr>
-              <a:defRPr sz="2200" b="1">
-                <a:solidFill>
-                  <a:srgbClr val="0958D9"/>
-                </a:solidFill>
-              </a:defRPr>
-            </a:pPr>
-            <a:r>
-              <a:t>100%</a:t>
-            </a:r>
-          </a:p>
-          <a:p>
-            <a:pPr>
-              <a:defRPr sz="850">
-                <a:solidFill>
-                  <a:srgbClr val="1E293B"/>
-                </a:solidFill>
-              </a:defRPr>
-            </a:pPr>
-            <a:r>
-              <a:t>Bao phủ đủ 5 nhóm kịch bản &amp; 5 góc khuất</a:t>
-            </a:r>
-          </a:p>
-        </p:txBody>
-      </p:sp>
-      <p:sp>
-        <p:nvSpPr>
-          <p:cNvPr id="8" name="Rounded Rectangle 7"/>
-          <p:cNvSpPr/>
-          <p:nvPr/>
-        </p:nvSpPr>
-        <p:spPr>
-          <a:xfrm>
-            <a:off x="8961120" y="1645920"/>
-            <a:ext cx="2468880" cy="1188720"/>
-          </a:xfrm>
-          <a:prstGeom prst="roundRect">
-            <a:avLst/>
-          </a:prstGeom>
-          <a:solidFill>
-            <a:srgbClr val="F8FAFC"/>
-          </a:solidFill>
-          <a:ln w="19050">
-            <a:solidFill>
-              <a:srgbClr val="E11D48"/>
-            </a:solidFill>
-          </a:ln>
-        </p:spPr>
-        <p:style>
-          <a:lnRef idx="1">
-            <a:schemeClr val="accent1"/>
-          </a:lnRef>
-          <a:fillRef idx="3">
-            <a:schemeClr val="accent1"/>
-          </a:fillRef>
-          <a:effectRef idx="2">
-            <a:schemeClr val="accent1"/>
-          </a:effectRef>
-          <a:fontRef idx="minor">
-            <a:schemeClr val="lt1"/>
-          </a:fontRef>
-        </p:style>
-        <p:txBody>
-          <a:bodyPr rtlCol="0" anchor="ctr" wrap="square"/>
-          <a:lstStyle/>
-          <a:p>
-            <a:pPr algn="ctr">
-              <a:defRPr sz="900" b="1">
-                <a:solidFill>
-                  <a:srgbClr val="64748B"/>
-                </a:solidFill>
-              </a:defRPr>
-            </a:pPr>
-            <a:r>
-              <a:t>HALLUCINATION</a:t>
-            </a:r>
-          </a:p>
-          <a:p>
-            <a:pPr>
-              <a:defRPr sz="2200" b="1">
-                <a:solidFill>
-                  <a:srgbClr val="E11D48"/>
-                </a:solidFill>
-              </a:defRPr>
-            </a:pPr>
-            <a:r>
-              <a:t>&lt; 5%</a:t>
-            </a:r>
-          </a:p>
-          <a:p>
-            <a:pPr>
-              <a:defRPr sz="850">
-                <a:solidFill>
-                  <a:srgbClr val="1E293B"/>
-                </a:solidFill>
-              </a:defRPr>
-            </a:pPr>
-            <a:r>
-              <a:t>Tỷ lệ suy diễn sai lệch so với requirement</a:t>
-            </a:r>
-          </a:p>
-        </p:txBody>
-      </p:sp>
-      <p:sp>
-        <p:nvSpPr>
-          <p:cNvPr id="9" name="Rounded Rectangle 8"/>
-          <p:cNvSpPr/>
-          <p:nvPr/>
-        </p:nvSpPr>
-        <p:spPr>
-          <a:xfrm>
-            <a:off x="731520" y="3063240"/>
-            <a:ext cx="5212080" cy="3291840"/>
-          </a:xfrm>
-          <a:prstGeom prst="roundRect">
-            <a:avLst/>
-          </a:prstGeom>
-          <a:solidFill>
-            <a:srgbClr val="FFFFFF"/>
-          </a:solidFill>
-          <a:ln>
-            <a:solidFill>
-              <a:srgbClr val="CBD5E1"/>
-            </a:solidFill>
-          </a:ln>
-        </p:spPr>
-        <p:style>
-          <a:lnRef idx="1">
-            <a:schemeClr val="accent1"/>
-          </a:lnRef>
-          <a:fillRef idx="3">
-            <a:schemeClr val="accent1"/>
-          </a:fillRef>
-          <a:effectRef idx="2">
-            <a:schemeClr val="accent1"/>
-          </a:effectRef>
-          <a:fontRef idx="minor">
-            <a:schemeClr val="lt1"/>
-          </a:fontRef>
-        </p:style>
-        <p:txBody>
-          <a:bodyPr rtlCol="0" anchor="ctr" wrap="square"/>
-          <a:lstStyle/>
-          <a:p>
-            <a:pPr algn="ctr">
-              <a:spcAft>
-                <a:spcPts val="800"/>
-              </a:spcAft>
-              <a:defRPr sz="1100" b="1">
-                <a:solidFill>
-                  <a:srgbClr val="1677FF"/>
-                </a:solidFill>
-              </a:defRPr>
-            </a:pPr>
-            <a:r>
-              <a:t>💎 3 NGUYÊN TẮC VÀNG CHUẨN QA/QC THỰC CHIẾN</a:t>
-            </a:r>
-          </a:p>
-          <a:p>
-            <a:pPr>
-              <a:defRPr sz="1000" b="1">
-                <a:solidFill>
-                  <a:srgbClr val="1E293B"/>
-                </a:solidFill>
-              </a:defRPr>
-            </a:pPr>
-            <a:r>
-              <a:t>1. Step Disaggregation (Không gom cụm hành động):</a:t>
-            </a:r>
-          </a:p>
-          <a:p>
-            <a:pPr>
-              <a:spcAft>
-                <a:spcPts val="400"/>
-              </a:spcAft>
-              <a:defRPr sz="900">
-                <a:solidFill>
-                  <a:srgbClr val="64748B"/>
-                </a:solidFill>
-              </a:defRPr>
-            </a:pPr>
-            <a:r>
-              <a:t>Tách biệt hoàn toàn bước chuẩn bị dữ liệu (nhập input/chọn option) và bước kích hoạt (submit). Đưa tiền đề vào Pre-conditions để Automation chạy ổn định.</a:t>
-            </a:r>
-          </a:p>
-          <a:p>
-            <a:pPr>
-              <a:defRPr sz="1000" b="1">
-                <a:solidFill>
-                  <a:srgbClr val="1E293B"/>
-                </a:solidFill>
-              </a:defRPr>
-            </a:pPr>
-            <a:r>
-              <a:t>2. Synchronized Deep Verification (Kiểm chứng sâu 3 tầng):</a:t>
-            </a:r>
-          </a:p>
-          <a:p>
-            <a:pPr>
-              <a:spcAft>
-                <a:spcPts val="400"/>
-              </a:spcAft>
-              <a:defRPr sz="900">
-                <a:solidFill>
-                  <a:srgbClr val="64748B"/>
-                </a:solidFill>
-              </a:defRPr>
-            </a:pPr>
-            <a:r>
-              <a:t>UI: Thông báo, highlight, ID hiển thị.</a:t>
-            </a:r>
-            <a:br/>
-            <a:r>
-              <a:t>API: HTTP Status + trường cụ thể trong Response Body (ví dụ: order_id khớp UI).</a:t>
-            </a:r>
-            <a:br/>
-            <a:r>
-              <a:t>DB &amp; Broker: Tên bảng, tên cột, giá trị cập nhật và Kafka event phát ra.</a:t>
-            </a:r>
-          </a:p>
-          <a:p>
-            <a:pPr>
-              <a:defRPr sz="1000" b="1">
-                <a:solidFill>
-                  <a:srgbClr val="1E293B"/>
-                </a:solidFill>
-              </a:defRPr>
-            </a:pPr>
-            <a:r>
-              <a:t>3. Trạng thái thực thi rõ ràng (Execution Status):</a:t>
-            </a:r>
-          </a:p>
-          <a:p>
-            <a:pPr>
-              <a:spcAft>
-                <a:spcPts val="400"/>
-              </a:spcAft>
-              <a:defRPr sz="900">
-                <a:solidFill>
-                  <a:srgbClr val="64748B"/>
-                </a:solidFill>
-              </a:defRPr>
-            </a:pPr>
-            <a:r>
-              <a:t>Mặc định là NOT_RUN kèm dropdown Pass/Fail/Blocked và Conditional Formatting giúp theo dõi tiến độ trực quan.</a:t>
-            </a:r>
-          </a:p>
-        </p:txBody>
-      </p:sp>
-      <p:sp>
-        <p:nvSpPr>
-          <p:cNvPr id="10" name="Rounded Rectangle 9"/>
-          <p:cNvSpPr/>
-          <p:nvPr/>
-        </p:nvSpPr>
-        <p:spPr>
-          <a:xfrm>
-            <a:off x="6217920" y="3063240"/>
-            <a:ext cx="5212080" cy="3291840"/>
-          </a:xfrm>
-          <a:prstGeom prst="roundRect">
-            <a:avLst/>
-          </a:prstGeom>
-          <a:solidFill>
-            <a:srgbClr val="FFFFFF"/>
-          </a:solidFill>
-          <a:ln>
-            <a:solidFill>
-              <a:srgbClr val="CBD5E1"/>
-            </a:solidFill>
-          </a:ln>
-        </p:spPr>
-        <p:style>
-          <a:lnRef idx="1">
-            <a:schemeClr val="accent1"/>
-          </a:lnRef>
-          <a:fillRef idx="3">
-            <a:schemeClr val="accent1"/>
-          </a:fillRef>
-          <a:effectRef idx="2">
-            <a:schemeClr val="accent1"/>
-          </a:effectRef>
-          <a:fontRef idx="minor">
-            <a:schemeClr val="lt1"/>
-          </a:fontRef>
-        </p:style>
-        <p:txBody>
-          <a:bodyPr rtlCol="0" anchor="ctr" wrap="square"/>
-          <a:lstStyle/>
-          <a:p>
-            <a:pPr algn="ctr">
-              <a:spcAft>
-                <a:spcPts val="800"/>
-              </a:spcAft>
-              <a:defRPr sz="1100" b="1">
-                <a:solidFill>
-                  <a:srgbClr val="0D9488"/>
-                </a:solidFill>
-              </a:defRPr>
-            </a:pPr>
-            <a:r>
-              <a:t>🛡️ CƠ CHẾ ĐẢM BẢO CHẤT LƯỢNG DỮ LIỆU ĐẦU RA</a:t>
-            </a:r>
-          </a:p>
-          <a:p>
-            <a:pPr>
-              <a:defRPr sz="1000" b="1">
-                <a:solidFill>
-                  <a:srgbClr val="1E293B"/>
-                </a:solidFill>
-              </a:defRPr>
-            </a:pPr>
-            <a:r>
-              <a:t>Anchor bằng Ground Truth (Kho 10 Bug Lịch Sử):</a:t>
-            </a:r>
-          </a:p>
-          <a:p>
-            <a:pPr>
-              <a:spcAft>
-                <a:spcPts val="400"/>
-              </a:spcAft>
-              <a:defRPr sz="900">
-                <a:solidFill>
-                  <a:srgbClr val="64748B"/>
-                </a:solidFill>
-              </a:defRPr>
-            </a:pPr>
-            <a:r>
-              <a:t>Agent luôn đối chiếu rủi ro với các bug thực chiến đã xảy ra trên hệ thống (BUG-001 đến BUG-010), buộc AI căn cứ vào bài học thực tế thay vì suy diễn viển vông.</a:t>
-            </a:r>
-          </a:p>
-          <a:p>
-            <a:pPr>
-              <a:defRPr sz="1000" b="1">
-                <a:solidFill>
-                  <a:srgbClr val="1E293B"/>
-                </a:solidFill>
-              </a:defRPr>
-            </a:pPr>
-            <a:r>
-              <a:t>Syntactic &amp; Schema Validator:</a:t>
-            </a:r>
-          </a:p>
-          <a:p>
-            <a:pPr>
-              <a:spcAft>
-                <a:spcPts val="400"/>
-              </a:spcAft>
-              <a:defRPr sz="900">
-                <a:solidFill>
-                  <a:srgbClr val="64748B"/>
-                </a:solidFill>
-              </a:defRPr>
-            </a:pPr>
-            <a:r>
-              <a:t>Quy chuẩn kiểm tra tự động: Mọi test case thiếu bảng DB hoặc thiếu trường API Response Body đều bị từ chối trước khi hiển thị cho Tester.</a:t>
-            </a:r>
-          </a:p>
-          <a:p>
-            <a:pPr>
-              <a:defRPr sz="1000" b="1">
-                <a:solidFill>
-                  <a:srgbClr val="1E293B"/>
-                </a:solidFill>
-              </a:defRPr>
-            </a:pPr>
-            <a:r>
-              <a:t>Human-in-the-Loop Feedback Loop:</a:t>
-            </a:r>
-          </a:p>
-          <a:p>
-            <a:pPr>
-              <a:spcAft>
-                <a:spcPts val="400"/>
-              </a:spcAft>
-              <a:defRPr sz="900">
-                <a:solidFill>
-                  <a:srgbClr val="64748B"/>
-                </a:solidFill>
-              </a:defRPr>
-            </a:pPr>
-            <a:r>
-              <a:t>Tester là 'Quality Gatekeeper' cuối cùng. Mọi câu hỏi BA và rủi ro được Tester xác nhận, tạo dữ liệu chuẩn xác cho Phase 2 sinh kịch bản.</a:t>
-            </a:r>
-          </a:p>
-          <a:p>
-            <a:pPr>
-              <a:defRPr sz="1000" b="1">
-                <a:solidFill>
-                  <a:srgbClr val="1E293B"/>
-                </a:solidFill>
-              </a:defRPr>
-            </a:pPr>
-            <a:r>
-              <a:t>Traceability Không Rời Rạc:</a:t>
-            </a:r>
-          </a:p>
-          <a:p>
-            <a:pPr>
-              <a:spcAft>
-                <a:spcPts val="400"/>
-              </a:spcAft>
-              <a:defRPr sz="900">
-                <a:solidFill>
-                  <a:srgbClr val="64748B"/>
-                </a:solidFill>
-              </a:defRPr>
-            </a:pPr>
-            <a:r>
-              <a:t>Khóa ngoại requirement_id kết nối xuyên suốt từ bảng Phân tích Yêu cầu sang bảng Kịch bản Test, đảm bảo 100% test case đều truy vết được nguồn gốc.</a:t>
-            </a:r>
-          </a:p>
-        </p:txBody>
-      </p:sp>
+      </p:pic>
     </p:spTree>
   </p:cSld>
   <p:clrMapOvr>
@@ -5174,7 +7587,7 @@
         <p:spPr>
           <a:xfrm>
             <a:off x="0" y="0"/>
-            <a:ext cx="12191695" cy="109728"/>
+            <a:ext cx="12191695" cy="91440"/>
           </a:xfrm>
           <a:prstGeom prst="rect">
             <a:avLst/>
@@ -5216,8 +7629,8 @@
         </p:nvSpPr>
         <p:spPr>
           <a:xfrm>
-            <a:off x="731520" y="365760"/>
-            <a:ext cx="2011680" cy="320040"/>
+            <a:off x="731520" y="292608"/>
+            <a:ext cx="3291840" cy="292608"/>
           </a:xfrm>
           <a:prstGeom prst="roundRect">
             <a:avLst/>
@@ -5250,14 +7663,14 @@
           <a:lstStyle/>
           <a:p>
             <a:pPr algn="ctr">
-              <a:defRPr sz="1000" b="1">
+              <a:defRPr sz="950" b="1">
                 <a:solidFill>
                   <a:srgbClr val="0958D9"/>
                 </a:solidFill>
               </a:defRPr>
             </a:pPr>
             <a:r>
-              <a:t>4. EXPERIMENTAL PROOF POINTS</a:t>
+              <a:t>3A. ĐI SÂU CHẶNG 0: PRE-FLIGHT</a:t>
             </a:r>
           </a:p>
         </p:txBody>
@@ -5270,8 +7683,8 @@
         </p:nvSpPr>
         <p:spPr>
           <a:xfrm>
-            <a:off x="731520" y="777240"/>
-            <a:ext cx="10698480" cy="640080"/>
+            <a:off x="731520" y="621792"/>
+            <a:ext cx="10698480" cy="658368"/>
           </a:xfrm>
           <a:prstGeom prst="rect">
             <a:avLst/>
@@ -5285,494 +7698,54 @@
           <a:lstStyle/>
           <a:p>
             <a:pPr>
-              <a:defRPr sz="2200" b="1">
+              <a:defRPr sz="2000" b="1">
                 <a:solidFill>
                   <a:srgbClr val="1E293B"/>
                 </a:solidFill>
               </a:defRPr>
             </a:pPr>
             <a:r>
-              <a:t>Minh Chứng Thực Nghiệm: Bắt Lỗ Hổng &amp; Tự Nắn Chỉnh Qua Thực Tế</a:t>
-            </a:r>
-          </a:p>
-          <a:p>
-            <a:pPr>
-              <a:defRPr sz="1200">
+              <a:t>Sơ Đồ Luồng Chặng 0: Quản Trị Góc Nhìn &amp; Xác Thực Cache Hai Chiều</a:t>
+            </a:r>
+          </a:p>
+          <a:p>
+            <a:pPr>
+              <a:defRPr sz="1050">
                 <a:solidFill>
                   <a:srgbClr val="64748B"/>
                 </a:solidFill>
               </a:defRPr>
             </a:pPr>
             <a:r>
-              <a:t>Bằng chứng cụ thể từ Repo: Những điểm làm tốt, sai sót ban đầu được phát hiện và khắc phục ra sao.</a:t>
-            </a:r>
-          </a:p>
-        </p:txBody>
-      </p:sp>
-      <p:graphicFrame>
-        <p:nvGraphicFramePr>
-          <p:cNvPr id="5" name="Table 4"/>
-          <p:cNvGraphicFramePr>
-            <a:graphicFrameLocks noGrp="1"/>
-          </p:cNvGraphicFramePr>
+              <a:t>Sơ đồ luồng kiểm tra cache: Nhánh trùng khớp (&lt;50ms), nhánh Drive thay đổi và cơ chế Offline Fallback.</a:t>
+            </a:r>
+          </a:p>
+        </p:txBody>
+      </p:sp>
+      <p:pic>
+        <p:nvPicPr>
+          <p:cNvPr id="5" name="Picture 4" descr="flowchart_stage0.png"/>
+          <p:cNvPicPr>
+            <a:picLocks noChangeAspect="1"/>
+          </p:cNvPicPr>
           <p:nvPr/>
-        </p:nvGraphicFramePr>
-        <p:xfrm>
-          <a:off x="731520" y="1645920"/>
-          <a:ext cx="10698480" cy="4663440"/>
-        </p:xfrm>
-        <a:graphic>
-          <a:graphicData uri="http://schemas.openxmlformats.org/drawingml/2006/table">
-            <a:tbl>
-              <a:tblPr firstRow="1" bandRow="1">
-                <a:tableStyleId>{5C22544A-7EE6-4342-B048-85BDC9FD1C3A}</a:tableStyleId>
-              </a:tblPr>
-              <a:tblGrid>
-                <a:gridCol w="2011680"/>
-                <a:gridCol w="2834640"/>
-                <a:gridCol w="2926080"/>
-                <a:gridCol w="2926080"/>
-              </a:tblGrid>
-              <a:tr h="1165860">
-                <a:tc>
-                  <a:txBody>
-                    <a:bodyPr/>
-                    <a:lstStyle/>
-                    <a:p>
-                      <a:pPr algn="ctr">
-                        <a:defRPr sz="1000" b="1">
-                          <a:solidFill>
-                            <a:srgbClr val="FFFFFF"/>
-                          </a:solidFill>
-                        </a:defRPr>
-                      </a:pPr>
-                      <a:r>
-                        <a:t>TIÊU CHÍ ĐÁNH GIÁ</a:t>
-                      </a:r>
-                    </a:p>
-                  </a:txBody>
-                  <a:tcPr>
-                    <a:solidFill>
-                      <a:srgbClr val="1677FF"/>
-                    </a:solidFill>
-                  </a:tcPr>
-                </a:tc>
-                <a:tc>
-                  <a:txBody>
-                    <a:bodyPr/>
-                    <a:lstStyle/>
-                    <a:p>
-                      <a:pPr algn="ctr">
-                        <a:defRPr sz="1000" b="1">
-                          <a:solidFill>
-                            <a:srgbClr val="FFFFFF"/>
-                          </a:solidFill>
-                        </a:defRPr>
-                      </a:pPr>
-                      <a:r>
-                        <a:t>REQ A: KHÓA TÀI KHOẢN (Auth)</a:t>
-                      </a:r>
-                    </a:p>
-                  </a:txBody>
-                  <a:tcPr>
-                    <a:solidFill>
-                      <a:srgbClr val="1677FF"/>
-                    </a:solidFill>
-                  </a:tcPr>
-                </a:tc>
-                <a:tc>
-                  <a:txBody>
-                    <a:bodyPr/>
-                    <a:lstStyle/>
-                    <a:p>
-                      <a:pPr algn="ctr">
-                        <a:defRPr sz="1000" b="1">
-                          <a:solidFill>
-                            <a:srgbClr val="FFFFFF"/>
-                          </a:solidFill>
-                        </a:defRPr>
-                      </a:pPr>
-                      <a:r>
-                        <a:t>REQ B: CHỐNG BÁN ÂM KHO (Inventory)</a:t>
-                      </a:r>
-                    </a:p>
-                  </a:txBody>
-                  <a:tcPr>
-                    <a:solidFill>
-                      <a:srgbClr val="1677FF"/>
-                    </a:solidFill>
-                  </a:tcPr>
-                </a:tc>
-                <a:tc>
-                  <a:txBody>
-                    <a:bodyPr/>
-                    <a:lstStyle/>
-                    <a:p>
-                      <a:pPr algn="ctr">
-                        <a:defRPr sz="1000" b="1">
-                          <a:solidFill>
-                            <a:srgbClr val="FFFFFF"/>
-                          </a:solidFill>
-                        </a:defRPr>
-                      </a:pPr>
-                      <a:r>
-                        <a:t>REQ C: VOUCHER 1 LẦN (Promotion)</a:t>
-                      </a:r>
-                    </a:p>
-                  </a:txBody>
-                  <a:tcPr>
-                    <a:solidFill>
-                      <a:srgbClr val="1677FF"/>
-                    </a:solidFill>
-                  </a:tcPr>
-                </a:tc>
-              </a:tr>
-              <a:tr h="1165860">
-                <a:tc>
-                  <a:txBody>
-                    <a:bodyPr/>
-                    <a:lstStyle/>
-                    <a:p>
-                      <a:pPr>
-                        <a:defRPr sz="950" b="1">
-                          <a:solidFill>
-                            <a:srgbClr val="0958D9"/>
-                          </a:solidFill>
-                        </a:defRPr>
-                      </a:pPr>
-                      <a:r>
-                        <a:t>Điểm làm tốt nổi bật</a:t>
-                      </a:r>
-                    </a:p>
-                  </a:txBody>
-                  <a:tcPr>
-                    <a:solidFill>
-                      <a:srgbClr val="F8FAFC"/>
-                    </a:solidFill>
-                  </a:tcPr>
-                </a:tc>
-                <a:tc>
-                  <a:txBody>
-                    <a:bodyPr/>
-                    <a:lstStyle/>
-                    <a:p>
-                      <a:pPr>
-                        <a:defRPr sz="950">
-                          <a:solidFill>
-                            <a:srgbClr val="1E293B"/>
-                          </a:solidFill>
-                        </a:defRPr>
-                      </a:pPr>
-                      <a:r>
-                        <a:t>• Phát hiện kẽ hở Force Logout / Thu hồi Token tức thì trên thiết bị khác.</a:t>
-                      </a:r>
-                      <a:br/>
-                      <a:r>
-                        <a:t>• Đặt câu hỏi Sliding Window đếm sai.</a:t>
-                      </a:r>
-                      <a:br/>
-                      <a:r>
-                        <a:t>• Liên kết BUG-001, BUG-003, BUG-008.</a:t>
-                      </a:r>
-                    </a:p>
-                  </a:txBody>
-                  <a:tcPr>
-                    <a:solidFill>
-                      <a:srgbClr val="FFFFFF"/>
-                    </a:solidFill>
-                  </a:tcPr>
-                </a:tc>
-                <a:tc>
-                  <a:txBody>
-                    <a:bodyPr/>
-                    <a:lstStyle/>
-                    <a:p>
-                      <a:pPr>
-                        <a:defRPr sz="950">
-                          <a:solidFill>
-                            <a:srgbClr val="1E293B"/>
-                          </a:solidFill>
-                        </a:defRPr>
-                      </a:pPr>
-                      <a:r>
-                        <a:t>• Phân biệt rõ Tồn kho vật lý vs Tồn kho khả dụng (Holding Window).</a:t>
-                      </a:r>
-                      <a:br/>
-                      <a:r>
-                        <a:t>• Thiết kế test Concurrency: 2 user tranh mua 1 hàng cuối (N=1) trong ≤50ms.</a:t>
-                      </a:r>
-                      <a:br/>
-                      <a:r>
-                        <a:t>• Ánh xạ BUG-005, BUG-007.</a:t>
-                      </a:r>
-                    </a:p>
-                  </a:txBody>
-                  <a:tcPr>
-                    <a:solidFill>
-                      <a:srgbClr val="FFFFFF"/>
-                    </a:solidFill>
-                  </a:tcPr>
-                </a:tc>
-                <a:tc>
-                  <a:txBody>
-                    <a:bodyPr/>
-                    <a:lstStyle/>
-                    <a:p>
-                      <a:pPr>
-                        <a:defRPr sz="950">
-                          <a:solidFill>
-                            <a:srgbClr val="1E293B"/>
-                          </a:solidFill>
-                        </a:defRPr>
-                      </a:pPr>
-                      <a:r>
-                        <a:t>• Bóc tách trọn vẹn Vòng đời Voucher &amp; Giao dịch bù trừ (Compensating Transaction) khi hủy đơn/timeout.</a:t>
-                      </a:r>
-                      <a:br/>
-                      <a:r>
-                        <a:t>• Bắt lỗi Race condition 2 tab đồng thời.</a:t>
-                      </a:r>
-                      <a:br/>
-                      <a:r>
-                        <a:t>• Ánh xạ BUG-003 chuẩn 100%.</a:t>
-                      </a:r>
-                    </a:p>
-                  </a:txBody>
-                  <a:tcPr>
-                    <a:solidFill>
-                      <a:srgbClr val="FFFFFF"/>
-                    </a:solidFill>
-                  </a:tcPr>
-                </a:tc>
-              </a:tr>
-              <a:tr h="1165860">
-                <a:tc>
-                  <a:txBody>
-                    <a:bodyPr/>
-                    <a:lstStyle/>
-                    <a:p>
-                      <a:pPr>
-                        <a:defRPr sz="950" b="1">
-                          <a:solidFill>
-                            <a:srgbClr val="0958D9"/>
-                          </a:solidFill>
-                        </a:defRPr>
-                      </a:pPr>
-                      <a:r>
-                        <a:t>Sai sót ban đầu phát hiện</a:t>
-                      </a:r>
-                    </a:p>
-                  </a:txBody>
-                  <a:tcPr>
-                    <a:solidFill>
-                      <a:srgbClr val="F8FAFC"/>
-                    </a:solidFill>
-                  </a:tcPr>
-                </a:tc>
-                <a:tc>
-                  <a:txBody>
-                    <a:bodyPr/>
-                    <a:lstStyle/>
-                    <a:p>
-                      <a:pPr>
-                        <a:defRPr sz="950">
-                          <a:solidFill>
-                            <a:srgbClr val="1E293B"/>
-                          </a:solidFill>
-                        </a:defRPr>
-                      </a:pPr>
-                      <a:r>
-                        <a:t>• Lạm dụng thuật ngữ hàn lâm (Lost Update, Redis INCR) khiến BA khó hiểu.</a:t>
-                      </a:r>
-                      <a:br/>
-                      <a:r>
-                        <a:t>• Bố cục dạng khối văn bản dài (Text Wall).</a:t>
-                      </a:r>
-                      <a:br/>
-                      <a:r>
-                        <a:t>• Bỏ sót kiểm tra Token trên service vệ tinh.</a:t>
-                      </a:r>
-                    </a:p>
-                  </a:txBody>
-                  <a:tcPr>
-                    <a:solidFill>
-                      <a:srgbClr val="FFFFFF"/>
-                    </a:solidFill>
-                  </a:tcPr>
-                </a:tc>
-                <a:tc>
-                  <a:txBody>
-                    <a:bodyPr/>
-                    <a:lstStyle/>
-                    <a:p>
-                      <a:pPr>
-                        <a:defRPr sz="950">
-                          <a:solidFill>
-                            <a:srgbClr val="1E293B"/>
-                          </a:solidFill>
-                        </a:defRPr>
-                      </a:pPr>
-                      <a:r>
-                        <a:t>• Gom cụm hành động: dồn chọn số lượng + checkout vào 1 bước.</a:t>
-                      </a:r>
-                      <a:br/>
-                      <a:r>
-                        <a:t>• Kỳ vọng API/DB sơ sài (chỉ ghi HTTP 200/400, không chỉ rõ tên bảng/cột).</a:t>
-                      </a:r>
-                      <a:br/>
-                      <a:r>
-                        <a:t>• Bảng Sheets ban đầu bị co rúm, xấu.</a:t>
-                      </a:r>
-                    </a:p>
-                  </a:txBody>
-                  <a:tcPr>
-                    <a:solidFill>
-                      <a:srgbClr val="FFFFFF"/>
-                    </a:solidFill>
-                  </a:tcPr>
-                </a:tc>
-                <a:tc>
-                  <a:txBody>
-                    <a:bodyPr/>
-                    <a:lstStyle/>
-                    <a:p>
-                      <a:pPr>
-                        <a:defRPr sz="950">
-                          <a:solidFill>
-                            <a:srgbClr val="1E293B"/>
-                          </a:solidFill>
-                        </a:defRPr>
-                      </a:pPr>
-                      <a:r>
-                        <a:t>• Bỏ sót chính sách hoàn tiền 1 phần khi mua nhiều món có áp voucher.</a:t>
-                      </a:r>
-                      <a:br/>
-                      <a:r>
-                        <a:t>• Bỏ sót nguy cơ kẹt voucher vĩnh viễn ở trạng thái tạm khóa (RESERVED) nếu cronjob timeout chết.</a:t>
-                      </a:r>
-                    </a:p>
-                  </a:txBody>
-                  <a:tcPr>
-                    <a:solidFill>
-                      <a:srgbClr val="FFFFFF"/>
-                    </a:solidFill>
-                  </a:tcPr>
-                </a:tc>
-              </a:tr>
-              <a:tr h="1165860">
-                <a:tc>
-                  <a:txBody>
-                    <a:bodyPr/>
-                    <a:lstStyle/>
-                    <a:p>
-                      <a:pPr>
-                        <a:defRPr sz="950" b="1">
-                          <a:solidFill>
-                            <a:srgbClr val="0958D9"/>
-                          </a:solidFill>
-                        </a:defRPr>
-                      </a:pPr>
-                      <a:r>
-                        <a:t>Cải tiến Prompt &amp; Code</a:t>
-                      </a:r>
-                    </a:p>
-                  </a:txBody>
-                  <a:tcPr>
-                    <a:solidFill>
-                      <a:srgbClr val="F8FAFC"/>
-                    </a:solidFill>
-                  </a:tcPr>
-                </a:tc>
-                <a:tc>
-                  <a:txBody>
-                    <a:bodyPr/>
-                    <a:lstStyle/>
-                    <a:p>
-                      <a:pPr>
-                        <a:defRPr sz="950">
-                          <a:solidFill>
-                            <a:srgbClr val="1E293B"/>
-                          </a:solidFill>
-                        </a:defRPr>
-                      </a:pPr>
-                      <a:r>
-                        <a:t>• Thêm cấu hình user_preferences.json ghi nhớ góc nhìn (business vs technical).</a:t>
-                      </a:r>
-                      <a:br/>
-                      <a:r>
-                        <a:t>• Tái cấu trúc sang dạng Thẻ &amp; Bảng Ma trận.</a:t>
-                      </a:r>
-                      <a:br/>
-                      <a:r>
-                        <a:t>• Bổ sung kịch bản kiểm tra Event thu hồi Token.</a:t>
-                      </a:r>
-                    </a:p>
-                  </a:txBody>
-                  <a:tcPr>
-                    <a:solidFill>
-                      <a:srgbClr val="FFFFFF"/>
-                    </a:solidFill>
-                  </a:tcPr>
-                </a:tc>
-                <a:tc>
-                  <a:txBody>
-                    <a:bodyPr/>
-                    <a:lstStyle/>
-                    <a:p>
-                      <a:pPr>
-                        <a:defRPr sz="950">
-                          <a:solidFill>
-                            <a:srgbClr val="1E293B"/>
-                          </a:solidFill>
-                        </a:defRPr>
-                      </a:pPr>
-                      <a:r>
-                        <a:t>• Đưa 3 Nguyên Tắc Vàng vào prompt &amp; AGENTS.md (Tách bước, Verify 3 tầng).</a:t>
-                      </a:r>
-                      <a:br/>
-                      <a:r>
-                        <a:t>• Viết script Styler Ant Design Blue tự động định dạng Sheets, thêm Dropdown Status.</a:t>
-                      </a:r>
-                    </a:p>
-                  </a:txBody>
-                  <a:tcPr>
-                    <a:solidFill>
-                      <a:srgbClr val="FFFFFF"/>
-                    </a:solidFill>
-                  </a:tcPr>
-                </a:tc>
-                <a:tc>
-                  <a:txBody>
-                    <a:bodyPr/>
-                    <a:lstStyle/>
-                    <a:p>
-                      <a:pPr>
-                        <a:defRPr sz="950">
-                          <a:solidFill>
-                            <a:srgbClr val="1E293B"/>
-                          </a:solidFill>
-                        </a:defRPr>
-                      </a:pPr>
-                      <a:r>
-                        <a:t>• Mở rộng risk-checklist.md thêm rủi ro Lifecycle Reversal &amp; Partial Refund.</a:t>
-                      </a:r>
-                      <a:br/>
-                      <a:r>
-                        <a:t>• Bổ sung kịch bản kiểm chứng khôi phục voucher tự động khi hết hạn giữ chỗ.</a:t>
-                      </a:r>
-                    </a:p>
-                  </a:txBody>
-                  <a:tcPr>
-                    <a:solidFill>
-                      <a:srgbClr val="FFFFFF"/>
-                    </a:solidFill>
-                  </a:tcPr>
-                </a:tc>
-              </a:tr>
-            </a:tbl>
-          </a:graphicData>
-        </a:graphic>
-      </p:graphicFrame>
+        </p:nvPicPr>
+        <p:blipFill>
+          <a:blip r:embed="rId2"/>
+          <a:stretch>
+            <a:fillRect/>
+          </a:stretch>
+        </p:blipFill>
+        <p:spPr>
+          <a:xfrm>
+            <a:off x="731520" y="1444752"/>
+            <a:ext cx="10728655" cy="4562856"/>
+          </a:xfrm>
+          <a:prstGeom prst="rect">
+            <a:avLst/>
+          </a:prstGeom>
+        </p:spPr>
+      </p:pic>
     </p:spTree>
   </p:cSld>
   <p:clrMapOvr>
@@ -5800,7 +7773,7 @@
         <p:spPr>
           <a:xfrm>
             <a:off x="0" y="0"/>
-            <a:ext cx="12191695" cy="109728"/>
+            <a:ext cx="12191695" cy="91440"/>
           </a:xfrm>
           <a:prstGeom prst="rect">
             <a:avLst/>
@@ -5842,8 +7815,8 @@
         </p:nvSpPr>
         <p:spPr>
           <a:xfrm>
-            <a:off x="731520" y="365760"/>
-            <a:ext cx="2011680" cy="320040"/>
+            <a:off x="731520" y="292608"/>
+            <a:ext cx="3291840" cy="292608"/>
           </a:xfrm>
           <a:prstGeom prst="roundRect">
             <a:avLst/>
@@ -5876,14 +7849,14 @@
           <a:lstStyle/>
           <a:p>
             <a:pPr algn="ctr">
-              <a:defRPr sz="1000" b="1">
+              <a:defRPr sz="950" b="1">
                 <a:solidFill>
                   <a:srgbClr val="0958D9"/>
                 </a:solidFill>
               </a:defRPr>
             </a:pPr>
             <a:r>
-              <a:t>5. THE 90-DAY ROADMAP</a:t>
+              <a:t>3B. ĐI SÂU PHA 1: REQ-RISK-ANALYST</a:t>
             </a:r>
           </a:p>
         </p:txBody>
@@ -5896,8 +7869,8 @@
         </p:nvSpPr>
         <p:spPr>
           <a:xfrm>
-            <a:off x="731520" y="777240"/>
-            <a:ext cx="10698480" cy="640080"/>
+            <a:off x="731520" y="621792"/>
+            <a:ext cx="10698480" cy="658368"/>
           </a:xfrm>
           <a:prstGeom prst="rect">
             <a:avLst/>
@@ -5911,585 +7884,54 @@
           <a:lstStyle/>
           <a:p>
             <a:pPr>
-              <a:defRPr sz="2200" b="1">
+              <a:defRPr sz="2000" b="1">
                 <a:solidFill>
                   <a:srgbClr val="1E293B"/>
                 </a:solidFill>
               </a:defRPr>
             </a:pPr>
             <a:r>
-              <a:t>Lộ Trình 3 Tháng: Nâng 2.5x Effort Của Team QA</a:t>
-            </a:r>
-          </a:p>
-          <a:p>
-            <a:pPr>
-              <a:defRPr sz="1200">
+              <a:t>Sơ Đồ Luồng Pha 1: Bóc Tách Yêu Cầu &amp; Quét 5 Rủi Ro Kỹ Thuật</a:t>
+            </a:r>
+          </a:p>
+          <a:p>
+            <a:pPr>
+              <a:defRPr sz="1050">
                 <a:solidFill>
                   <a:srgbClr val="64748B"/>
                 </a:solidFill>
               </a:defRPr>
             </a:pPr>
             <a:r>
-              <a:t>Kế hoạch triển khai thực chiến từng giai đoạn để biến AI thành bệ phóng năng suất cho toàn bộ QA Team.</a:t>
-            </a:r>
-          </a:p>
-        </p:txBody>
-      </p:sp>
-      <p:sp>
-        <p:nvSpPr>
-          <p:cNvPr id="5" name="Rounded Rectangle 4"/>
-          <p:cNvSpPr/>
+              <a:t>Sơ đồ luồng phân tích tĩnh: Bóc tách 4 thành tố, rẽ nhánh phát hiện kẽ hở BA, quét 5 rủi ro và điểm chặn cấm sinh test.</a:t>
+            </a:r>
+          </a:p>
+        </p:txBody>
+      </p:sp>
+      <p:pic>
+        <p:nvPicPr>
+          <p:cNvPr id="5" name="Picture 4" descr="flowchart_phase1.png"/>
+          <p:cNvPicPr>
+            <a:picLocks noChangeAspect="1"/>
+          </p:cNvPicPr>
           <p:nvPr/>
-        </p:nvSpPr>
+        </p:nvPicPr>
+        <p:blipFill>
+          <a:blip r:embed="rId2"/>
+          <a:stretch>
+            <a:fillRect/>
+          </a:stretch>
+        </p:blipFill>
         <p:spPr>
           <a:xfrm>
-            <a:off x="731520" y="1645920"/>
-            <a:ext cx="3383280" cy="4663440"/>
+            <a:off x="731520" y="1444752"/>
+            <a:ext cx="10728655" cy="4562856"/>
           </a:xfrm>
-          <a:prstGeom prst="roundRect">
+          <a:prstGeom prst="rect">
             <a:avLst/>
           </a:prstGeom>
-          <a:solidFill>
-            <a:srgbClr val="F8FAFC"/>
-          </a:solidFill>
-          <a:ln>
-            <a:solidFill>
-              <a:srgbClr val="CBD5E1"/>
-            </a:solidFill>
-          </a:ln>
         </p:spPr>
-        <p:style>
-          <a:lnRef idx="1">
-            <a:schemeClr val="accent1"/>
-          </a:lnRef>
-          <a:fillRef idx="3">
-            <a:schemeClr val="accent1"/>
-          </a:fillRef>
-          <a:effectRef idx="2">
-            <a:schemeClr val="accent1"/>
-          </a:effectRef>
-          <a:fontRef idx="minor">
-            <a:schemeClr val="lt1"/>
-          </a:fontRef>
-        </p:style>
-        <p:txBody>
-          <a:bodyPr rtlCol="0" anchor="ctr" wrap="square"/>
-          <a:lstStyle/>
-          <a:p>
-            <a:pPr algn="ctr">
-              <a:defRPr sz="1100" b="1">
-                <a:solidFill>
-                  <a:srgbClr val="1677FF"/>
-                </a:solidFill>
-              </a:defRPr>
-            </a:pPr>
-            <a:r>
-              <a:t>THÁNG 1: FOUNDATION &amp; BASELINE</a:t>
-            </a:r>
-          </a:p>
-          <a:p>
-            <a:pPr>
-              <a:spcAft>
-                <a:spcPts val="800"/>
-              </a:spcAft>
-              <a:defRPr sz="1300" b="1">
-                <a:solidFill>
-                  <a:srgbClr val="1E293B"/>
-                </a:solidFill>
-              </a:defRPr>
-            </a:pPr>
-            <a:r>
-              <a:t>Chuẩn Hóa Quy Trình &amp; Pilot Thử Nghiệm</a:t>
-            </a:r>
-          </a:p>
-          <a:p>
-            <a:pPr>
-              <a:defRPr sz="1000" b="1">
-                <a:solidFill>
-                  <a:srgbClr val="1E293B"/>
-                </a:solidFill>
-              </a:defRPr>
-            </a:pPr>
-            <a:r>
-              <a:t>• Xây dựng Golden Dataset:</a:t>
-            </a:r>
-          </a:p>
-          <a:p>
-            <a:pPr>
-              <a:spcAft>
-                <a:spcPts val="400"/>
-              </a:spcAft>
-              <a:defRPr sz="900">
-                <a:solidFill>
-                  <a:srgbClr val="64748B"/>
-                </a:solidFill>
-              </a:defRPr>
-            </a:pPr>
-            <a:r>
-              <a:t>Chuẩn bị 50 User Stories thực tế kèm kịch bản mẫu của dự án làm thước đo Ground Truth.</a:t>
-            </a:r>
-          </a:p>
-          <a:p>
-            <a:pPr>
-              <a:defRPr sz="1000" b="1">
-                <a:solidFill>
-                  <a:srgbClr val="1E293B"/>
-                </a:solidFill>
-              </a:defRPr>
-            </a:pPr>
-            <a:r>
-              <a:t>• Đóng gói Agentic Plugin:</a:t>
-            </a:r>
-          </a:p>
-          <a:p>
-            <a:pPr>
-              <a:spcAft>
-                <a:spcPts val="400"/>
-              </a:spcAft>
-              <a:defRPr sz="900">
-                <a:solidFill>
-                  <a:srgbClr val="64748B"/>
-                </a:solidFill>
-              </a:defRPr>
-            </a:pPr>
-            <a:r>
-              <a:t>Cài đặt bộ Rules, Skills, Subagents cho 1 Scrum Team (3-5 QA) thử nghiệm.</a:t>
-            </a:r>
-          </a:p>
-          <a:p>
-            <a:pPr>
-              <a:defRPr sz="1000" b="1">
-                <a:solidFill>
-                  <a:srgbClr val="1E293B"/>
-                </a:solidFill>
-              </a:defRPr>
-            </a:pPr>
-            <a:r>
-              <a:t>• Training &amp; Guideline:</a:t>
-            </a:r>
-          </a:p>
-          <a:p>
-            <a:pPr>
-              <a:spcAft>
-                <a:spcPts val="400"/>
-              </a:spcAft>
-              <a:defRPr sz="900">
-                <a:solidFill>
-                  <a:srgbClr val="64748B"/>
-                </a:solidFill>
-              </a:defRPr>
-            </a:pPr>
-            <a:r>
-              <a:t>Đào tạo QA cách review Phase 1, chất vấn BA và phê duyệt kịch bản giả lập.</a:t>
-            </a:r>
-          </a:p>
-          <a:p>
-            <a:pPr>
-              <a:defRPr sz="1000" b="1">
-                <a:solidFill>
-                  <a:srgbClr val="0958D9"/>
-                </a:solidFill>
-              </a:defRPr>
-            </a:pPr>
-            <a:r>
-              <a:t>• 🎯 KPI Tháng 1:</a:t>
-            </a:r>
-          </a:p>
-          <a:p>
-            <a:pPr>
-              <a:spcAft>
-                <a:spcPts val="400"/>
-              </a:spcAft>
-              <a:defRPr sz="900">
-                <a:solidFill>
-                  <a:srgbClr val="16A34A"/>
-                </a:solidFill>
-              </a:defRPr>
-            </a:pPr>
-            <a:r>
-              <a:t>• Độ chính xác dữ liệu ≥ 85%</a:t>
-            </a:r>
-            <a:br/>
-            <a:r>
-              <a:t>• Giảm 40% thời gian viết test case</a:t>
-            </a:r>
-            <a:br/>
-            <a:r>
-              <a:t>• Bắt sớm ít nhất 5 lỗi logic ngay khâu review requirement.</a:t>
-            </a:r>
-          </a:p>
-        </p:txBody>
-      </p:sp>
-      <p:sp>
-        <p:nvSpPr>
-          <p:cNvPr id="6" name="Rounded Rectangle 5"/>
-          <p:cNvSpPr/>
-          <p:nvPr/>
-        </p:nvSpPr>
-        <p:spPr>
-          <a:xfrm>
-            <a:off x="4389120" y="1645920"/>
-            <a:ext cx="3383280" cy="4663440"/>
-          </a:xfrm>
-          <a:prstGeom prst="roundRect">
-            <a:avLst/>
-          </a:prstGeom>
-          <a:solidFill>
-            <a:srgbClr val="F8FAFC"/>
-          </a:solidFill>
-          <a:ln>
-            <a:solidFill>
-              <a:srgbClr val="CBD5E1"/>
-            </a:solidFill>
-          </a:ln>
-        </p:spPr>
-        <p:style>
-          <a:lnRef idx="1">
-            <a:schemeClr val="accent1"/>
-          </a:lnRef>
-          <a:fillRef idx="3">
-            <a:schemeClr val="accent1"/>
-          </a:fillRef>
-          <a:effectRef idx="2">
-            <a:schemeClr val="accent1"/>
-          </a:effectRef>
-          <a:fontRef idx="minor">
-            <a:schemeClr val="lt1"/>
-          </a:fontRef>
-        </p:style>
-        <p:txBody>
-          <a:bodyPr rtlCol="0" anchor="ctr" wrap="square"/>
-          <a:lstStyle/>
-          <a:p>
-            <a:pPr algn="ctr">
-              <a:defRPr sz="1100" b="1">
-                <a:solidFill>
-                  <a:srgbClr val="0D9488"/>
-                </a:solidFill>
-              </a:defRPr>
-            </a:pPr>
-            <a:r>
-              <a:t>THÁNG 2: INTEGRATION &amp; SCALING</a:t>
-            </a:r>
-          </a:p>
-          <a:p>
-            <a:pPr>
-              <a:spcAft>
-                <a:spcPts val="800"/>
-              </a:spcAft>
-              <a:defRPr sz="1300" b="1">
-                <a:solidFill>
-                  <a:srgbClr val="1E293B"/>
-                </a:solidFill>
-              </a:defRPr>
-            </a:pPr>
-            <a:r>
-              <a:t>Tích Hợp Hệ Sinh Thái &amp; Mở Rộng</a:t>
-            </a:r>
-          </a:p>
-          <a:p>
-            <a:pPr>
-              <a:defRPr sz="1000" b="1">
-                <a:solidFill>
-                  <a:srgbClr val="1E293B"/>
-                </a:solidFill>
-              </a:defRPr>
-            </a:pPr>
-            <a:r>
-              <a:t>• Tích hợp Jira / Xray MCP:</a:t>
-            </a:r>
-          </a:p>
-          <a:p>
-            <a:pPr>
-              <a:spcAft>
-                <a:spcPts val="400"/>
-              </a:spcAft>
-              <a:defRPr sz="900">
-                <a:solidFill>
-                  <a:srgbClr val="64748B"/>
-                </a:solidFill>
-              </a:defRPr>
-            </a:pPr>
-            <a:r>
-              <a:t>Kết nối trực tiếp Jira để đọc Story Description và sync ngược Test Cases lên Xray/TestRail.</a:t>
-            </a:r>
-          </a:p>
-          <a:p>
-            <a:pPr>
-              <a:defRPr sz="1000" b="1">
-                <a:solidFill>
-                  <a:srgbClr val="1E293B"/>
-                </a:solidFill>
-              </a:defRPr>
-            </a:pPr>
-            <a:r>
-              <a:t>• Cơ chế Feedback Loop:</a:t>
-            </a:r>
-          </a:p>
-          <a:p>
-            <a:pPr>
-              <a:spcAft>
-                <a:spcPts val="400"/>
-              </a:spcAft>
-              <a:defRPr sz="900">
-                <a:solidFill>
-                  <a:srgbClr val="64748B"/>
-                </a:solidFill>
-              </a:defRPr>
-            </a:pPr>
-            <a:r>
-              <a:t>Thêm tính năng Upvote/Downvote test case để liên tục nắn chỉnh Prompt theo văn hóa công ty.</a:t>
-            </a:r>
-          </a:p>
-          <a:p>
-            <a:pPr>
-              <a:defRPr sz="1000" b="1">
-                <a:solidFill>
-                  <a:srgbClr val="1E293B"/>
-                </a:solidFill>
-              </a:defRPr>
-            </a:pPr>
-            <a:r>
-              <a:t>• Mở rộng ra toàn bộ QA Team:</a:t>
-            </a:r>
-          </a:p>
-          <a:p>
-            <a:pPr>
-              <a:spcAft>
-                <a:spcPts val="400"/>
-              </a:spcAft>
-              <a:defRPr sz="900">
-                <a:solidFill>
-                  <a:srgbClr val="64748B"/>
-                </a:solidFill>
-              </a:defRPr>
-            </a:pPr>
-            <a:r>
-              <a:t>Áp dụng cho 10-15 QA trên toàn bộ các squad.</a:t>
-            </a:r>
-          </a:p>
-          <a:p>
-            <a:pPr>
-              <a:defRPr sz="1000" b="1">
-                <a:solidFill>
-                  <a:srgbClr val="0D9488"/>
-                </a:solidFill>
-              </a:defRPr>
-            </a:pPr>
-            <a:r>
-              <a:t>• 🎯 KPI Tháng 2:</a:t>
-            </a:r>
-          </a:p>
-          <a:p>
-            <a:pPr>
-              <a:spcAft>
-                <a:spcPts val="400"/>
-              </a:spcAft>
-              <a:defRPr sz="900">
-                <a:solidFill>
-                  <a:srgbClr val="16A34A"/>
-                </a:solidFill>
-              </a:defRPr>
-            </a:pPr>
-            <a:r>
-              <a:t>• Độ chính xác dữ liệu ≥ 92%</a:t>
-            </a:r>
-            <a:br/>
-            <a:r>
-              <a:t>• Giảm 60% lead-time phân tích &amp; test design</a:t>
-            </a:r>
-            <a:br/>
-            <a:r>
-              <a:t>• Tăng gấp 3 lần số kịch bản Concurrency &amp; Edge-case được bao phủ.</a:t>
-            </a:r>
-          </a:p>
-        </p:txBody>
-      </p:sp>
-      <p:sp>
-        <p:nvSpPr>
-          <p:cNvPr id="7" name="Rounded Rectangle 6"/>
-          <p:cNvSpPr/>
-          <p:nvPr/>
-        </p:nvSpPr>
-        <p:spPr>
-          <a:xfrm>
-            <a:off x="8046720" y="1645920"/>
-            <a:ext cx="3383280" cy="4663440"/>
-          </a:xfrm>
-          <a:prstGeom prst="roundRect">
-            <a:avLst/>
-          </a:prstGeom>
-          <a:solidFill>
-            <a:srgbClr val="E6F4FF"/>
-          </a:solidFill>
-          <a:ln w="19050">
-            <a:solidFill>
-              <a:srgbClr val="1677FF"/>
-            </a:solidFill>
-          </a:ln>
-        </p:spPr>
-        <p:style>
-          <a:lnRef idx="1">
-            <a:schemeClr val="accent1"/>
-          </a:lnRef>
-          <a:fillRef idx="3">
-            <a:schemeClr val="accent1"/>
-          </a:fillRef>
-          <a:effectRef idx="2">
-            <a:schemeClr val="accent1"/>
-          </a:effectRef>
-          <a:fontRef idx="minor">
-            <a:schemeClr val="lt1"/>
-          </a:fontRef>
-        </p:style>
-        <p:txBody>
-          <a:bodyPr rtlCol="0" anchor="ctr" wrap="square"/>
-          <a:lstStyle/>
-          <a:p>
-            <a:pPr algn="ctr">
-              <a:defRPr sz="1100" b="1">
-                <a:solidFill>
-                  <a:srgbClr val="0958D9"/>
-                </a:solidFill>
-              </a:defRPr>
-            </a:pPr>
-            <a:r>
-              <a:t>THÁNG 3: AUTONOMOUS MULTIPLIER</a:t>
-            </a:r>
-          </a:p>
-          <a:p>
-            <a:pPr>
-              <a:spcAft>
-                <a:spcPts val="800"/>
-              </a:spcAft>
-              <a:defRPr sz="1300" b="1">
-                <a:solidFill>
-                  <a:srgbClr val="1E293B"/>
-                </a:solidFill>
-              </a:defRPr>
-            </a:pPr>
-            <a:r>
-              <a:t>Sinh Automation Code &amp; Đột Phá Effort</a:t>
-            </a:r>
-          </a:p>
-          <a:p>
-            <a:pPr>
-              <a:defRPr sz="1000" b="1">
-                <a:solidFill>
-                  <a:srgbClr val="1E293B"/>
-                </a:solidFill>
-              </a:defRPr>
-            </a:pPr>
-            <a:r>
-              <a:t>• Simulated to Executable Code:</a:t>
-            </a:r>
-          </a:p>
-          <a:p>
-            <a:pPr>
-              <a:spcAft>
-                <a:spcPts val="400"/>
-              </a:spcAft>
-              <a:defRPr sz="900">
-                <a:solidFill>
-                  <a:srgbClr val="64748B"/>
-                </a:solidFill>
-              </a:defRPr>
-            </a:pPr>
-            <a:r>
-              <a:t>Chuyển đổi các bước giả lập 3 tầng thành Playwright Script / k6 Load Script chạy trực tiếp.</a:t>
-            </a:r>
-          </a:p>
-          <a:p>
-            <a:pPr>
-              <a:defRPr sz="1000" b="1">
-                <a:solidFill>
-                  <a:srgbClr val="1E293B"/>
-                </a:solidFill>
-              </a:defRPr>
-            </a:pPr>
-            <a:r>
-              <a:t>• CI/CD Regression Trigger:</a:t>
-            </a:r>
-          </a:p>
-          <a:p>
-            <a:pPr>
-              <a:spcAft>
-                <a:spcPts val="400"/>
-              </a:spcAft>
-              <a:defRPr sz="900">
-                <a:solidFill>
-                  <a:srgbClr val="64748B"/>
-                </a:solidFill>
-              </a:defRPr>
-            </a:pPr>
-            <a:r>
-              <a:t>Tự động chạy test case P1 ngay khi Dev tạo Pull Request.</a:t>
-            </a:r>
-          </a:p>
-          <a:p>
-            <a:pPr>
-              <a:defRPr sz="1000" b="1">
-                <a:solidFill>
-                  <a:srgbClr val="1E293B"/>
-                </a:solidFill>
-              </a:defRPr>
-            </a:pPr>
-            <a:r>
-              <a:t>• Đo lường &amp; Báo cáo ROI:</a:t>
-            </a:r>
-          </a:p>
-          <a:p>
-            <a:pPr>
-              <a:spcAft>
-                <a:spcPts val="400"/>
-              </a:spcAft>
-              <a:defRPr sz="900">
-                <a:solidFill>
-                  <a:srgbClr val="64748B"/>
-                </a:solidFill>
-              </a:defRPr>
-            </a:pPr>
-            <a:r>
-              <a:t>Dashboard đo lường Defect Leakage Rate, QA Throughput và Man-hours saved.</a:t>
-            </a:r>
-          </a:p>
-          <a:p>
-            <a:pPr>
-              <a:defRPr sz="1000" b="1">
-                <a:solidFill>
-                  <a:srgbClr val="0958D9"/>
-                </a:solidFill>
-              </a:defRPr>
-            </a:pPr>
-            <a:r>
-              <a:t>• 🎯 KPI Tháng 3:</a:t>
-            </a:r>
-          </a:p>
-          <a:p>
-            <a:pPr>
-              <a:spcAft>
-                <a:spcPts val="400"/>
-              </a:spcAft>
-              <a:defRPr sz="900">
-                <a:solidFill>
-                  <a:srgbClr val="16A34A"/>
-                </a:solidFill>
-              </a:defRPr>
-            </a:pPr>
-            <a:r>
-              <a:t>• Nâng Effort (Throughput) Team lên GẤP 2.5X</a:t>
-            </a:r>
-            <a:br/>
-            <a:r>
-              <a:t>• Giảm 50% bug lọt sang môi trường Staging/Prod</a:t>
-            </a:r>
-            <a:br/>
-            <a:r>
-              <a:t>• Tiết kiệm 15-20 giờ làm việc/QA/sprint.</a:t>
-            </a:r>
-          </a:p>
-        </p:txBody>
-      </p:sp>
+      </p:pic>
     </p:spTree>
   </p:cSld>
   <p:clrMapOvr>
@@ -6517,7 +7959,7 @@
         <p:spPr>
           <a:xfrm>
             <a:off x="0" y="0"/>
-            <a:ext cx="12191695" cy="109728"/>
+            <a:ext cx="12191695" cy="91440"/>
           </a:xfrm>
           <a:prstGeom prst="rect">
             <a:avLst/>
@@ -6559,8 +8001,8 @@
         </p:nvSpPr>
         <p:spPr>
           <a:xfrm>
-            <a:off x="731520" y="365760"/>
-            <a:ext cx="2011680" cy="320040"/>
+            <a:off x="731520" y="292608"/>
+            <a:ext cx="3291840" cy="292608"/>
           </a:xfrm>
           <a:prstGeom prst="roundRect">
             <a:avLst/>
@@ -6593,14 +8035,14 @@
           <a:lstStyle/>
           <a:p>
             <a:pPr algn="ctr">
-              <a:defRPr sz="1000" b="1">
+              <a:defRPr sz="950" b="1">
                 <a:solidFill>
                   <a:srgbClr val="0958D9"/>
                 </a:solidFill>
               </a:defRPr>
             </a:pPr>
             <a:r>
-              <a:t>6. STRATEGIC CONCLUSION</a:t>
+              <a:t>3C. KIỂM SOÁT CON NGƯỜI (HUMAN-IN-THE-LOOP)</a:t>
             </a:r>
           </a:p>
         </p:txBody>
@@ -6613,8 +8055,8 @@
         </p:nvSpPr>
         <p:spPr>
           <a:xfrm>
-            <a:off x="731520" y="777240"/>
-            <a:ext cx="10698480" cy="640080"/>
+            <a:off x="731520" y="621792"/>
+            <a:ext cx="10698480" cy="658368"/>
           </a:xfrm>
           <a:prstGeom prst="rect">
             <a:avLst/>
@@ -6628,51 +8070,91 @@
           <a:lstStyle/>
           <a:p>
             <a:pPr>
-              <a:defRPr sz="2200" b="1">
+              <a:defRPr sz="2000" b="1">
                 <a:solidFill>
                   <a:srgbClr val="1E293B"/>
                 </a:solidFill>
               </a:defRPr>
             </a:pPr>
             <a:r>
-              <a:t>Kết Luận: Chuyển Dịch Vị Thế QA Từ 'Thủ Công' Sang 'AI Orchestrator'</a:t>
-            </a:r>
-          </a:p>
-          <a:p>
-            <a:pPr>
-              <a:defRPr sz="1200">
+              <a:t>Sơ Đồ Luồng Điểm Chặn: 2 Human Gates &amp; Cơ Chế Tự Động Rollback</a:t>
+            </a:r>
+          </a:p>
+          <a:p>
+            <a:pPr>
+              <a:defRPr sz="1050">
                 <a:solidFill>
                   <a:srgbClr val="64748B"/>
                 </a:solidFill>
               </a:defRPr>
             </a:pPr>
             <a:r>
-              <a:t>Giá trị mang lại cho đội ngũ và định hướng phát triển sự nghiệp tại doanh nghiệp.</a:t>
-            </a:r>
-          </a:p>
-        </p:txBody>
-      </p:sp>
-      <p:sp>
-        <p:nvSpPr>
-          <p:cNvPr id="5" name="Rounded Rectangle 4"/>
+              <a:t>Sơ đồ luồng quyết định của Tester: Duyệt logic Gate 1, nghiệm thu test Gate 2 và luồng Rollback xóa test case khi đổi spec.</a:t>
+            </a:r>
+          </a:p>
+        </p:txBody>
+      </p:sp>
+      <p:pic>
+        <p:nvPicPr>
+          <p:cNvPr id="5" name="Picture 4" descr="flowchart_gates.png"/>
+          <p:cNvPicPr>
+            <a:picLocks noChangeAspect="1"/>
+          </p:cNvPicPr>
+          <p:nvPr/>
+        </p:nvPicPr>
+        <p:blipFill>
+          <a:blip r:embed="rId2"/>
+          <a:stretch>
+            <a:fillRect/>
+          </a:stretch>
+        </p:blipFill>
+        <p:spPr>
+          <a:xfrm>
+            <a:off x="731520" y="1444752"/>
+            <a:ext cx="10728655" cy="4562856"/>
+          </a:xfrm>
+          <a:prstGeom prst="rect">
+            <a:avLst/>
+          </a:prstGeom>
+        </p:spPr>
+      </p:pic>
+    </p:spTree>
+  </p:cSld>
+  <p:clrMapOvr>
+    <a:masterClrMapping/>
+  </p:clrMapOvr>
+</p:sld>
+</file>
+
+<file path=ppt/slides/slide8.xml><?xml version="1.0" encoding="utf-8"?>
+<p:sld xmlns:a="http://schemas.openxmlformats.org/drawingml/2006/main" xmlns:p="http://schemas.openxmlformats.org/presentationml/2006/main" xmlns:r="http://schemas.openxmlformats.org/officeDocument/2006/relationships">
+  <p:cSld>
+    <p:spTree>
+      <p:nvGrpSpPr>
+        <p:cNvPr id="1" name=""/>
+        <p:cNvGrpSpPr/>
+        <p:nvPr/>
+      </p:nvGrpSpPr>
+      <p:grpSpPr/>
+      <p:sp>
+        <p:nvSpPr>
+          <p:cNvPr id="2" name="Rectangle 1"/>
           <p:cNvSpPr/>
           <p:nvPr/>
         </p:nvSpPr>
         <p:spPr>
           <a:xfrm>
-            <a:off x="731520" y="1645920"/>
-            <a:ext cx="3383280" cy="3657600"/>
+            <a:off x="0" y="0"/>
+            <a:ext cx="12191695" cy="91440"/>
           </a:xfrm>
-          <a:prstGeom prst="roundRect">
+          <a:prstGeom prst="rect">
             <a:avLst/>
           </a:prstGeom>
           <a:solidFill>
-            <a:srgbClr val="F8FAFC"/>
+            <a:srgbClr val="1677FF"/>
           </a:solidFill>
           <a:ln>
-            <a:solidFill>
-              <a:srgbClr val="CBD5E1"/>
-            </a:solidFill>
+            <a:noFill/>
           </a:ln>
         </p:spPr>
         <p:style>
@@ -6690,182 +8172,23 @@
           </a:fontRef>
         </p:style>
         <p:txBody>
-          <a:bodyPr rtlCol="0" anchor="ctr" wrap="square"/>
-          <a:lstStyle/>
-          <a:p>
-            <a:pPr algn="ctr">
-              <a:spcAft>
-                <a:spcPts val="1000"/>
-              </a:spcAft>
-              <a:defRPr sz="1200" b="1">
-                <a:solidFill>
-                  <a:srgbClr val="1677FF"/>
-                </a:solidFill>
-              </a:defRPr>
-            </a:pPr>
-            <a:r>
-              <a:t>🎯 TƯ DUY KIỂM ĐỊNH SỚM (SHIFT-LEFT)</a:t>
-            </a:r>
-          </a:p>
-          <a:p>
-            <a:pPr>
-              <a:spcAft>
-                <a:spcPts val="800"/>
-              </a:spcAft>
-              <a:defRPr sz="1050">
-                <a:solidFill>
-                  <a:srgbClr val="1E293B"/>
-                </a:solidFill>
-              </a:defRPr>
-            </a:pPr>
-            <a:r>
-              <a:t>• AI không chỉ giúp viết test nhanh hơn, mà giúp QA chặn đứng lỗi ngay từ khâu viết requirement.</a:t>
-            </a:r>
-          </a:p>
-          <a:p>
-            <a:pPr>
-              <a:spcAft>
-                <a:spcPts val="800"/>
-              </a:spcAft>
-              <a:defRPr sz="1050">
-                <a:solidFill>
-                  <a:srgbClr val="1E293B"/>
-                </a:solidFill>
-              </a:defRPr>
-            </a:pPr>
-            <a:r>
-              <a:t>• Bộ câu hỏi chất vấn BA sắc bén giúp cả team Dev &amp; Product cùng nhìn thấy góc khuất trước khi viết code.</a:t>
-            </a:r>
-          </a:p>
-          <a:p>
-            <a:pPr>
-              <a:spcAft>
-                <a:spcPts val="800"/>
-              </a:spcAft>
-              <a:defRPr sz="1050">
-                <a:solidFill>
-                  <a:srgbClr val="1E293B"/>
-                </a:solidFill>
-              </a:defRPr>
-            </a:pPr>
-            <a:r>
-              <a:t>• Chi phí sửa lỗi ở giai đoạn Requirement rẻ hơn gấp 10-30 lần so với sửa lỗi ở Production.</a:t>
-            </a:r>
-          </a:p>
-        </p:txBody>
-      </p:sp>
-      <p:sp>
-        <p:nvSpPr>
-          <p:cNvPr id="6" name="Rounded Rectangle 5"/>
+          <a:bodyPr rtlCol="0" anchor="ctr"/>
+          <a:lstStyle/>
+          <a:p>
+            <a:pPr algn="ctr"/>
+          </a:p>
+        </p:txBody>
+      </p:sp>
+      <p:sp>
+        <p:nvSpPr>
+          <p:cNvPr id="3" name="Rounded Rectangle 2"/>
           <p:cNvSpPr/>
           <p:nvPr/>
         </p:nvSpPr>
         <p:spPr>
           <a:xfrm>
-            <a:off x="4389120" y="1645920"/>
-            <a:ext cx="3383280" cy="3657600"/>
-          </a:xfrm>
-          <a:prstGeom prst="roundRect">
-            <a:avLst/>
-          </a:prstGeom>
-          <a:solidFill>
-            <a:srgbClr val="F8FAFC"/>
-          </a:solidFill>
-          <a:ln>
-            <a:solidFill>
-              <a:srgbClr val="CBD5E1"/>
-            </a:solidFill>
-          </a:ln>
-        </p:spPr>
-        <p:style>
-          <a:lnRef idx="1">
-            <a:schemeClr val="accent1"/>
-          </a:lnRef>
-          <a:fillRef idx="3">
-            <a:schemeClr val="accent1"/>
-          </a:fillRef>
-          <a:effectRef idx="2">
-            <a:schemeClr val="accent1"/>
-          </a:effectRef>
-          <a:fontRef idx="minor">
-            <a:schemeClr val="lt1"/>
-          </a:fontRef>
-        </p:style>
-        <p:txBody>
-          <a:bodyPr rtlCol="0" anchor="ctr" wrap="square"/>
-          <a:lstStyle/>
-          <a:p>
-            <a:pPr algn="ctr">
-              <a:spcAft>
-                <a:spcPts val="1000"/>
-              </a:spcAft>
-              <a:defRPr sz="1200" b="1">
-                <a:solidFill>
-                  <a:srgbClr val="16A34A"/>
-                </a:solidFill>
-              </a:defRPr>
-            </a:pPr>
-            <a:r>
-              <a:t>🛡️ DỮ LIỆU ĐÚNG ĐẮN LÀ TỐI THƯỢNG</a:t>
-            </a:r>
-          </a:p>
-          <a:p>
-            <a:pPr>
-              <a:spcAft>
-                <a:spcPts val="800"/>
-              </a:spcAft>
-              <a:defRPr sz="1050">
-                <a:solidFill>
-                  <a:srgbClr val="1E293B"/>
-                </a:solidFill>
-              </a:defRPr>
-            </a:pPr>
-            <a:r>
-              <a:t>• Không đánh đổi tốc độ lấy ảo giác (hallucination). Human-in-the-loop là nguyên tắc bất di bất dịch.</a:t>
-            </a:r>
-          </a:p>
-          <a:p>
-            <a:pPr>
-              <a:spcAft>
-                <a:spcPts val="800"/>
-              </a:spcAft>
-              <a:defRPr sz="1050">
-                <a:solidFill>
-                  <a:srgbClr val="1E293B"/>
-                </a:solidFill>
-              </a:defRPr>
-            </a:pPr>
-            <a:r>
-              <a:t>• Quy chuẩn kiểm chứng sâu 3 tầng (UI/API Body/DB Schema) giúp test case có thể tự động hóa ngay mà không cần làm lại.</a:t>
-            </a:r>
-          </a:p>
-          <a:p>
-            <a:pPr>
-              <a:spcAft>
-                <a:spcPts val="800"/>
-              </a:spcAft>
-              <a:defRPr sz="1050">
-                <a:solidFill>
-                  <a:srgbClr val="1E293B"/>
-                </a:solidFill>
-              </a:defRPr>
-            </a:pPr>
-            <a:r>
-              <a:t>• Cơ chế Local-First &amp; Cloud Sync giúp dữ liệu được tích lũy bền vững, không bao giờ mất mát.</a:t>
-            </a:r>
-          </a:p>
-        </p:txBody>
-      </p:sp>
-      <p:sp>
-        <p:nvSpPr>
-          <p:cNvPr id="7" name="Rounded Rectangle 6"/>
-          <p:cNvSpPr/>
-          <p:nvPr/>
-        </p:nvSpPr>
-        <p:spPr>
-          <a:xfrm>
-            <a:off x="8046720" y="1645920"/>
-            <a:ext cx="3383280" cy="3657600"/>
+            <a:off x="731520" y="292608"/>
+            <a:ext cx="3291840" cy="292608"/>
           </a:xfrm>
           <a:prstGeom prst="roundRect">
             <a:avLst/>
@@ -6873,7 +8196,7 @@
           <a:solidFill>
             <a:srgbClr val="E6F4FF"/>
           </a:solidFill>
-          <a:ln w="19050">
+          <a:ln w="12700">
             <a:solidFill>
               <a:srgbClr val="1677FF"/>
             </a:solidFill>
@@ -6898,84 +8221,168 @@
           <a:lstStyle/>
           <a:p>
             <a:pPr algn="ctr">
-              <a:spcAft>
-                <a:spcPts val="1000"/>
-              </a:spcAft>
-              <a:defRPr sz="1200" b="1">
+              <a:defRPr sz="950" b="1">
                 <a:solidFill>
                   <a:srgbClr val="0958D9"/>
                 </a:solidFill>
               </a:defRPr>
             </a:pPr>
             <a:r>
-              <a:t>🚀 NÂNG TẦM VỊ THẾ CỦA QA</a:t>
-            </a:r>
-          </a:p>
-          <a:p>
-            <a:pPr>
-              <a:spcAft>
-                <a:spcPts val="800"/>
-              </a:spcAft>
-              <a:defRPr sz="1050" b="1">
+              <a:t>3D. ĐI SÂU PHA 2: TEST-AUTOMATION-ARCHITECT</a:t>
+            </a:r>
+          </a:p>
+        </p:txBody>
+      </p:sp>
+      <p:sp>
+        <p:nvSpPr>
+          <p:cNvPr id="4" name="TextBox 3"/>
+          <p:cNvSpPr txBox="1"/>
+          <p:nvPr/>
+        </p:nvSpPr>
+        <p:spPr>
+          <a:xfrm>
+            <a:off x="731520" y="621792"/>
+            <a:ext cx="10698480" cy="658368"/>
+          </a:xfrm>
+          <a:prstGeom prst="rect">
+            <a:avLst/>
+          </a:prstGeom>
+          <a:noFill/>
+        </p:spPr>
+        <p:txBody>
+          <a:bodyPr wrap="square">
+            <a:spAutoFit/>
+          </a:bodyPr>
+          <a:lstStyle/>
+          <a:p>
+            <a:pPr>
+              <a:defRPr sz="2000" b="1">
                 <a:solidFill>
                   <a:srgbClr val="1E293B"/>
                 </a:solidFill>
               </a:defRPr>
             </a:pPr>
             <a:r>
-              <a:t>✔ QA không còn là 'người gõ test case thủ công' mà trở thành 'AI QA Orchestrator &amp; System Thinker'.</a:t>
-            </a:r>
-          </a:p>
-          <a:p>
-            <a:pPr>
-              <a:spcAft>
-                <a:spcPts val="800"/>
-              </a:spcAft>
-              <a:defRPr sz="1050" b="1">
-                <a:solidFill>
-                  <a:srgbClr val="1E293B"/>
-                </a:solidFill>
-              </a:defRPr>
-            </a:pPr>
-            <a:r>
-              <a:t>✔ Giải phóng 60% thời gian cơ bắp để QA tập trung vào Exploratory Testing, Security, Performance và AI Tuning.</a:t>
-            </a:r>
-          </a:p>
-          <a:p>
-            <a:pPr>
-              <a:spcAft>
-                <a:spcPts val="800"/>
-              </a:spcAft>
-              <a:defRPr sz="1050" b="1">
-                <a:solidFill>
-                  <a:srgbClr val="1E293B"/>
-                </a:solidFill>
-              </a:defRPr>
-            </a:pPr>
-            <a:r>
-              <a:t>✔ Sẵn sàng dẫn dắt team QA của quý công ty chuyển đổi số thành công bằng các công cụ AI thực chiến.</a:t>
-            </a:r>
-          </a:p>
-        </p:txBody>
-      </p:sp>
-      <p:sp>
-        <p:nvSpPr>
-          <p:cNvPr id="8" name="Rounded Rectangle 7"/>
+              <a:t>Sơ Đồ Luồng Pha 2: Thiết Kế Test Automation &amp; 3 Tầng Kiểm Chứng Sâu</a:t>
+            </a:r>
+          </a:p>
+          <a:p>
+            <a:pPr>
+              <a:defRPr sz="1050">
+                <a:solidFill>
+                  <a:srgbClr val="64748B"/>
+                </a:solidFill>
+              </a:defRPr>
+            </a:pPr>
+            <a:r>
+              <a:t>Sơ đồ luồng thiết kế kịch bản: Tách bước độc lập, rẽ nhánh 5 nhóm ma trận và kiểm chứng sâu UI + API Body + DB.</a:t>
+            </a:r>
+          </a:p>
+        </p:txBody>
+      </p:sp>
+      <p:pic>
+        <p:nvPicPr>
+          <p:cNvPr id="5" name="Picture 4" descr="flowchart_phase2.png"/>
+          <p:cNvPicPr>
+            <a:picLocks noChangeAspect="1"/>
+          </p:cNvPicPr>
+          <p:nvPr/>
+        </p:nvPicPr>
+        <p:blipFill>
+          <a:blip r:embed="rId2"/>
+          <a:stretch>
+            <a:fillRect/>
+          </a:stretch>
+        </p:blipFill>
+        <p:spPr>
+          <a:xfrm>
+            <a:off x="731520" y="1444752"/>
+            <a:ext cx="10728655" cy="4562856"/>
+          </a:xfrm>
+          <a:prstGeom prst="rect">
+            <a:avLst/>
+          </a:prstGeom>
+        </p:spPr>
+      </p:pic>
+    </p:spTree>
+  </p:cSld>
+  <p:clrMapOvr>
+    <a:masterClrMapping/>
+  </p:clrMapOvr>
+</p:sld>
+</file>
+
+<file path=ppt/slides/slide9.xml><?xml version="1.0" encoding="utf-8"?>
+<p:sld xmlns:a="http://schemas.openxmlformats.org/drawingml/2006/main" xmlns:p="http://schemas.openxmlformats.org/presentationml/2006/main" xmlns:r="http://schemas.openxmlformats.org/officeDocument/2006/relationships">
+  <p:cSld>
+    <p:spTree>
+      <p:nvGrpSpPr>
+        <p:cNvPr id="1" name=""/>
+        <p:cNvGrpSpPr/>
+        <p:nvPr/>
+      </p:nvGrpSpPr>
+      <p:grpSpPr/>
+      <p:sp>
+        <p:nvSpPr>
+          <p:cNvPr id="2" name="Rectangle 1"/>
           <p:cNvSpPr/>
           <p:nvPr/>
         </p:nvSpPr>
         <p:spPr>
           <a:xfrm>
-            <a:off x="731520" y="5486400"/>
-            <a:ext cx="10698480" cy="914400"/>
+            <a:off x="0" y="0"/>
+            <a:ext cx="12191695" cy="91440"/>
+          </a:xfrm>
+          <a:prstGeom prst="rect">
+            <a:avLst/>
+          </a:prstGeom>
+          <a:solidFill>
+            <a:srgbClr val="1677FF"/>
+          </a:solidFill>
+          <a:ln>
+            <a:noFill/>
+          </a:ln>
+        </p:spPr>
+        <p:style>
+          <a:lnRef idx="1">
+            <a:schemeClr val="accent1"/>
+          </a:lnRef>
+          <a:fillRef idx="3">
+            <a:schemeClr val="accent1"/>
+          </a:fillRef>
+          <a:effectRef idx="2">
+            <a:schemeClr val="accent1"/>
+          </a:effectRef>
+          <a:fontRef idx="minor">
+            <a:schemeClr val="lt1"/>
+          </a:fontRef>
+        </p:style>
+        <p:txBody>
+          <a:bodyPr rtlCol="0" anchor="ctr"/>
+          <a:lstStyle/>
+          <a:p>
+            <a:pPr algn="ctr"/>
+          </a:p>
+        </p:txBody>
+      </p:sp>
+      <p:sp>
+        <p:nvSpPr>
+          <p:cNvPr id="3" name="Rounded Rectangle 2"/>
+          <p:cNvSpPr/>
+          <p:nvPr/>
+        </p:nvSpPr>
+        <p:spPr>
+          <a:xfrm>
+            <a:off x="731520" y="292608"/>
+            <a:ext cx="3291840" cy="292608"/>
           </a:xfrm>
           <a:prstGeom prst="roundRect">
             <a:avLst/>
           </a:prstGeom>
           <a:solidFill>
-            <a:srgbClr val="0F172A"/>
+            <a:srgbClr val="E6F4FF"/>
           </a:solidFill>
-          <a:ln>
+          <a:ln w="12700">
             <a:solidFill>
               <a:srgbClr val="1677FF"/>
             </a:solidFill>
@@ -7000,30 +8407,89 @@
           <a:lstStyle/>
           <a:p>
             <a:pPr algn="ctr">
-              <a:defRPr sz="1200" b="1">
-                <a:solidFill>
-                  <a:srgbClr val="FFFFFF"/>
-                </a:solidFill>
-              </a:defRPr>
-            </a:pPr>
-            <a:r>
-              <a:t>💬 'Mục tiêu của tôi không phải là thay thế QA bằng AI, mà là biến mỗi QA trong team thành một Super QA có năng suất và tầm nhìn gấp 3 lần.'</a:t>
-            </a:r>
-          </a:p>
-          <a:p>
-            <a:pPr algn="ctr">
-              <a:defRPr sz="1100">
-                <a:solidFill>
-                  <a:srgbClr val="94A3B8"/>
-                </a:solidFill>
-              </a:defRPr>
-            </a:pPr>
-            <a:r>
-              <a:t>Sẵn sàng trao đổi chi tiết và thực chiến cùng quý công ty ngay ngày mai!</a:t>
-            </a:r>
-          </a:p>
-        </p:txBody>
-      </p:sp>
+              <a:defRPr sz="950" b="1">
+                <a:solidFill>
+                  <a:srgbClr val="0958D9"/>
+                </a:solidFill>
+              </a:defRPr>
+            </a:pPr>
+            <a:r>
+              <a:t>3E. ĐI SÂU PHA 3: WORKSPACE SYNC MANAGER</a:t>
+            </a:r>
+          </a:p>
+        </p:txBody>
+      </p:sp>
+      <p:sp>
+        <p:nvSpPr>
+          <p:cNvPr id="4" name="TextBox 3"/>
+          <p:cNvSpPr txBox="1"/>
+          <p:nvPr/>
+        </p:nvSpPr>
+        <p:spPr>
+          <a:xfrm>
+            <a:off x="731520" y="621792"/>
+            <a:ext cx="10698480" cy="658368"/>
+          </a:xfrm>
+          <a:prstGeom prst="rect">
+            <a:avLst/>
+          </a:prstGeom>
+          <a:noFill/>
+        </p:spPr>
+        <p:txBody>
+          <a:bodyPr wrap="square">
+            <a:spAutoFit/>
+          </a:bodyPr>
+          <a:lstStyle/>
+          <a:p>
+            <a:pPr>
+              <a:defRPr sz="2000" b="1">
+                <a:solidFill>
+                  <a:srgbClr val="1E293B"/>
+                </a:solidFill>
+              </a:defRPr>
+            </a:pPr>
+            <a:r>
+              <a:t>Sơ Đồ Luồng Pha 3: Cơ Chế Local-First &amp; Đồng Bộ Google Workspace 2 Chiều</a:t>
+            </a:r>
+          </a:p>
+          <a:p>
+            <a:pPr>
+              <a:defRPr sz="1050">
+                <a:solidFill>
+                  <a:srgbClr val="64748B"/>
+                </a:solidFill>
+              </a:defRPr>
+            </a:pPr>
+            <a:r>
+              <a:t>Sơ đồ luồng lưu trữ &amp; đồng bộ: Bước 1 Append local, Bước 2 Push Sheets qua MCP và Bước 3 Cập nhật cache metadata.</a:t>
+            </a:r>
+          </a:p>
+        </p:txBody>
+      </p:sp>
+      <p:pic>
+        <p:nvPicPr>
+          <p:cNvPr id="5" name="Picture 4" descr="flowchart_phase3.png"/>
+          <p:cNvPicPr>
+            <a:picLocks noChangeAspect="1"/>
+          </p:cNvPicPr>
+          <p:nvPr/>
+        </p:nvPicPr>
+        <p:blipFill>
+          <a:blip r:embed="rId2"/>
+          <a:stretch>
+            <a:fillRect/>
+          </a:stretch>
+        </p:blipFill>
+        <p:spPr>
+          <a:xfrm>
+            <a:off x="731520" y="1444752"/>
+            <a:ext cx="10728655" cy="4562856"/>
+          </a:xfrm>
+          <a:prstGeom prst="rect">
+            <a:avLst/>
+          </a:prstGeom>
+        </p:spPr>
+      </p:pic>
     </p:spTree>
   </p:cSld>
   <p:clrMapOvr>

--- a/docs/QA_Requirement_Assistant_Presentation.pptx
+++ b/docs/QA_Requirement_Assistant_Presentation.pptx
@@ -3193,8 +3193,8 @@
         </p:nvSpPr>
         <p:spPr>
           <a:xfrm>
-            <a:off x="731520" y="502920"/>
-            <a:ext cx="10698480" cy="1645920"/>
+            <a:off x="1097280" y="1828800"/>
+            <a:ext cx="9997135" cy="2743200"/>
           </a:xfrm>
           <a:prstGeom prst="rect">
             <a:avLst/>
@@ -3207,11 +3207,11 @@
           </a:bodyPr>
           <a:lstStyle/>
           <a:p>
-            <a:pPr>
-              <a:spcAft>
-                <a:spcPts val="400"/>
-              </a:spcAft>
-              <a:defRPr sz="1050" b="1">
+            <a:pPr algn="ctr">
+              <a:spcAft>
+                <a:spcPts val="1200"/>
+              </a:spcAft>
+              <a:defRPr sz="1200" b="1">
                 <a:solidFill>
                   <a:srgbClr val="0958D9"/>
                 </a:solidFill>
@@ -3222,11 +3222,11 @@
             </a:r>
           </a:p>
           <a:p>
-            <a:pPr>
-              <a:spcAft>
-                <a:spcPts val="400"/>
-              </a:spcAft>
-              <a:defRPr sz="2400" b="1">
+            <a:pPr algn="ctr">
+              <a:spcAft>
+                <a:spcPts val="1400"/>
+              </a:spcAft>
+              <a:defRPr sz="3000" b="1">
                 <a:solidFill>
                   <a:srgbClr val="1E293B"/>
                 </a:solidFill>
@@ -3241,8 +3241,8 @@
             </a:r>
           </a:p>
           <a:p>
-            <a:pPr>
-              <a:defRPr sz="1200">
+            <a:pPr algn="ctr">
+              <a:defRPr sz="1350">
                 <a:solidFill>
                   <a:srgbClr val="64748B"/>
                 </a:solidFill>
@@ -3262,8 +3262,8 @@
         </p:nvSpPr>
         <p:spPr>
           <a:xfrm>
-            <a:off x="731520" y="2331720"/>
-            <a:ext cx="10698480" cy="2377440"/>
+            <a:off x="2011680" y="4846320"/>
+            <a:ext cx="8168335" cy="685800"/>
           </a:xfrm>
           <a:prstGeom prst="roundRect">
             <a:avLst/>
@@ -3271,9 +3271,9 @@
           <a:solidFill>
             <a:srgbClr val="FFFFFF"/>
           </a:solidFill>
-          <a:ln w="19050">
+          <a:ln w="12700">
             <a:solidFill>
-              <a:srgbClr val="CBD5E1"/>
+              <a:srgbClr val="E2E8F0"/>
             </a:solidFill>
           </a:ln>
         </p:spPr>
@@ -3292,477 +3292,18 @@
           </a:fontRef>
         </p:style>
         <p:txBody>
-          <a:bodyPr rtlCol="0" anchor="ctr"/>
-          <a:lstStyle/>
-          <a:p>
-            <a:pPr algn="ctr"/>
-          </a:p>
-        </p:txBody>
-      </p:sp>
-      <p:sp>
-        <p:nvSpPr>
-          <p:cNvPr id="6" name="Rounded Rectangle 5"/>
-          <p:cNvSpPr/>
-          <p:nvPr/>
-        </p:nvSpPr>
-        <p:spPr>
-          <a:xfrm>
-            <a:off x="914400" y="2514600"/>
-            <a:ext cx="5029200" cy="2011680"/>
-          </a:xfrm>
-          <a:prstGeom prst="roundRect">
-            <a:avLst/>
-          </a:prstGeom>
-          <a:solidFill>
-            <a:srgbClr val="E6F4FF"/>
-          </a:solidFill>
-          <a:ln w="19050">
-            <a:solidFill>
-              <a:srgbClr val="1677FF"/>
-            </a:solidFill>
-          </a:ln>
-        </p:spPr>
-        <p:style>
-          <a:lnRef idx="1">
-            <a:schemeClr val="accent1"/>
-          </a:lnRef>
-          <a:fillRef idx="3">
-            <a:schemeClr val="accent1"/>
-          </a:fillRef>
-          <a:effectRef idx="2">
-            <a:schemeClr val="accent1"/>
-          </a:effectRef>
-          <a:fontRef idx="minor">
-            <a:schemeClr val="lt1"/>
-          </a:fontRef>
-        </p:style>
-        <p:txBody>
           <a:bodyPr rtlCol="0" anchor="ctr" wrap="square"/>
           <a:lstStyle/>
           <a:p>
             <a:pPr algn="ctr">
-              <a:spcAft>
-                <a:spcPts val="600"/>
-              </a:spcAft>
               <a:defRPr sz="1100" b="1">
                 <a:solidFill>
-                  <a:srgbClr val="0958D9"/>
-                </a:solidFill>
-              </a:defRPr>
-            </a:pPr>
-            <a:r>
-              <a:t>🤖 HỆ THỐNG ĐANG LÀM GÌ? (WHAT IT DOES)</a:t>
-            </a:r>
-          </a:p>
-          <a:p>
-            <a:pPr>
-              <a:spcAft>
-                <a:spcPts val="300"/>
-              </a:spcAft>
-              <a:defRPr sz="950">
-                <a:solidFill>
                   <a:srgbClr val="1E293B"/>
                 </a:solidFill>
               </a:defRPr>
             </a:pPr>
             <a:r>
-              <a:t>• Tiếp nhận tài liệu thô: User Story, PRD, API Swagger chưa rõ nét hoặc thiếu kịch bản biên.</a:t>
-            </a:r>
-          </a:p>
-          <a:p>
-            <a:pPr>
-              <a:spcAft>
-                <a:spcPts val="300"/>
-              </a:spcAft>
-              <a:defRPr sz="950">
-                <a:solidFill>
-                  <a:srgbClr val="1E293B"/>
-                </a:solidFill>
-              </a:defRPr>
-            </a:pPr>
-            <a:r>
-              <a:t>• Bóc tách 4 thành tố: Tự động phân tách Business Rules, Boundary Limits, Exceptions &amp; User Flow.</a:t>
-            </a:r>
-          </a:p>
-          <a:p>
-            <a:pPr>
-              <a:spcAft>
-                <a:spcPts val="300"/>
-              </a:spcAft>
-              <a:defRPr sz="950">
-                <a:solidFill>
-                  <a:srgbClr val="1E293B"/>
-                </a:solidFill>
-              </a:defRPr>
-            </a:pPr>
-            <a:r>
-              <a:t>• Quét 5 rủi ro kiến trúc: Phát hiện lỗi ngầm: Concurrency (&lt;=50ms), Lost Update, Deadlock, JWT Drift.</a:t>
-            </a:r>
-          </a:p>
-          <a:p>
-            <a:pPr>
-              <a:spcAft>
-                <a:spcPts val="300"/>
-              </a:spcAft>
-              <a:defRPr sz="950">
-                <a:solidFill>
-                  <a:srgbClr val="1E293B"/>
-                </a:solidFill>
-              </a:defRPr>
-            </a:pPr>
-            <a:r>
-              <a:t>• Thiết kế Test 3 tầng sâu: Sinh kịch bản tách bước kiểm chứng UI + API Body + DB &amp; Sync Google Sheets.</a:t>
-            </a:r>
-          </a:p>
-        </p:txBody>
-      </p:sp>
-      <p:sp>
-        <p:nvSpPr>
-          <p:cNvPr id="7" name="Rounded Rectangle 6"/>
-          <p:cNvSpPr/>
-          <p:nvPr/>
-        </p:nvSpPr>
-        <p:spPr>
-          <a:xfrm>
-            <a:off x="6217920" y="2514600"/>
-            <a:ext cx="5029200" cy="2011680"/>
-          </a:xfrm>
-          <a:prstGeom prst="roundRect">
-            <a:avLst/>
-          </a:prstGeom>
-          <a:solidFill>
-            <a:srgbClr val="DCFCE7"/>
-          </a:solidFill>
-          <a:ln w="19050">
-            <a:solidFill>
-              <a:srgbClr val="16A34A"/>
-            </a:solidFill>
-          </a:ln>
-        </p:spPr>
-        <p:style>
-          <a:lnRef idx="1">
-            <a:schemeClr val="accent1"/>
-          </a:lnRef>
-          <a:fillRef idx="3">
-            <a:schemeClr val="accent1"/>
-          </a:fillRef>
-          <a:effectRef idx="2">
-            <a:schemeClr val="accent1"/>
-          </a:effectRef>
-          <a:fontRef idx="minor">
-            <a:schemeClr val="lt1"/>
-          </a:fontRef>
-        </p:style>
-        <p:txBody>
-          <a:bodyPr rtlCol="0" anchor="ctr" wrap="square"/>
-          <a:lstStyle/>
-          <a:p>
-            <a:pPr algn="ctr">
-              <a:spcAft>
-                <a:spcPts val="600"/>
-              </a:spcAft>
-              <a:defRPr sz="1100" b="1">
-                <a:solidFill>
-                  <a:srgbClr val="15803D"/>
-                </a:solidFill>
-              </a:defRPr>
-            </a:pPr>
-            <a:r>
-              <a:t>🎯 NHIỆM VỤ TRỌNG TÂM CỦA HỆ THỐNG (SYSTEM MISSIONS)</a:t>
-            </a:r>
-          </a:p>
-          <a:p>
-            <a:pPr>
-              <a:spcAft>
-                <a:spcPts val="300"/>
-              </a:spcAft>
-              <a:defRPr sz="950">
-                <a:solidFill>
-                  <a:srgbClr val="1E293B"/>
-                </a:solidFill>
-              </a:defRPr>
-            </a:pPr>
-            <a:r>
-              <a:t>• Shift-Left QA: Chặn đứng 50% lỗi ngay từ khâu phân tích yêu cầu trước khi Dev code.</a:t>
-            </a:r>
-          </a:p>
-          <a:p>
-            <a:pPr>
-              <a:spcAft>
-                <a:spcPts val="300"/>
-              </a:spcAft>
-              <a:defRPr sz="950">
-                <a:solidFill>
-                  <a:srgbClr val="1E293B"/>
-                </a:solidFill>
-              </a:defRPr>
-            </a:pPr>
-            <a:r>
-              <a:t>• Giải phóng thao tác thủ công: Tự động hóa toàn diện khâu đọc hiểu tài liệu và soạn đặc tả kịch bản.</a:t>
-            </a:r>
-          </a:p>
-          <a:p>
-            <a:pPr>
-              <a:spcAft>
-                <a:spcPts val="300"/>
-              </a:spcAft>
-              <a:defRPr sz="950">
-                <a:solidFill>
-                  <a:srgbClr val="1E293B"/>
-                </a:solidFill>
-              </a:defRPr>
-            </a:pPr>
-            <a:r>
-              <a:t>• Triệt tiêu 100% ảo giác: Ép AI bám sát 10 bugs production thực tế, Tester phê duyệt qua 2 cổng.</a:t>
-            </a:r>
-          </a:p>
-          <a:p>
-            <a:pPr>
-              <a:spcAft>
-                <a:spcPts val="300"/>
-              </a:spcAft>
-              <a:defRPr sz="950">
-                <a:solidFill>
-                  <a:srgbClr val="1E293B"/>
-                </a:solidFill>
-              </a:defRPr>
-            </a:pPr>
-            <a:r>
-              <a:t>• Chuẩn hóa tài sản kiểm thử: Lưu trữ tích lũy bền vững và làm bệ phóng trực tiếp cho Playwright E2E.</a:t>
-            </a:r>
-          </a:p>
-        </p:txBody>
-      </p:sp>
-      <p:sp>
-        <p:nvSpPr>
-          <p:cNvPr id="8" name="Rounded Rectangle 7"/>
-          <p:cNvSpPr/>
-          <p:nvPr/>
-        </p:nvSpPr>
-        <p:spPr>
-          <a:xfrm>
-            <a:off x="731520" y="4892040"/>
-            <a:ext cx="3383280" cy="1371600"/>
-          </a:xfrm>
-          <a:prstGeom prst="roundRect">
-            <a:avLst/>
-          </a:prstGeom>
-          <a:solidFill>
-            <a:srgbClr val="FFFFFF"/>
-          </a:solidFill>
-          <a:ln w="19050">
-            <a:solidFill>
-              <a:srgbClr val="CBD5E1"/>
-            </a:solidFill>
-          </a:ln>
-        </p:spPr>
-        <p:style>
-          <a:lnRef idx="1">
-            <a:schemeClr val="accent1"/>
-          </a:lnRef>
-          <a:fillRef idx="3">
-            <a:schemeClr val="accent1"/>
-          </a:fillRef>
-          <a:effectRef idx="2">
-            <a:schemeClr val="accent1"/>
-          </a:effectRef>
-          <a:fontRef idx="minor">
-            <a:schemeClr val="lt1"/>
-          </a:fontRef>
-        </p:style>
-        <p:txBody>
-          <a:bodyPr rtlCol="0" anchor="ctr" wrap="square"/>
-          <a:lstStyle/>
-          <a:p>
-            <a:pPr algn="ctr">
-              <a:defRPr sz="950" b="1">
-                <a:solidFill>
-                  <a:srgbClr val="1677FF"/>
-                </a:solidFill>
-              </a:defRPr>
-            </a:pPr>
-            <a:r>
-              <a:t>🎯 ĐỘ CHÍNH XÁC DỮ LIỆU</a:t>
-            </a:r>
-          </a:p>
-          <a:p>
-            <a:pPr>
-              <a:defRPr sz="1800" b="1">
-                <a:solidFill>
-                  <a:srgbClr val="1E293B"/>
-                </a:solidFill>
-              </a:defRPr>
-            </a:pPr>
-            <a:r>
-              <a:t>≥ 92%</a:t>
-            </a:r>
-          </a:p>
-          <a:p>
-            <a:pPr>
-              <a:defRPr sz="950">
-                <a:solidFill>
-                  <a:srgbClr val="64748B"/>
-                </a:solidFill>
-              </a:defRPr>
-            </a:pPr>
-            <a:r>
-              <a:t>Kiểm chứng sâu 3 tầng, 0 ảo giác</a:t>
-            </a:r>
-          </a:p>
-        </p:txBody>
-      </p:sp>
-      <p:sp>
-        <p:nvSpPr>
-          <p:cNvPr id="9" name="Rounded Rectangle 8"/>
-          <p:cNvSpPr/>
-          <p:nvPr/>
-        </p:nvSpPr>
-        <p:spPr>
-          <a:xfrm>
-            <a:off x="4389120" y="4892040"/>
-            <a:ext cx="3383280" cy="1371600"/>
-          </a:xfrm>
-          <a:prstGeom prst="roundRect">
-            <a:avLst/>
-          </a:prstGeom>
-          <a:solidFill>
-            <a:srgbClr val="FFFFFF"/>
-          </a:solidFill>
-          <a:ln w="19050">
-            <a:solidFill>
-              <a:srgbClr val="CBD5E1"/>
-            </a:solidFill>
-          </a:ln>
-        </p:spPr>
-        <p:style>
-          <a:lnRef idx="1">
-            <a:schemeClr val="accent1"/>
-          </a:lnRef>
-          <a:fillRef idx="3">
-            <a:schemeClr val="accent1"/>
-          </a:fillRef>
-          <a:effectRef idx="2">
-            <a:schemeClr val="accent1"/>
-          </a:effectRef>
-          <a:fontRef idx="minor">
-            <a:schemeClr val="lt1"/>
-          </a:fontRef>
-        </p:style>
-        <p:txBody>
-          <a:bodyPr rtlCol="0" anchor="ctr" wrap="square"/>
-          <a:lstStyle/>
-          <a:p>
-            <a:pPr algn="ctr">
-              <a:defRPr sz="950" b="1">
-                <a:solidFill>
-                  <a:srgbClr val="16A34A"/>
-                </a:solidFill>
-              </a:defRPr>
-            </a:pPr>
-            <a:r>
-              <a:t>🛡️ CHẤT LƯỢNG RELEASE</a:t>
-            </a:r>
-          </a:p>
-          <a:p>
-            <a:pPr>
-              <a:defRPr sz="1800" b="1">
-                <a:solidFill>
-                  <a:srgbClr val="1E293B"/>
-                </a:solidFill>
-              </a:defRPr>
-            </a:pPr>
-            <a:r>
-              <a:t>Giảm 50% Defect</a:t>
-            </a:r>
-          </a:p>
-          <a:p>
-            <a:pPr>
-              <a:defRPr sz="950">
-                <a:solidFill>
-                  <a:srgbClr val="64748B"/>
-                </a:solidFill>
-              </a:defRPr>
-            </a:pPr>
-            <a:r>
-              <a:t>Chặn đứng lỗi sớm ngay khâu Spec</a:t>
-            </a:r>
-          </a:p>
-        </p:txBody>
-      </p:sp>
-      <p:sp>
-        <p:nvSpPr>
-          <p:cNvPr id="10" name="Rounded Rectangle 9"/>
-          <p:cNvSpPr/>
-          <p:nvPr/>
-        </p:nvSpPr>
-        <p:spPr>
-          <a:xfrm>
-            <a:off x="8046720" y="4892040"/>
-            <a:ext cx="3383280" cy="1371600"/>
-          </a:xfrm>
-          <a:prstGeom prst="roundRect">
-            <a:avLst/>
-          </a:prstGeom>
-          <a:solidFill>
-            <a:srgbClr val="FFFFFF"/>
-          </a:solidFill>
-          <a:ln w="19050">
-            <a:solidFill>
-              <a:srgbClr val="CBD5E1"/>
-            </a:solidFill>
-          </a:ln>
-        </p:spPr>
-        <p:style>
-          <a:lnRef idx="1">
-            <a:schemeClr val="accent1"/>
-          </a:lnRef>
-          <a:fillRef idx="3">
-            <a:schemeClr val="accent1"/>
-          </a:fillRef>
-          <a:effectRef idx="2">
-            <a:schemeClr val="accent1"/>
-          </a:effectRef>
-          <a:fontRef idx="minor">
-            <a:schemeClr val="lt1"/>
-          </a:fontRef>
-        </p:style>
-        <p:txBody>
-          <a:bodyPr rtlCol="0" anchor="ctr" wrap="square"/>
-          <a:lstStyle/>
-          <a:p>
-            <a:pPr algn="ctr">
-              <a:defRPr sz="950" b="1">
-                <a:solidFill>
-                  <a:srgbClr val="D97706"/>
-                </a:solidFill>
-              </a:defRPr>
-            </a:pPr>
-            <a:r>
-              <a:t>⚡ TỰ ĐỘNG HÓA QUY TRÌNH</a:t>
-            </a:r>
-          </a:p>
-          <a:p>
-            <a:pPr>
-              <a:defRPr sz="1800" b="1">
-                <a:solidFill>
-                  <a:srgbClr val="1E293B"/>
-                </a:solidFill>
-              </a:defRPr>
-            </a:pPr>
-            <a:r>
-              <a:t>80% Tác Vụ</a:t>
-            </a:r>
-          </a:p>
-          <a:p>
-            <a:pPr>
-              <a:defRPr sz="950">
-                <a:solidFill>
-                  <a:srgbClr val="64748B"/>
-                </a:solidFill>
-              </a:defRPr>
-            </a:pPr>
-            <a:r>
-              <a:t>Tự động hóa đọc hiểu &amp; viết test case</a:t>
+              <a:t>👤 Vũ Thị Mai Linh  •  🎯 AI QA Specialist  •  ⚡ Antigravity Native Plugin &amp; Google Workspace MCP</a:t>
             </a:r>
           </a:p>
         </p:txBody>
@@ -4000,9 +3541,9 @@
           <a:solidFill>
             <a:srgbClr val="FFFFFF"/>
           </a:solidFill>
-          <a:ln w="19050">
+          <a:ln w="12700">
             <a:solidFill>
-              <a:srgbClr val="CBD5E1"/>
+              <a:srgbClr val="E2E8F0"/>
             </a:solidFill>
           </a:ln>
         </p:spPr>
@@ -4153,9 +3694,9 @@
           <a:solidFill>
             <a:srgbClr val="FFFFFF"/>
           </a:solidFill>
-          <a:ln w="19050">
+          <a:ln w="12700">
             <a:solidFill>
-              <a:srgbClr val="CBD5E1"/>
+              <a:srgbClr val="E2E8F0"/>
             </a:solidFill>
           </a:ln>
         </p:spPr>
@@ -4306,9 +3847,9 @@
           <a:solidFill>
             <a:srgbClr val="FFFFFF"/>
           </a:solidFill>
-          <a:ln w="19050">
+          <a:ln w="12700">
             <a:solidFill>
-              <a:srgbClr val="CBD5E1"/>
+              <a:srgbClr val="E2E8F0"/>
             </a:solidFill>
           </a:ln>
         </p:spPr>
@@ -4621,9 +4162,9 @@
           <a:solidFill>
             <a:srgbClr val="FFFFFF"/>
           </a:solidFill>
-          <a:ln w="19050">
+          <a:ln w="12700">
             <a:solidFill>
-              <a:srgbClr val="1677FF"/>
+              <a:srgbClr val="E2E8F0"/>
             </a:solidFill>
           </a:ln>
         </p:spPr>
@@ -4774,9 +4315,9 @@
           <a:solidFill>
             <a:srgbClr val="FFFFFF"/>
           </a:solidFill>
-          <a:ln w="19050">
+          <a:ln w="12700">
             <a:solidFill>
-              <a:srgbClr val="0D9488"/>
+              <a:srgbClr val="E2E8F0"/>
             </a:solidFill>
           </a:ln>
         </p:spPr>
@@ -4927,9 +4468,9 @@
           <a:solidFill>
             <a:srgbClr val="FFFFFF"/>
           </a:solidFill>
-          <a:ln w="19050">
+          <a:ln w="12700">
             <a:solidFill>
-              <a:srgbClr val="16A34A"/>
+              <a:srgbClr val="E2E8F0"/>
             </a:solidFill>
           </a:ln>
         </p:spPr>
@@ -5242,9 +4783,9 @@
           <a:solidFill>
             <a:srgbClr val="FFFFFF"/>
           </a:solidFill>
-          <a:ln w="19050">
+          <a:ln w="12700">
             <a:solidFill>
-              <a:srgbClr val="1677FF"/>
+              <a:srgbClr val="E2E8F0"/>
             </a:solidFill>
           </a:ln>
         </p:spPr>
@@ -5359,9 +4900,9 @@
           <a:solidFill>
             <a:srgbClr val="FFFFFF"/>
           </a:solidFill>
-          <a:ln w="19050">
+          <a:ln w="12700">
             <a:solidFill>
-              <a:srgbClr val="0D9488"/>
+              <a:srgbClr val="E2E8F0"/>
             </a:solidFill>
           </a:ln>
         </p:spPr>
@@ -5476,9 +5017,9 @@
           <a:solidFill>
             <a:srgbClr val="FFFFFF"/>
           </a:solidFill>
-          <a:ln w="19050">
+          <a:ln w="12700">
             <a:solidFill>
-              <a:srgbClr val="16A34A"/>
+              <a:srgbClr val="E2E8F0"/>
             </a:solidFill>
           </a:ln>
         </p:spPr>
@@ -5593,9 +5134,9 @@
           <a:solidFill>
             <a:srgbClr val="E6F4FF"/>
           </a:solidFill>
-          <a:ln w="19050">
+          <a:ln w="12700">
             <a:solidFill>
-              <a:srgbClr val="1677FF"/>
+              <a:srgbClr val="E2E8F0"/>
             </a:solidFill>
           </a:ln>
         </p:spPr>
@@ -5821,9 +5362,9 @@
           <a:solidFill>
             <a:srgbClr val="FFFFFF"/>
           </a:solidFill>
-          <a:ln w="19050">
+          <a:ln w="12700">
             <a:solidFill>
-              <a:srgbClr val="1677FF"/>
+              <a:srgbClr val="E2E8F0"/>
             </a:solidFill>
           </a:ln>
         </p:spPr>
@@ -6016,9 +5557,9 @@
           <a:solidFill>
             <a:srgbClr val="FFFFFF"/>
           </a:solidFill>
-          <a:ln w="19050">
+          <a:ln w="12700">
             <a:solidFill>
-              <a:srgbClr val="7C3AED"/>
+              <a:srgbClr val="E2E8F0"/>
             </a:solidFill>
           </a:ln>
         </p:spPr>
@@ -6238,9 +5779,9 @@
           <a:solidFill>
             <a:srgbClr val="FFFFFF"/>
           </a:solidFill>
-          <a:ln w="19050">
+          <a:ln w="12700">
             <a:solidFill>
-              <a:srgbClr val="16A34A"/>
+              <a:srgbClr val="E2E8F0"/>
             </a:solidFill>
           </a:ln>
         </p:spPr>
@@ -6595,9 +6136,9 @@
           <a:solidFill>
             <a:srgbClr val="FFFFFF"/>
           </a:solidFill>
-          <a:ln w="19050">
+          <a:ln w="12700">
             <a:solidFill>
-              <a:srgbClr val="1677FF"/>
+              <a:srgbClr val="E2E8F0"/>
             </a:solidFill>
           </a:ln>
         </p:spPr>
@@ -6794,9 +6335,9 @@
           <a:solidFill>
             <a:srgbClr val="FFFFFF"/>
           </a:solidFill>
-          <a:ln w="19050">
+          <a:ln w="12700">
             <a:solidFill>
-              <a:srgbClr val="0D9488"/>
+              <a:srgbClr val="E2E8F0"/>
             </a:solidFill>
           </a:ln>
         </p:spPr>
@@ -6993,9 +6534,9 @@
           <a:solidFill>
             <a:srgbClr val="FFFFFF"/>
           </a:solidFill>
-          <a:ln w="19050">
+          <a:ln w="12700">
             <a:solidFill>
-              <a:srgbClr val="E11D48"/>
+              <a:srgbClr val="E2E8F0"/>
             </a:solidFill>
           </a:ln>
         </p:spPr>
@@ -7192,9 +6733,9 @@
           <a:solidFill>
             <a:srgbClr val="FFFFFF"/>
           </a:solidFill>
-          <a:ln w="19050">
+          <a:ln w="12700">
             <a:solidFill>
-              <a:srgbClr val="16A34A"/>
+              <a:srgbClr val="E2E8F0"/>
             </a:solidFill>
           </a:ln>
         </p:spPr>

--- a/docs/QA_Requirement_Assistant_Presentation.pptx
+++ b/docs/QA_Requirement_Assistant_Presentation.pptx
@@ -5340,7 +5340,7 @@
               </a:defRPr>
             </a:pPr>
             <a:r>
-              <a:t>Cơ chế tự động hóa toàn diện từ lúc nhận tài liệu yêu cầu thô đến khi xuất ra bộ test suite hoàn chỉnh.</a:t>
+              <a:t>Quy trình tự động từ lúc nhận yêu cầu ban đầu đến khi xuất ra bảng kịch bản kiểm thử hoàn chỉnh, dễ hiểu và dùng được ngay.</a:t>
             </a:r>
           </a:p>
         </p:txBody>
@@ -5412,7 +5412,7 @@
               </a:defRPr>
             </a:pPr>
             <a:r>
-              <a:t>Tiếp Nhận &amp; Đọc Hiểu Spec</a:t>
+              <a:t>Tiếp Nhận &amp; Đọc Hiểu Yêu Cầu</a:t>
             </a:r>
           </a:p>
           <a:p>
@@ -5427,7 +5427,7 @@
               </a:defRPr>
             </a:pPr>
             <a:r>
-              <a:t>Xử lý đa dạng mọi nguồn tài liệu dự án</a:t>
+              <a:t>Đọc hiểu linh hoạt mọi dạng tài liệu dự án</a:t>
             </a:r>
           </a:p>
           <a:p>
@@ -5439,7 +5439,7 @@
               </a:defRPr>
             </a:pPr>
             <a:r>
-              <a:t>📄 User Story &amp; Acceptance Criteria:</a:t>
+              <a:t>📄 Yêu cầu tính năng &amp; mong muốn người dùng:</a:t>
             </a:r>
           </a:p>
           <a:p>
@@ -5454,7 +5454,7 @@
               </a:defRPr>
             </a:pPr>
             <a:r>
-              <a:t>Đọc hiểu bối cảnh người dùng, tiêu chí nghiệm thu còn sơ sài hoặc diễn đạt mơ hồ.</a:t>
+              <a:t>Đọc hiểu bối cảnh và tiêu chí nghiệm thu kể cả khi diễn đạt còn mơ hồ, thiếu ý.</a:t>
             </a:r>
           </a:p>
           <a:p>
@@ -5466,7 +5466,7 @@
               </a:defRPr>
             </a:pPr>
             <a:r>
-              <a:t>📑 Tài liệu BA / PRD Chi Tiết:</a:t>
+              <a:t>📑 Tài liệu nghiệp vụ chi tiết:</a:t>
             </a:r>
           </a:p>
           <a:p>
@@ -5481,7 +5481,7 @@
               </a:defRPr>
             </a:pPr>
             <a:r>
-              <a:t>Phân tích tài liệu nghiệp vụ dài, phức tạp nhiều phân hệ chức năng.</a:t>
+              <a:t>Phân tích mạch lạc tài liệu quy trình kinh doanh dài và phức tạp của dự án.</a:t>
             </a:r>
           </a:p>
           <a:p>
@@ -5493,7 +5493,7 @@
               </a:defRPr>
             </a:pPr>
             <a:r>
-              <a:t>⚙️ API Swagger / JSON Schema:</a:t>
+              <a:t>⚙️ Thông số kỹ thuật &amp; cổng dữ liệu:</a:t>
             </a:r>
           </a:p>
           <a:p>
@@ -5508,7 +5508,7 @@
               </a:defRPr>
             </a:pPr>
             <a:r>
-              <a:t>Đọc hiểu method HTTP, headers, request body, query params và response schema.</a:t>
+              <a:t>Tự động hiểu cấu trúc thông tin gửi đi và kết quả hệ thống cần trả về.</a:t>
             </a:r>
           </a:p>
           <a:p>
@@ -5520,7 +5520,7 @@
               </a:defRPr>
             </a:pPr>
             <a:r>
-              <a:t>🧠 Bộ nhớ góc nhìn (user_preferences):</a:t>
+              <a:t>🧠 Tự điều chỉnh cách hành văn:</a:t>
             </a:r>
           </a:p>
           <a:p>
@@ -5535,7 +5535,7 @@
               </a:defRPr>
             </a:pPr>
             <a:r>
-              <a:t>Tự động điều chỉnh giọng văn phân tích: Business (dễ hiểu) vs Technical (chuyên sâu).</a:t>
+              <a:t>Linh hoạt dùng từ ngữ đời sống dễ hiểu cho Nghiệp vụ hoặc chuyên sâu cho Kỹ thuật.</a:t>
             </a:r>
           </a:p>
         </p:txBody>
@@ -5592,7 +5592,7 @@
               </a:defRPr>
             </a:pPr>
             <a:r>
-              <a:t>⚙️ GIAI ĐOẠN 2: TÁC VỤ THỰC HIỆN</a:t>
+              <a:t>⚙️ GIAI ĐOẠN 2: TỰ ĐỘNG XỬ LÝ</a:t>
             </a:r>
           </a:p>
           <a:p>
@@ -5607,7 +5607,7 @@
               </a:defRPr>
             </a:pPr>
             <a:r>
-              <a:t>Phân Tích, Phản Biện &amp; Thiết Kế</a:t>
+              <a:t>Phân Tích &amp; Soạn Kịch Bản</a:t>
             </a:r>
           </a:p>
           <a:p>
@@ -5622,7 +5622,7 @@
               </a:defRPr>
             </a:pPr>
             <a:r>
-              <a:t>5 tác vụ AI chuyên sâu thay thế công việc thủ công</a:t>
+              <a:t>Chỉ ra điểm thiếu sót và dựng kịch bản kiểm tra toàn diện</a:t>
             </a:r>
           </a:p>
           <a:p>
@@ -5634,7 +5634,7 @@
               </a:defRPr>
             </a:pPr>
             <a:r>
-              <a:t>📋 Bóc tách 4 thành tố cốt lõi:</a:t>
+              <a:t>📋 Phân tách quy tắc &amp; luồng hoạt động:</a:t>
             </a:r>
           </a:p>
           <a:p>
@@ -5649,7 +5649,7 @@
               </a:defRPr>
             </a:pPr>
             <a:r>
-              <a:t>Tự động phân tách Rules, Boundary Limits, Exception Flows và User Journey.</a:t>
+              <a:t>Tự động chỉ ra quy tắc đúng, giới hạn số liệu, trường hợp phát sinh lỗi và luồng người dùng.</a:t>
             </a:r>
           </a:p>
           <a:p>
@@ -5661,7 +5661,7 @@
               </a:defRPr>
             </a:pPr>
             <a:r>
-              <a:t>❓ Soạn câu hỏi phản biện cho BA:</a:t>
+              <a:t>❓ Đặt câu hỏi làm rõ điểm chưa rõ ràng:</a:t>
             </a:r>
           </a:p>
           <a:p>
@@ -5676,7 +5676,7 @@
               </a:defRPr>
             </a:pPr>
             <a:r>
-              <a:t>Chỉ ra các điểm hở tài liệu, mâu thuẫn logic để chốt sớm với BA/PO.</a:t>
+              <a:t>Tìm ra các kẽ hở logic, trường hợp bỏ sót để đội ngũ chốt sớm với nhau trước khi làm.</a:t>
             </a:r>
           </a:p>
           <a:p>
@@ -5688,7 +5688,7 @@
               </a:defRPr>
             </a:pPr>
             <a:r>
-              <a:t>🔍 Quét 5 rủi ro kiến trúc sâu:</a:t>
+              <a:t>🔍 Cảnh báo sớm các lỗi ngầm khó phát hiện:</a:t>
             </a:r>
           </a:p>
           <a:p>
@@ -5703,7 +5703,7 @@
               </a:defRPr>
             </a:pPr>
             <a:r>
-              <a:t>Race condition (&lt;=50ms), Lost Update, Concurrency Deadlock, JWT Drift, Clock Drift.</a:t>
+              <a:t>Dự đoán nguy cơ lỗi khi nhiều người cùng thao tác một lúc, trùng lặp đơn hàng hoặc phiên đăng nhập hết hạn.</a:t>
             </a:r>
           </a:p>
           <a:p>
@@ -5715,7 +5715,7 @@
               </a:defRPr>
             </a:pPr>
             <a:r>
-              <a:t>🗄️ Đối chiếu 10 Bugs Ground Truth:</a:t>
+              <a:t>🗄️ Soi chiếu với các lỗi thực tế hay gặp:</a:t>
             </a:r>
           </a:p>
           <a:p>
@@ -5730,7 +5730,7 @@
               </a:defRPr>
             </a:pPr>
             <a:r>
-              <a:t>Gắn mã Defect ID tương đồng từ kho bug thực tế để neo chuẩn logic.</a:t>
+              <a:t>Dùng kho lỗi phổ biến ngoài đời thực để nhắc nhở và không bỏ sót tình huống kiểm tra.</a:t>
             </a:r>
           </a:p>
           <a:p>
@@ -5742,7 +5742,7 @@
               </a:defRPr>
             </a:pPr>
             <a:r>
-              <a:t>💎 3 Nguyên Tắc Vàng QA:</a:t>
+              <a:t>💎 Kịch bản chi tiết, rõ ràng từng bước:</a:t>
             </a:r>
           </a:p>
           <a:p>
@@ -5757,7 +5757,7 @@
               </a:defRPr>
             </a:pPr>
             <a:r>
-              <a:t>Tách bước độc lập (Disaggregation), Verify 3 tầng sâu (UI/API/DB), Gán Status NOT_RUN.</a:t>
+              <a:t>Tách nhỏ từng thao tác, đối soát kỹ giao diện người dùng, đường truyền dữ liệu và cơ sở dữ liệu thật.</a:t>
             </a:r>
           </a:p>
         </p:txBody>
@@ -5814,7 +5814,7 @@
               </a:defRPr>
             </a:pPr>
             <a:r>
-              <a:t>📤 GIAI ĐOẠN 3: ĐẦU RA BÀN GIAO</a:t>
+              <a:t>📤 GIAI ĐOẠN 3: BÀN GIAO KẾT QUẢ</a:t>
             </a:r>
           </a:p>
           <a:p>
@@ -5829,7 +5829,7 @@
               </a:defRPr>
             </a:pPr>
             <a:r>
-              <a:t>Sản Phẩm Bàn Giao Sạch 100%</a:t>
+              <a:t>Bảng Kịch Bản Hoàn Chỉnh</a:t>
             </a:r>
           </a:p>
           <a:p>
@@ -5844,7 +5844,7 @@
               </a:defRPr>
             </a:pPr>
             <a:r>
-              <a:t>Trực quan hóa Google Sheets &amp; Lưu trữ bền vững</a:t>
+              <a:t>Trình bày trực quan trên Google Sheets, dùng được ngay</a:t>
             </a:r>
           </a:p>
           <a:p>
@@ -5856,7 +5856,7 @@
               </a:defRPr>
             </a:pPr>
             <a:r>
-              <a:t>📊 Google Sheets Master Ant Design Blue:</a:t>
+              <a:t>📊 Bảng kịch bản trực quan trên Google Sheets:</a:t>
             </a:r>
           </a:p>
           <a:p>
@@ -5871,7 +5871,7 @@
               </a:defRPr>
             </a:pPr>
             <a:r>
-              <a:t>Tự động ghi nối tiếp vào 2 tab Requirements &amp; Test Cases, Header xanh #1677FF, freeze row 1.</a:t>
+              <a:t>Tự động lưu trữ vào bảng tính chuẩn mực, phân mục rõ ràng, chuyên nghiệp và dễ xem.</a:t>
             </a:r>
           </a:p>
           <a:p>
@@ -5883,7 +5883,7 @@
               </a:defRPr>
             </a:pPr>
             <a:r>
-              <a:t>🎯 Dropdown Status &amp; Conditional Format:</a:t>
+              <a:t>🎯 Menu chọn kết quả tiện lợi:</a:t>
             </a:r>
           </a:p>
           <a:p>
@@ -5898,7 +5898,7 @@
               </a:defRPr>
             </a:pPr>
             <a:r>
-              <a:t>Menu chọn nhanh PASS/FAIL/BLOCKED/NOT_RUN tự đổi màu tiện lợi cho Tester.</a:t>
+              <a:t>Cho phép Tester bấm chọn Đạt / Không đạt / Đang chờ, tự động đổi màu trực quan khi làm việc.</a:t>
             </a:r>
           </a:p>
           <a:p>
@@ -5910,7 +5910,7 @@
               </a:defRPr>
             </a:pPr>
             <a:r>
-              <a:t>💾 Local-First Append-Only:</a:t>
+              <a:t>💾 Tích lũy liên tục, không lo mất lịch sử:</a:t>
             </a:r>
           </a:p>
           <a:p>
@@ -5925,7 +5925,7 @@
               </a:defRPr>
             </a:pPr>
             <a:r>
-              <a:t>Lưu tích lũy vào file JSON cục bộ, bảo toàn 100% lịch sử các sprint trước, cấm reset.</a:t>
+              <a:t>Tự động lưu nối tiếp các đợt kiểm thử mới mà không làm mất dữ liệu của các kỳ trước.</a:t>
             </a:r>
           </a:p>
           <a:p>
@@ -5937,7 +5937,7 @@
               </a:defRPr>
             </a:pPr>
             <a:r>
-              <a:t>🤖 Sẵn sàng Playwright E2E Automation:</a:t>
+              <a:t>🤖 Sẵn sàng đưa vào kiểm thử tự động:</a:t>
             </a:r>
           </a:p>
           <a:p>
@@ -5952,7 +5952,7 @@
               </a:defRPr>
             </a:pPr>
             <a:r>
-              <a:t>Kịch bản đã chia nhỏ bước, code tự động hóa ngay mà không cần viết lại.</a:t>
+              <a:t>Các bước kiểm tra được viết gãy gọn, giúp đội ngũ có thể cài đặt cho máy chạy tự động ngay.</a:t>
             </a:r>
           </a:p>
         </p:txBody>
